--- a/COURSE MATERIALS/Module 2_CSE2503.pptx
+++ b/COURSE MATERIALS/Module 2_CSE2503.pptx
@@ -5,80 +5,80 @@
     <p:sldMasterId id="2147483648" r:id="rId1"/>
   </p:sldMasterIdLst>
   <p:notesMasterIdLst>
-    <p:notesMasterId r:id="rId4"/>
+    <p:notesMasterId r:id="rId70"/>
   </p:notesMasterIdLst>
   <p:handoutMasterIdLst>
-    <p:handoutMasterId r:id="rId72"/>
+    <p:handoutMasterId r:id="rId71"/>
   </p:handoutMasterIdLst>
   <p:sldIdLst>
-    <p:sldId id="520" r:id="rId3"/>
-    <p:sldId id="596" r:id="rId5"/>
-    <p:sldId id="597" r:id="rId6"/>
-    <p:sldId id="619" r:id="rId7"/>
-    <p:sldId id="598" r:id="rId8"/>
-    <p:sldId id="609" r:id="rId9"/>
-    <p:sldId id="612" r:id="rId10"/>
-    <p:sldId id="613" r:id="rId11"/>
-    <p:sldId id="620" r:id="rId12"/>
-    <p:sldId id="621" r:id="rId13"/>
-    <p:sldId id="622" r:id="rId14"/>
-    <p:sldId id="624" r:id="rId15"/>
-    <p:sldId id="662" r:id="rId16"/>
-    <p:sldId id="663" r:id="rId17"/>
-    <p:sldId id="626" r:id="rId18"/>
-    <p:sldId id="664" r:id="rId19"/>
-    <p:sldId id="665" r:id="rId20"/>
-    <p:sldId id="628" r:id="rId21"/>
-    <p:sldId id="629" r:id="rId22"/>
-    <p:sldId id="667" r:id="rId23"/>
-    <p:sldId id="631" r:id="rId24"/>
-    <p:sldId id="666" r:id="rId25"/>
-    <p:sldId id="671" r:id="rId26"/>
-    <p:sldId id="632" r:id="rId27"/>
-    <p:sldId id="601" r:id="rId28"/>
-    <p:sldId id="608" r:id="rId29"/>
-    <p:sldId id="633" r:id="rId30"/>
-    <p:sldId id="639" r:id="rId31"/>
-    <p:sldId id="640" r:id="rId32"/>
-    <p:sldId id="641" r:id="rId33"/>
-    <p:sldId id="642" r:id="rId34"/>
-    <p:sldId id="643" r:id="rId35"/>
-    <p:sldId id="644" r:id="rId36"/>
-    <p:sldId id="645" r:id="rId37"/>
-    <p:sldId id="673" r:id="rId38"/>
-    <p:sldId id="674" r:id="rId39"/>
-    <p:sldId id="676" r:id="rId40"/>
-    <p:sldId id="672" r:id="rId41"/>
-    <p:sldId id="634" r:id="rId42"/>
-    <p:sldId id="661" r:id="rId43"/>
-    <p:sldId id="635" r:id="rId44"/>
-    <p:sldId id="636" r:id="rId45"/>
-    <p:sldId id="637" r:id="rId46"/>
-    <p:sldId id="638" r:id="rId47"/>
-    <p:sldId id="677" r:id="rId48"/>
-    <p:sldId id="678" r:id="rId49"/>
-    <p:sldId id="679" r:id="rId50"/>
-    <p:sldId id="680" r:id="rId51"/>
-    <p:sldId id="681" r:id="rId52"/>
-    <p:sldId id="646" r:id="rId53"/>
-    <p:sldId id="647" r:id="rId54"/>
-    <p:sldId id="648" r:id="rId55"/>
-    <p:sldId id="649" r:id="rId56"/>
-    <p:sldId id="650" r:id="rId57"/>
-    <p:sldId id="652" r:id="rId58"/>
-    <p:sldId id="653" r:id="rId59"/>
-    <p:sldId id="654" r:id="rId60"/>
-    <p:sldId id="655" r:id="rId61"/>
-    <p:sldId id="656" r:id="rId62"/>
-    <p:sldId id="657" r:id="rId63"/>
-    <p:sldId id="658" r:id="rId64"/>
-    <p:sldId id="659" r:id="rId65"/>
-    <p:sldId id="660" r:id="rId66"/>
-    <p:sldId id="594" r:id="rId67"/>
-    <p:sldId id="683" r:id="rId68"/>
-    <p:sldId id="682" r:id="rId69"/>
-    <p:sldId id="684" r:id="rId70"/>
-    <p:sldId id="567" r:id="rId71"/>
+    <p:sldId id="520" r:id="rId2"/>
+    <p:sldId id="596" r:id="rId3"/>
+    <p:sldId id="597" r:id="rId4"/>
+    <p:sldId id="619" r:id="rId5"/>
+    <p:sldId id="598" r:id="rId6"/>
+    <p:sldId id="609" r:id="rId7"/>
+    <p:sldId id="612" r:id="rId8"/>
+    <p:sldId id="613" r:id="rId9"/>
+    <p:sldId id="620" r:id="rId10"/>
+    <p:sldId id="621" r:id="rId11"/>
+    <p:sldId id="622" r:id="rId12"/>
+    <p:sldId id="624" r:id="rId13"/>
+    <p:sldId id="662" r:id="rId14"/>
+    <p:sldId id="663" r:id="rId15"/>
+    <p:sldId id="626" r:id="rId16"/>
+    <p:sldId id="664" r:id="rId17"/>
+    <p:sldId id="665" r:id="rId18"/>
+    <p:sldId id="628" r:id="rId19"/>
+    <p:sldId id="629" r:id="rId20"/>
+    <p:sldId id="667" r:id="rId21"/>
+    <p:sldId id="631" r:id="rId22"/>
+    <p:sldId id="666" r:id="rId23"/>
+    <p:sldId id="671" r:id="rId24"/>
+    <p:sldId id="632" r:id="rId25"/>
+    <p:sldId id="601" r:id="rId26"/>
+    <p:sldId id="608" r:id="rId27"/>
+    <p:sldId id="633" r:id="rId28"/>
+    <p:sldId id="639" r:id="rId29"/>
+    <p:sldId id="640" r:id="rId30"/>
+    <p:sldId id="641" r:id="rId31"/>
+    <p:sldId id="642" r:id="rId32"/>
+    <p:sldId id="643" r:id="rId33"/>
+    <p:sldId id="644" r:id="rId34"/>
+    <p:sldId id="645" r:id="rId35"/>
+    <p:sldId id="673" r:id="rId36"/>
+    <p:sldId id="674" r:id="rId37"/>
+    <p:sldId id="676" r:id="rId38"/>
+    <p:sldId id="672" r:id="rId39"/>
+    <p:sldId id="634" r:id="rId40"/>
+    <p:sldId id="661" r:id="rId41"/>
+    <p:sldId id="635" r:id="rId42"/>
+    <p:sldId id="636" r:id="rId43"/>
+    <p:sldId id="637" r:id="rId44"/>
+    <p:sldId id="638" r:id="rId45"/>
+    <p:sldId id="677" r:id="rId46"/>
+    <p:sldId id="678" r:id="rId47"/>
+    <p:sldId id="679" r:id="rId48"/>
+    <p:sldId id="680" r:id="rId49"/>
+    <p:sldId id="681" r:id="rId50"/>
+    <p:sldId id="646" r:id="rId51"/>
+    <p:sldId id="647" r:id="rId52"/>
+    <p:sldId id="648" r:id="rId53"/>
+    <p:sldId id="649" r:id="rId54"/>
+    <p:sldId id="650" r:id="rId55"/>
+    <p:sldId id="652" r:id="rId56"/>
+    <p:sldId id="653" r:id="rId57"/>
+    <p:sldId id="654" r:id="rId58"/>
+    <p:sldId id="655" r:id="rId59"/>
+    <p:sldId id="656" r:id="rId60"/>
+    <p:sldId id="657" r:id="rId61"/>
+    <p:sldId id="658" r:id="rId62"/>
+    <p:sldId id="659" r:id="rId63"/>
+    <p:sldId id="660" r:id="rId64"/>
+    <p:sldId id="594" r:id="rId65"/>
+    <p:sldId id="683" r:id="rId66"/>
+    <p:sldId id="682" r:id="rId67"/>
+    <p:sldId id="684" r:id="rId68"/>
+    <p:sldId id="567" r:id="rId69"/>
   </p:sldIdLst>
   <p:sldSz cx="12192000" cy="6858000"/>
   <p:notesSz cx="6858000" cy="9144000"/>
@@ -308,6 +308,7 @@
           <a:p>
             <a:fld id="{1D5163DD-12C9-4B8E-91F3-BECE4B548A1F}" type="datetimeFigureOut">
               <a:rPr lang="en-US" smtClean="0"/>
+              <a:t>2/6/2026</a:t>
             </a:fld>
             <a:endParaRPr lang="en-US"/>
           </a:p>
@@ -377,6 +378,7 @@
           <a:p>
             <a:fld id="{19884565-77A9-41BC-A3D1-C71554A711C1}" type="slidenum">
               <a:rPr lang="en-US" smtClean="0"/>
+              <a:t>‹#›</a:t>
             </a:fld>
             <a:endParaRPr lang="en-US"/>
           </a:p>
@@ -480,6 +482,7 @@
             </a:pPr>
             <a:fld id="{B35E0ABE-3FD2-4491-A84F-F5DF78F574D2}" type="datetimeFigureOut">
               <a:rPr lang="en-US"/>
+              <a:t>2/6/2026</a:t>
             </a:fld>
             <a:endParaRPr lang="en-US"/>
           </a:p>
@@ -547,7 +550,6 @@
               <a:rPr lang="en-US" noProof="0" smtClean="0"/>
               <a:t>Click to edit Master text styles</a:t>
             </a:r>
-            <a:endParaRPr lang="en-US" noProof="0" smtClean="0"/>
           </a:p>
           <a:p>
             <a:pPr lvl="1"/>
@@ -555,7 +557,6 @@
               <a:rPr lang="en-US" noProof="0" smtClean="0"/>
               <a:t>Second level</a:t>
             </a:r>
-            <a:endParaRPr lang="en-US" noProof="0" smtClean="0"/>
           </a:p>
           <a:p>
             <a:pPr lvl="2"/>
@@ -563,7 +564,6 @@
               <a:rPr lang="en-US" noProof="0" smtClean="0"/>
               <a:t>Third level</a:t>
             </a:r>
-            <a:endParaRPr lang="en-US" noProof="0" smtClean="0"/>
           </a:p>
           <a:p>
             <a:pPr lvl="3"/>
@@ -571,7 +571,6 @@
               <a:rPr lang="en-US" noProof="0" smtClean="0"/>
               <a:t>Fourth level</a:t>
             </a:r>
-            <a:endParaRPr lang="en-US" noProof="0" smtClean="0"/>
           </a:p>
           <a:p>
             <a:pPr lvl="4"/>
@@ -579,7 +578,6 @@
               <a:rPr lang="en-US" noProof="0" smtClean="0"/>
               <a:t>Fifth level</a:t>
             </a:r>
-            <a:endParaRPr lang="en-US" noProof="0" smtClean="0"/>
           </a:p>
         </p:txBody>
       </p:sp>
@@ -653,6 +651,7 @@
             </a:pPr>
             <a:fld id="{CDD763F7-5C11-4DBC-83B1-39D83E1FBE10}" type="slidenum">
               <a:rPr lang="en-US" altLang="en-US"/>
+              <a:t>‹#›</a:t>
             </a:fld>
             <a:endParaRPr lang="en-US" altLang="en-US"/>
           </a:p>
@@ -855,6 +854,7 @@
             </a:pPr>
             <a:fld id="{CDD763F7-5C11-4DBC-83B1-39D83E1FBE10}" type="slidenum">
               <a:rPr lang="en-US" altLang="en-US" smtClean="0"/>
+              <a:t>1</a:t>
             </a:fld>
             <a:endParaRPr lang="en-US" altLang="en-US"/>
           </a:p>
@@ -928,6 +928,7 @@
           <a:p>
             <a:fld id="{FF2BE670-627B-4710-A3DB-75C35D56B3B8}" type="slidenum">
               <a:rPr lang="en-US" altLang="en-US"/>
+              <a:t>18</a:t>
             </a:fld>
             <a:endParaRPr lang="en-US" altLang="en-US"/>
           </a:p>
@@ -1011,6 +1012,7 @@
           <a:p>
             <a:fld id="{FF2BE670-627B-4710-A3DB-75C35D56B3B8}" type="slidenum">
               <a:rPr lang="en-US" altLang="en-US"/>
+              <a:t>19</a:t>
             </a:fld>
             <a:endParaRPr lang="en-US" altLang="en-US"/>
           </a:p>
@@ -1094,6 +1096,7 @@
           <a:p>
             <a:fld id="{FF2BE670-627B-4710-A3DB-75C35D56B3B8}" type="slidenum">
               <a:rPr lang="en-US" altLang="en-US"/>
+              <a:t>21</a:t>
             </a:fld>
             <a:endParaRPr lang="en-US" altLang="en-US"/>
           </a:p>
@@ -1177,6 +1180,7 @@
           <a:p>
             <a:fld id="{EC933362-4C40-4F8C-85DA-0FC1AAFCA1F7}" type="slidenum">
               <a:rPr lang="en-US" altLang="en-US"/>
+              <a:t>25</a:t>
             </a:fld>
             <a:endParaRPr lang="en-US" altLang="en-US"/>
           </a:p>
@@ -1260,6 +1264,7 @@
           <a:p>
             <a:fld id="{EC933362-4C40-4F8C-85DA-0FC1AAFCA1F7}" type="slidenum">
               <a:rPr lang="en-US" altLang="en-US"/>
+              <a:t>26</a:t>
             </a:fld>
             <a:endParaRPr lang="en-US" altLang="en-US"/>
           </a:p>
@@ -1343,6 +1348,7 @@
           <a:p>
             <a:fld id="{FF2BE670-627B-4710-A3DB-75C35D56B3B8}" type="slidenum">
               <a:rPr lang="en-US" altLang="en-US"/>
+              <a:t>27</a:t>
             </a:fld>
             <a:endParaRPr lang="en-US" altLang="en-US"/>
           </a:p>
@@ -1426,6 +1432,7 @@
           <a:p>
             <a:fld id="{FF2BE670-627B-4710-A3DB-75C35D56B3B8}" type="slidenum">
               <a:rPr lang="en-US" altLang="en-US"/>
+              <a:t>28</a:t>
             </a:fld>
             <a:endParaRPr lang="en-US" altLang="en-US"/>
           </a:p>
@@ -1509,6 +1516,7 @@
           <a:p>
             <a:fld id="{FF2BE670-627B-4710-A3DB-75C35D56B3B8}" type="slidenum">
               <a:rPr lang="en-US" altLang="en-US"/>
+              <a:t>29</a:t>
             </a:fld>
             <a:endParaRPr lang="en-US" altLang="en-US"/>
           </a:p>
@@ -1592,6 +1600,7 @@
           <a:p>
             <a:fld id="{FF2BE670-627B-4710-A3DB-75C35D56B3B8}" type="slidenum">
               <a:rPr lang="en-US" altLang="en-US"/>
+              <a:t>30</a:t>
             </a:fld>
             <a:endParaRPr lang="en-US" altLang="en-US"/>
           </a:p>
@@ -1675,6 +1684,7 @@
           <a:p>
             <a:fld id="{FF2BE670-627B-4710-A3DB-75C35D56B3B8}" type="slidenum">
               <a:rPr lang="en-US" altLang="en-US"/>
+              <a:t>31</a:t>
             </a:fld>
             <a:endParaRPr lang="en-US" altLang="en-US"/>
           </a:p>
@@ -1758,6 +1768,7 @@
           <a:p>
             <a:fld id="{FF2BE670-627B-4710-A3DB-75C35D56B3B8}" type="slidenum">
               <a:rPr lang="en-US" altLang="en-US"/>
+              <a:t>5</a:t>
             </a:fld>
             <a:endParaRPr lang="en-US" altLang="en-US"/>
           </a:p>
@@ -1841,6 +1852,7 @@
           <a:p>
             <a:fld id="{FF2BE670-627B-4710-A3DB-75C35D56B3B8}" type="slidenum">
               <a:rPr lang="en-US" altLang="en-US"/>
+              <a:t>32</a:t>
             </a:fld>
             <a:endParaRPr lang="en-US" altLang="en-US"/>
           </a:p>
@@ -1924,6 +1936,7 @@
           <a:p>
             <a:fld id="{FF2BE670-627B-4710-A3DB-75C35D56B3B8}" type="slidenum">
               <a:rPr lang="en-US" altLang="en-US"/>
+              <a:t>33</a:t>
             </a:fld>
             <a:endParaRPr lang="en-US" altLang="en-US"/>
           </a:p>
@@ -2007,6 +2020,7 @@
           <a:p>
             <a:fld id="{FF2BE670-627B-4710-A3DB-75C35D56B3B8}" type="slidenum">
               <a:rPr lang="en-US" altLang="en-US"/>
+              <a:t>34</a:t>
             </a:fld>
             <a:endParaRPr lang="en-US" altLang="en-US"/>
           </a:p>
@@ -2090,6 +2104,7 @@
           <a:p>
             <a:fld id="{FF2BE670-627B-4710-A3DB-75C35D56B3B8}" type="slidenum">
               <a:rPr lang="en-US" altLang="en-US"/>
+              <a:t>39</a:t>
             </a:fld>
             <a:endParaRPr lang="en-US" altLang="en-US"/>
           </a:p>
@@ -2173,6 +2188,7 @@
           <a:p>
             <a:fld id="{FF2BE670-627B-4710-A3DB-75C35D56B3B8}" type="slidenum">
               <a:rPr lang="en-US" altLang="en-US"/>
+              <a:t>40</a:t>
             </a:fld>
             <a:endParaRPr lang="en-US" altLang="en-US"/>
           </a:p>
@@ -2256,6 +2272,7 @@
           <a:p>
             <a:fld id="{FF2BE670-627B-4710-A3DB-75C35D56B3B8}" type="slidenum">
               <a:rPr lang="en-US" altLang="en-US"/>
+              <a:t>41</a:t>
             </a:fld>
             <a:endParaRPr lang="en-US" altLang="en-US"/>
           </a:p>
@@ -2339,6 +2356,7 @@
           <a:p>
             <a:fld id="{FF2BE670-627B-4710-A3DB-75C35D56B3B8}" type="slidenum">
               <a:rPr lang="en-US" altLang="en-US"/>
+              <a:t>42</a:t>
             </a:fld>
             <a:endParaRPr lang="en-US" altLang="en-US"/>
           </a:p>
@@ -2422,6 +2440,7 @@
           <a:p>
             <a:fld id="{FF2BE670-627B-4710-A3DB-75C35D56B3B8}" type="slidenum">
               <a:rPr lang="en-US" altLang="en-US"/>
+              <a:t>43</a:t>
             </a:fld>
             <a:endParaRPr lang="en-US" altLang="en-US"/>
           </a:p>
@@ -2505,6 +2524,7 @@
           <a:p>
             <a:fld id="{FF2BE670-627B-4710-A3DB-75C35D56B3B8}" type="slidenum">
               <a:rPr lang="en-US" altLang="en-US"/>
+              <a:t>44</a:t>
             </a:fld>
             <a:endParaRPr lang="en-US" altLang="en-US"/>
           </a:p>
@@ -2588,6 +2608,7 @@
           <a:p>
             <a:fld id="{FF2BE670-627B-4710-A3DB-75C35D56B3B8}" type="slidenum">
               <a:rPr lang="en-US" altLang="en-US"/>
+              <a:t>51</a:t>
             </a:fld>
             <a:endParaRPr lang="en-US" altLang="en-US"/>
           </a:p>
@@ -2671,6 +2692,7 @@
           <a:p>
             <a:fld id="{73A665FF-A521-41CF-BC56-AB7489220B2E}" type="slidenum">
               <a:rPr lang="en-US" altLang="en-US"/>
+              <a:t>6</a:t>
             </a:fld>
             <a:endParaRPr lang="en-US" altLang="en-US"/>
           </a:p>
@@ -2754,6 +2776,7 @@
           <a:p>
             <a:fld id="{FF2BE670-627B-4710-A3DB-75C35D56B3B8}" type="slidenum">
               <a:rPr lang="en-US" altLang="en-US"/>
+              <a:t>52</a:t>
             </a:fld>
             <a:endParaRPr lang="en-US" altLang="en-US"/>
           </a:p>
@@ -2837,6 +2860,7 @@
           <a:p>
             <a:fld id="{FF2BE670-627B-4710-A3DB-75C35D56B3B8}" type="slidenum">
               <a:rPr lang="en-US" altLang="en-US"/>
+              <a:t>53</a:t>
             </a:fld>
             <a:endParaRPr lang="en-US" altLang="en-US"/>
           </a:p>
@@ -2920,6 +2944,7 @@
           <a:p>
             <a:fld id="{FF2BE670-627B-4710-A3DB-75C35D56B3B8}" type="slidenum">
               <a:rPr lang="en-US" altLang="en-US"/>
+              <a:t>54</a:t>
             </a:fld>
             <a:endParaRPr lang="en-US" altLang="en-US"/>
           </a:p>
@@ -3003,6 +3028,7 @@
           <a:p>
             <a:fld id="{FF2BE670-627B-4710-A3DB-75C35D56B3B8}" type="slidenum">
               <a:rPr lang="en-US" altLang="en-US"/>
+              <a:t>55</a:t>
             </a:fld>
             <a:endParaRPr lang="en-US" altLang="en-US"/>
           </a:p>
@@ -3086,6 +3112,7 @@
           <a:p>
             <a:fld id="{FF2BE670-627B-4710-A3DB-75C35D56B3B8}" type="slidenum">
               <a:rPr lang="en-US" altLang="en-US"/>
+              <a:t>56</a:t>
             </a:fld>
             <a:endParaRPr lang="en-US" altLang="en-US"/>
           </a:p>
@@ -3169,6 +3196,7 @@
           <a:p>
             <a:fld id="{FF2BE670-627B-4710-A3DB-75C35D56B3B8}" type="slidenum">
               <a:rPr lang="en-US" altLang="en-US"/>
+              <a:t>58</a:t>
             </a:fld>
             <a:endParaRPr lang="en-US" altLang="en-US"/>
           </a:p>
@@ -3252,6 +3280,7 @@
           <a:p>
             <a:fld id="{FF2BE670-627B-4710-A3DB-75C35D56B3B8}" type="slidenum">
               <a:rPr lang="en-US" altLang="en-US"/>
+              <a:t>59</a:t>
             </a:fld>
             <a:endParaRPr lang="en-US" altLang="en-US"/>
           </a:p>
@@ -3335,6 +3364,7 @@
           <a:p>
             <a:fld id="{FF2BE670-627B-4710-A3DB-75C35D56B3B8}" type="slidenum">
               <a:rPr lang="en-US" altLang="en-US"/>
+              <a:t>60</a:t>
             </a:fld>
             <a:endParaRPr lang="en-US" altLang="en-US"/>
           </a:p>
@@ -3418,6 +3448,7 @@
           <a:p>
             <a:fld id="{FF2BE670-627B-4710-A3DB-75C35D56B3B8}" type="slidenum">
               <a:rPr lang="en-US" altLang="en-US"/>
+              <a:t>61</a:t>
             </a:fld>
             <a:endParaRPr lang="en-US" altLang="en-US"/>
           </a:p>
@@ -3501,6 +3532,7 @@
           <a:p>
             <a:fld id="{FF2BE670-627B-4710-A3DB-75C35D56B3B8}" type="slidenum">
               <a:rPr lang="en-US" altLang="en-US"/>
+              <a:t>62</a:t>
             </a:fld>
             <a:endParaRPr lang="en-US" altLang="en-US"/>
           </a:p>
@@ -3584,6 +3616,7 @@
           <a:p>
             <a:fld id="{725895FC-29C7-4ADE-826E-62CB46B8CC48}" type="slidenum">
               <a:rPr lang="en-US" altLang="en-US"/>
+              <a:t>7</a:t>
             </a:fld>
             <a:endParaRPr lang="en-US" altLang="en-US"/>
           </a:p>
@@ -3667,6 +3700,7 @@
           <a:p>
             <a:fld id="{FF2BE670-627B-4710-A3DB-75C35D56B3B8}" type="slidenum">
               <a:rPr lang="en-US" altLang="en-US"/>
+              <a:t>63</a:t>
             </a:fld>
             <a:endParaRPr lang="en-US" altLang="en-US"/>
           </a:p>
@@ -3750,6 +3784,7 @@
           <a:p>
             <a:fld id="{E526D72E-F1D6-4620-AB30-F8C87BD5D7BB}" type="slidenum">
               <a:rPr lang="en-US" altLang="en-US"/>
+              <a:t>8</a:t>
             </a:fld>
             <a:endParaRPr lang="en-US" altLang="en-US"/>
           </a:p>
@@ -3833,6 +3868,7 @@
           <a:p>
             <a:fld id="{FF2BE670-627B-4710-A3DB-75C35D56B3B8}" type="slidenum">
               <a:rPr lang="en-US" altLang="en-US"/>
+              <a:t>10</a:t>
             </a:fld>
             <a:endParaRPr lang="en-US" altLang="en-US"/>
           </a:p>
@@ -3916,6 +3952,7 @@
           <a:p>
             <a:fld id="{FF2BE670-627B-4710-A3DB-75C35D56B3B8}" type="slidenum">
               <a:rPr lang="en-US" altLang="en-US"/>
+              <a:t>11</a:t>
             </a:fld>
             <a:endParaRPr lang="en-US" altLang="en-US"/>
           </a:p>
@@ -3999,6 +4036,7 @@
           <a:p>
             <a:fld id="{FF2BE670-627B-4710-A3DB-75C35D56B3B8}" type="slidenum">
               <a:rPr lang="en-US" altLang="en-US"/>
+              <a:t>12</a:t>
             </a:fld>
             <a:endParaRPr lang="en-US" altLang="en-US"/>
           </a:p>
@@ -4082,6 +4120,7 @@
           <a:p>
             <a:fld id="{FF2BE670-627B-4710-A3DB-75C35D56B3B8}" type="slidenum">
               <a:rPr lang="en-US" altLang="en-US"/>
+              <a:t>15</a:t>
             </a:fld>
             <a:endParaRPr lang="en-US" altLang="en-US"/>
           </a:p>
@@ -4269,6 +4308,7 @@
             </a:pPr>
             <a:fld id="{B338DF3D-30B5-4203-9F61-4DF4C93549F9}" type="datetime1">
               <a:rPr lang="en-US" smtClean="0"/>
+              <a:t>2/6/2026</a:t>
             </a:fld>
             <a:endParaRPr lang="en-US"/>
           </a:p>
@@ -4328,6 +4368,7 @@
             </a:pPr>
             <a:fld id="{772A8AC2-F0C4-4335-A6D7-C22D8A222454}" type="slidenum">
               <a:rPr lang="en-US" altLang="en-US"/>
+              <a:t>‹#›</a:t>
             </a:fld>
             <a:endParaRPr lang="en-US" altLang="en-US"/>
           </a:p>
@@ -4401,7 +4442,6 @@
               <a:rPr lang="en-US" smtClean="0"/>
               <a:t>Click to edit Master text styles</a:t>
             </a:r>
-            <a:endParaRPr lang="en-US" smtClean="0"/>
           </a:p>
           <a:p>
             <a:pPr lvl="1"/>
@@ -4409,7 +4449,6 @@
               <a:rPr lang="en-US" smtClean="0"/>
               <a:t>Second level</a:t>
             </a:r>
-            <a:endParaRPr lang="en-US" smtClean="0"/>
           </a:p>
           <a:p>
             <a:pPr lvl="2"/>
@@ -4417,7 +4456,6 @@
               <a:rPr lang="en-US" smtClean="0"/>
               <a:t>Third level</a:t>
             </a:r>
-            <a:endParaRPr lang="en-US" smtClean="0"/>
           </a:p>
           <a:p>
             <a:pPr lvl="3"/>
@@ -4425,7 +4463,6 @@
               <a:rPr lang="en-US" smtClean="0"/>
               <a:t>Fourth level</a:t>
             </a:r>
-            <a:endParaRPr lang="en-US" smtClean="0"/>
           </a:p>
           <a:p>
             <a:pPr lvl="4"/>
@@ -4461,6 +4498,7 @@
             </a:pPr>
             <a:fld id="{9EF852DC-FA04-43A8-808A-7B02012B408F}" type="datetime1">
               <a:rPr lang="en-US" smtClean="0"/>
+              <a:t>2/6/2026</a:t>
             </a:fld>
             <a:endParaRPr lang="en-US"/>
           </a:p>
@@ -4520,6 +4558,7 @@
             </a:pPr>
             <a:fld id="{9A110372-953E-4601-976C-D82CD9FCE073}" type="slidenum">
               <a:rPr lang="en-US" altLang="en-US"/>
+              <a:t>‹#›</a:t>
             </a:fld>
             <a:endParaRPr lang="en-US" altLang="en-US"/>
           </a:p>
@@ -4603,7 +4642,6 @@
               <a:rPr lang="en-US" smtClean="0"/>
               <a:t>Click to edit Master text styles</a:t>
             </a:r>
-            <a:endParaRPr lang="en-US" smtClean="0"/>
           </a:p>
           <a:p>
             <a:pPr lvl="1"/>
@@ -4611,7 +4649,6 @@
               <a:rPr lang="en-US" smtClean="0"/>
               <a:t>Second level</a:t>
             </a:r>
-            <a:endParaRPr lang="en-US" smtClean="0"/>
           </a:p>
           <a:p>
             <a:pPr lvl="2"/>
@@ -4619,7 +4656,6 @@
               <a:rPr lang="en-US" smtClean="0"/>
               <a:t>Third level</a:t>
             </a:r>
-            <a:endParaRPr lang="en-US" smtClean="0"/>
           </a:p>
           <a:p>
             <a:pPr lvl="3"/>
@@ -4627,7 +4663,6 @@
               <a:rPr lang="en-US" smtClean="0"/>
               <a:t>Fourth level</a:t>
             </a:r>
-            <a:endParaRPr lang="en-US" smtClean="0"/>
           </a:p>
           <a:p>
             <a:pPr lvl="4"/>
@@ -4663,6 +4698,7 @@
             </a:pPr>
             <a:fld id="{B2285DBF-07E6-4C04-8128-7BB2323544A4}" type="datetime1">
               <a:rPr lang="en-US" smtClean="0"/>
+              <a:t>2/6/2026</a:t>
             </a:fld>
             <a:endParaRPr lang="en-US"/>
           </a:p>
@@ -4722,6 +4758,7 @@
             </a:pPr>
             <a:fld id="{0BCDF80F-6F68-4B94-9701-0F2026993C48}" type="slidenum">
               <a:rPr lang="en-US" altLang="en-US"/>
+              <a:t>‹#›</a:t>
             </a:fld>
             <a:endParaRPr lang="en-US" altLang="en-US"/>
           </a:p>
@@ -4795,7 +4832,6 @@
               <a:rPr lang="en-US" smtClean="0"/>
               <a:t>Click to edit Master text styles</a:t>
             </a:r>
-            <a:endParaRPr lang="en-US" smtClean="0"/>
           </a:p>
           <a:p>
             <a:pPr lvl="1"/>
@@ -4803,7 +4839,6 @@
               <a:rPr lang="en-US" smtClean="0"/>
               <a:t>Second level</a:t>
             </a:r>
-            <a:endParaRPr lang="en-US" smtClean="0"/>
           </a:p>
           <a:p>
             <a:pPr lvl="2"/>
@@ -4811,7 +4846,6 @@
               <a:rPr lang="en-US" smtClean="0"/>
               <a:t>Third level</a:t>
             </a:r>
-            <a:endParaRPr lang="en-US" smtClean="0"/>
           </a:p>
           <a:p>
             <a:pPr lvl="3"/>
@@ -4819,7 +4853,6 @@
               <a:rPr lang="en-US" smtClean="0"/>
               <a:t>Fourth level</a:t>
             </a:r>
-            <a:endParaRPr lang="en-US" smtClean="0"/>
           </a:p>
           <a:p>
             <a:pPr lvl="4"/>
@@ -4855,6 +4888,7 @@
             </a:pPr>
             <a:fld id="{335B14D7-8BA9-4EE1-835E-4199F7C88E61}" type="datetime1">
               <a:rPr lang="en-US" smtClean="0"/>
+              <a:t>2/6/2026</a:t>
             </a:fld>
             <a:endParaRPr lang="en-US"/>
           </a:p>
@@ -4914,6 +4948,7 @@
             </a:pPr>
             <a:fld id="{A01CA5F2-CD08-4EF5-BAD9-872B7BB27165}" type="slidenum">
               <a:rPr lang="en-US" altLang="en-US"/>
+              <a:t>‹#›</a:t>
             </a:fld>
             <a:endParaRPr lang="en-US" altLang="en-US"/>
           </a:p>
@@ -5092,7 +5127,6 @@
               <a:rPr lang="en-US" smtClean="0"/>
               <a:t>Click to edit Master text styles</a:t>
             </a:r>
-            <a:endParaRPr lang="en-US" smtClean="0"/>
           </a:p>
         </p:txBody>
       </p:sp>
@@ -5120,6 +5154,7 @@
             </a:pPr>
             <a:fld id="{C04ACBE5-8387-44C2-8244-3C027748E0C1}" type="datetime1">
               <a:rPr lang="en-US" smtClean="0"/>
+              <a:t>2/6/2026</a:t>
             </a:fld>
             <a:endParaRPr lang="en-US"/>
           </a:p>
@@ -5179,6 +5214,7 @@
             </a:pPr>
             <a:fld id="{3CB43365-358E-4EFB-9D2F-D6778ADA2A33}" type="slidenum">
               <a:rPr lang="en-US" altLang="en-US"/>
+              <a:t>‹#›</a:t>
             </a:fld>
             <a:endParaRPr lang="en-US" altLang="en-US"/>
           </a:p>
@@ -5257,7 +5293,6 @@
               <a:rPr lang="en-US" smtClean="0"/>
               <a:t>Click to edit Master text styles</a:t>
             </a:r>
-            <a:endParaRPr lang="en-US" smtClean="0"/>
           </a:p>
           <a:p>
             <a:pPr lvl="1"/>
@@ -5265,7 +5300,6 @@
               <a:rPr lang="en-US" smtClean="0"/>
               <a:t>Second level</a:t>
             </a:r>
-            <a:endParaRPr lang="en-US" smtClean="0"/>
           </a:p>
           <a:p>
             <a:pPr lvl="2"/>
@@ -5273,7 +5307,6 @@
               <a:rPr lang="en-US" smtClean="0"/>
               <a:t>Third level</a:t>
             </a:r>
-            <a:endParaRPr lang="en-US" smtClean="0"/>
           </a:p>
           <a:p>
             <a:pPr lvl="3"/>
@@ -5281,7 +5314,6 @@
               <a:rPr lang="en-US" smtClean="0"/>
               <a:t>Fourth level</a:t>
             </a:r>
-            <a:endParaRPr lang="en-US" smtClean="0"/>
           </a:p>
           <a:p>
             <a:pPr lvl="4"/>
@@ -5318,7 +5350,6 @@
               <a:rPr lang="en-US" smtClean="0"/>
               <a:t>Click to edit Master text styles</a:t>
             </a:r>
-            <a:endParaRPr lang="en-US" smtClean="0"/>
           </a:p>
           <a:p>
             <a:pPr lvl="1"/>
@@ -5326,7 +5357,6 @@
               <a:rPr lang="en-US" smtClean="0"/>
               <a:t>Second level</a:t>
             </a:r>
-            <a:endParaRPr lang="en-US" smtClean="0"/>
           </a:p>
           <a:p>
             <a:pPr lvl="2"/>
@@ -5334,7 +5364,6 @@
               <a:rPr lang="en-US" smtClean="0"/>
               <a:t>Third level</a:t>
             </a:r>
-            <a:endParaRPr lang="en-US" smtClean="0"/>
           </a:p>
           <a:p>
             <a:pPr lvl="3"/>
@@ -5342,7 +5371,6 @@
               <a:rPr lang="en-US" smtClean="0"/>
               <a:t>Fourth level</a:t>
             </a:r>
-            <a:endParaRPr lang="en-US" smtClean="0"/>
           </a:p>
           <a:p>
             <a:pPr lvl="4"/>
@@ -5378,6 +5406,7 @@
             </a:pPr>
             <a:fld id="{BE333E74-61D9-4270-845E-08C577B4746D}" type="datetime1">
               <a:rPr lang="en-US" smtClean="0"/>
+              <a:t>2/6/2026</a:t>
             </a:fld>
             <a:endParaRPr lang="en-US"/>
           </a:p>
@@ -5437,6 +5466,7 @@
             </a:pPr>
             <a:fld id="{7061B66A-860D-4F77-A12A-57453AAB16AB}" type="slidenum">
               <a:rPr lang="en-US" altLang="en-US"/>
+              <a:t>‹#›</a:t>
             </a:fld>
             <a:endParaRPr lang="en-US" altLang="en-US"/>
           </a:p>
@@ -5557,7 +5587,6 @@
               <a:rPr lang="en-US" smtClean="0"/>
               <a:t>Click to edit Master text styles</a:t>
             </a:r>
-            <a:endParaRPr lang="en-US" smtClean="0"/>
           </a:p>
         </p:txBody>
       </p:sp>
@@ -5586,7 +5615,6 @@
               <a:rPr lang="en-US" smtClean="0"/>
               <a:t>Click to edit Master text styles</a:t>
             </a:r>
-            <a:endParaRPr lang="en-US" smtClean="0"/>
           </a:p>
           <a:p>
             <a:pPr lvl="1"/>
@@ -5594,7 +5622,6 @@
               <a:rPr lang="en-US" smtClean="0"/>
               <a:t>Second level</a:t>
             </a:r>
-            <a:endParaRPr lang="en-US" smtClean="0"/>
           </a:p>
           <a:p>
             <a:pPr lvl="2"/>
@@ -5602,7 +5629,6 @@
               <a:rPr lang="en-US" smtClean="0"/>
               <a:t>Third level</a:t>
             </a:r>
-            <a:endParaRPr lang="en-US" smtClean="0"/>
           </a:p>
           <a:p>
             <a:pPr lvl="3"/>
@@ -5610,7 +5636,6 @@
               <a:rPr lang="en-US" smtClean="0"/>
               <a:t>Fourth level</a:t>
             </a:r>
-            <a:endParaRPr lang="en-US" smtClean="0"/>
           </a:p>
           <a:p>
             <a:pPr lvl="4"/>
@@ -5684,7 +5709,6 @@
               <a:rPr lang="en-US" smtClean="0"/>
               <a:t>Click to edit Master text styles</a:t>
             </a:r>
-            <a:endParaRPr lang="en-US" smtClean="0"/>
           </a:p>
         </p:txBody>
       </p:sp>
@@ -5713,7 +5737,6 @@
               <a:rPr lang="en-US" smtClean="0"/>
               <a:t>Click to edit Master text styles</a:t>
             </a:r>
-            <a:endParaRPr lang="en-US" smtClean="0"/>
           </a:p>
           <a:p>
             <a:pPr lvl="1"/>
@@ -5721,7 +5744,6 @@
               <a:rPr lang="en-US" smtClean="0"/>
               <a:t>Second level</a:t>
             </a:r>
-            <a:endParaRPr lang="en-US" smtClean="0"/>
           </a:p>
           <a:p>
             <a:pPr lvl="2"/>
@@ -5729,7 +5751,6 @@
               <a:rPr lang="en-US" smtClean="0"/>
               <a:t>Third level</a:t>
             </a:r>
-            <a:endParaRPr lang="en-US" smtClean="0"/>
           </a:p>
           <a:p>
             <a:pPr lvl="3"/>
@@ -5737,7 +5758,6 @@
               <a:rPr lang="en-US" smtClean="0"/>
               <a:t>Fourth level</a:t>
             </a:r>
-            <a:endParaRPr lang="en-US" smtClean="0"/>
           </a:p>
           <a:p>
             <a:pPr lvl="4"/>
@@ -5773,6 +5793,7 @@
             </a:pPr>
             <a:fld id="{122D354B-A90F-4649-BCD0-7311B9A1E519}" type="datetime1">
               <a:rPr lang="en-US" smtClean="0"/>
+              <a:t>2/6/2026</a:t>
             </a:fld>
             <a:endParaRPr lang="en-US"/>
           </a:p>
@@ -5832,6 +5853,7 @@
             </a:pPr>
             <a:fld id="{F19E9FAA-A59B-4AE0-A044-7FE2AB03AB9B}" type="slidenum">
               <a:rPr lang="en-US" altLang="en-US"/>
+              <a:t>‹#›</a:t>
             </a:fld>
             <a:endParaRPr lang="en-US" altLang="en-US"/>
           </a:p>
@@ -5909,6 +5931,7 @@
             </a:pPr>
             <a:fld id="{F25BB299-A05B-4721-910A-149978AA2F99}" type="datetime1">
               <a:rPr lang="en-US" smtClean="0"/>
+              <a:t>2/6/2026</a:t>
             </a:fld>
             <a:endParaRPr lang="en-US"/>
           </a:p>
@@ -5968,6 +5991,7 @@
             </a:pPr>
             <a:fld id="{5FF55CBD-5A35-43A0-8B72-DFEEFFF78235}" type="slidenum">
               <a:rPr lang="en-US" altLang="en-US"/>
+              <a:t>‹#›</a:t>
             </a:fld>
             <a:endParaRPr lang="en-US" altLang="en-US"/>
           </a:p>
@@ -6022,6 +6046,7 @@
             </a:pPr>
             <a:fld id="{B485C664-8172-4B0B-91AD-99832E49CA68}" type="datetime1">
               <a:rPr lang="en-US" smtClean="0"/>
+              <a:t>2/6/2026</a:t>
             </a:fld>
             <a:endParaRPr lang="en-US"/>
           </a:p>
@@ -6081,6 +6106,7 @@
             </a:pPr>
             <a:fld id="{5EDAE260-203A-48BA-B1E0-2820BBC6B005}" type="slidenum">
               <a:rPr lang="en-US" altLang="en-US"/>
+              <a:t>‹#›</a:t>
             </a:fld>
             <a:endParaRPr lang="en-US" altLang="en-US"/>
           </a:p>
@@ -6196,7 +6222,6 @@
               <a:rPr lang="en-US" smtClean="0"/>
               <a:t>Click to edit Master text styles</a:t>
             </a:r>
-            <a:endParaRPr lang="en-US" smtClean="0"/>
           </a:p>
           <a:p>
             <a:pPr lvl="1"/>
@@ -6204,7 +6229,6 @@
               <a:rPr lang="en-US" smtClean="0"/>
               <a:t>Second level</a:t>
             </a:r>
-            <a:endParaRPr lang="en-US" smtClean="0"/>
           </a:p>
           <a:p>
             <a:pPr lvl="2"/>
@@ -6212,7 +6236,6 @@
               <a:rPr lang="en-US" smtClean="0"/>
               <a:t>Third level</a:t>
             </a:r>
-            <a:endParaRPr lang="en-US" smtClean="0"/>
           </a:p>
           <a:p>
             <a:pPr lvl="3"/>
@@ -6220,7 +6243,6 @@
               <a:rPr lang="en-US" smtClean="0"/>
               <a:t>Fourth level</a:t>
             </a:r>
-            <a:endParaRPr lang="en-US" smtClean="0"/>
           </a:p>
           <a:p>
             <a:pPr lvl="4"/>
@@ -6294,7 +6316,6 @@
               <a:rPr lang="en-US" smtClean="0"/>
               <a:t>Click to edit Master text styles</a:t>
             </a:r>
-            <a:endParaRPr lang="en-US" smtClean="0"/>
           </a:p>
         </p:txBody>
       </p:sp>
@@ -6322,6 +6343,7 @@
             </a:pPr>
             <a:fld id="{A39FEB66-1999-4885-9013-09B59463BA52}" type="datetime1">
               <a:rPr lang="en-US" smtClean="0"/>
+              <a:t>2/6/2026</a:t>
             </a:fld>
             <a:endParaRPr lang="en-US"/>
           </a:p>
@@ -6381,6 +6403,7 @@
             </a:pPr>
             <a:fld id="{4043378E-E05F-4D65-B4F7-A87FC0276302}" type="slidenum">
               <a:rPr lang="en-US" altLang="en-US"/>
+              <a:t>‹#›</a:t>
             </a:fld>
             <a:endParaRPr lang="en-US" altLang="en-US"/>
           </a:p>
@@ -6573,7 +6596,6 @@
               <a:rPr lang="en-US" smtClean="0"/>
               <a:t>Click to edit Master text styles</a:t>
             </a:r>
-            <a:endParaRPr lang="en-US" smtClean="0"/>
           </a:p>
         </p:txBody>
       </p:sp>
@@ -6601,6 +6623,7 @@
             </a:pPr>
             <a:fld id="{E228574B-A9ED-4C5D-BC0D-2EE4E2CF73B9}" type="datetime1">
               <a:rPr lang="en-US" smtClean="0"/>
+              <a:t>2/6/2026</a:t>
             </a:fld>
             <a:endParaRPr lang="en-US"/>
           </a:p>
@@ -6660,6 +6683,7 @@
             </a:pPr>
             <a:fld id="{7D2A09E5-A14B-4738-A48E-EF064E453217}" type="slidenum">
               <a:rPr lang="en-US" altLang="en-US"/>
+              <a:t>‹#›</a:t>
             </a:fld>
             <a:endParaRPr lang="en-US" altLang="en-US"/>
           </a:p>
@@ -6746,7 +6770,6 @@
               <a:rPr lang="en-US" smtClean="0"/>
               <a:t>Click to edit Master title style</a:t>
             </a:r>
-            <a:endParaRPr lang="en-US" smtClean="0"/>
           </a:p>
         </p:txBody>
       </p:sp>
@@ -6801,7 +6824,6 @@
               <a:rPr lang="en-US" smtClean="0"/>
               <a:t>Click to edit Master text styles</a:t>
             </a:r>
-            <a:endParaRPr lang="en-US" smtClean="0"/>
           </a:p>
           <a:p>
             <a:pPr lvl="1"/>
@@ -6809,7 +6831,6 @@
               <a:rPr lang="en-US" smtClean="0"/>
               <a:t>Second level</a:t>
             </a:r>
-            <a:endParaRPr lang="en-US" smtClean="0"/>
           </a:p>
           <a:p>
             <a:pPr lvl="2"/>
@@ -6817,7 +6838,6 @@
               <a:rPr lang="en-US" smtClean="0"/>
               <a:t>Third level</a:t>
             </a:r>
-            <a:endParaRPr lang="en-US" smtClean="0"/>
           </a:p>
           <a:p>
             <a:pPr lvl="3"/>
@@ -6825,7 +6845,6 @@
               <a:rPr lang="en-US" smtClean="0"/>
               <a:t>Fourth level</a:t>
             </a:r>
-            <a:endParaRPr lang="en-US" smtClean="0"/>
           </a:p>
           <a:p>
             <a:pPr lvl="4"/>
@@ -6833,7 +6852,6 @@
               <a:rPr lang="en-US" smtClean="0"/>
               <a:t>Fifth level</a:t>
             </a:r>
-            <a:endParaRPr lang="en-US" smtClean="0"/>
           </a:p>
         </p:txBody>
       </p:sp>
@@ -6875,6 +6893,7 @@
             </a:pPr>
             <a:fld id="{7290EFBF-FDBC-4E11-8D09-14402F29F22D}" type="datetime1">
               <a:rPr lang="en-US" smtClean="0"/>
+              <a:t>2/6/2026</a:t>
             </a:fld>
             <a:endParaRPr lang="en-US"/>
           </a:p>
@@ -6962,6 +6981,7 @@
             </a:pPr>
             <a:fld id="{03391736-D1CD-4256-BC31-406FE5C1CD1F}" type="slidenum">
               <a:rPr lang="en-US" altLang="en-US"/>
+              <a:t>‹#›</a:t>
             </a:fld>
             <a:endParaRPr lang="en-US" altLang="en-US"/>
           </a:p>
@@ -6976,7 +6996,7 @@
           <p:nvPr userDrawn="1"/>
         </p:nvPicPr>
         <p:blipFill>
-          <a:blip r:embed="rId12">
+          <a:blip r:embed="rId13">
             <a:extLst>
               <a:ext uri="{28A0092B-C50C-407E-A947-70E740481C1C}">
                 <a14:useLocalDpi xmlns:a14="http://schemas.microsoft.com/office/drawing/2010/main" val="0"/>
@@ -7588,13 +7608,6 @@
               </a:rPr>
               <a:t> </a:t>
             </a:r>
-            <a:endParaRPr lang="en-US" sz="2800" b="1" dirty="0" smtClean="0">
-              <a:solidFill>
-                <a:srgbClr val="002060"/>
-              </a:solidFill>
-              <a:latin typeface="Times New Roman" panose="02020603050405020304" pitchFamily="18" charset="0"/>
-              <a:cs typeface="Times New Roman" panose="02020603050405020304" pitchFamily="18" charset="0"/>
-            </a:endParaRPr>
           </a:p>
           <a:p>
             <a:pPr algn="ctr" defTabSz="457200">
@@ -7659,13 +7672,6 @@
               </a:rPr>
               <a:t>in Java</a:t>
             </a:r>
-            <a:endParaRPr lang="en-US" sz="2800" b="1" dirty="0" smtClean="0">
-              <a:solidFill>
-                <a:srgbClr val="FF0000"/>
-              </a:solidFill>
-              <a:latin typeface="Times New Roman" panose="02020603050405020304" pitchFamily="18" charset="0"/>
-              <a:cs typeface="Times New Roman" panose="02020603050405020304" pitchFamily="18" charset="0"/>
-            </a:endParaRPr>
           </a:p>
         </p:txBody>
       </p:sp>
@@ -7691,6 +7697,7 @@
               <a:rPr lang="en-US" altLang="en-US" smtClean="0">
                 <a:cs typeface="Arial" panose="020B0604020202020204" pitchFamily="34" charset="0"/>
               </a:rPr>
+              <a:t>1</a:t>
             </a:fld>
             <a:endParaRPr lang="en-US" altLang="en-US">
               <a:cs typeface="Arial" panose="020B0604020202020204" pitchFamily="34" charset="0"/>
@@ -7703,11 +7710,11 @@
   <p:clrMapOvr>
     <a:masterClrMapping/>
   </p:clrMapOvr>
-  <mc:AlternateContent xmlns:mc="http://schemas.openxmlformats.org/markup-compatibility/2006">
-    <mc:Choice xmlns:p14="http://schemas.microsoft.com/office/powerpoint/2010/main" Requires="p14">
+  <mc:AlternateContent xmlns:mc="http://schemas.openxmlformats.org/markup-compatibility/2006" xmlns:p14="http://schemas.microsoft.com/office/powerpoint/2010/main">
+    <mc:Choice Requires="p14">
       <p:transition spd="slow" p14:dur="2000"/>
     </mc:Choice>
-    <mc:Fallback>
+    <mc:Fallback xmlns="">
       <p:transition spd="slow"/>
     </mc:Fallback>
   </mc:AlternateContent>
@@ -7810,7 +7817,6 @@
               <a:rPr lang="en-US" sz="2000" dirty="0" smtClean="0"/>
               <a:t>file/directory. </a:t>
             </a:r>
-            <a:endParaRPr lang="en-US" sz="2000" dirty="0" smtClean="0"/>
           </a:p>
           <a:p>
             <a:r>
@@ -7821,7 +7827,6 @@
               <a:rPr lang="en-US" sz="2000" dirty="0"/>
               <a:t>object is used to obtain or manipulate the information associated with a disk file, such</a:t>
             </a:r>
-            <a:endParaRPr lang="en-US" sz="2000" dirty="0"/>
           </a:p>
           <a:p>
             <a:pPr marL="0" indent="0">
@@ -7835,14 +7840,12 @@
               <a:rPr lang="en-US" sz="2000" dirty="0"/>
               <a:t>the permissions, time, date, and directory path, and to navigate subdirectory hierarchies.</a:t>
             </a:r>
-            <a:endParaRPr lang="en-US" sz="2000" dirty="0"/>
           </a:p>
           <a:p>
             <a:r>
               <a:rPr lang="en-US" sz="2000" dirty="0" smtClean="0"/>
               <a:t>An absolute file name (full name) contains a file name with its complete path and drive letter.</a:t>
             </a:r>
-            <a:endParaRPr lang="en-US" sz="2000" dirty="0" smtClean="0"/>
           </a:p>
           <a:p>
             <a:pPr marL="0" indent="0">
@@ -7852,14 +7855,12 @@
               <a:rPr lang="en-US" sz="2000" dirty="0" smtClean="0"/>
               <a:t>    For example, c:\books\welcome.pdf</a:t>
             </a:r>
-            <a:endParaRPr lang="en-US" sz="2000" dirty="0" smtClean="0"/>
           </a:p>
           <a:p>
             <a:r>
               <a:rPr lang="en-US" sz="2000" dirty="0" smtClean="0"/>
               <a:t>A relative file is in relation to the current working directory.</a:t>
             </a:r>
-            <a:endParaRPr lang="en-US" sz="2000" dirty="0" smtClean="0"/>
           </a:p>
           <a:p>
             <a:pPr marL="0" indent="0">
@@ -7869,7 +7870,6 @@
               <a:rPr lang="en-US" sz="2000" dirty="0" smtClean="0"/>
               <a:t>    For example, welcome.pdf</a:t>
             </a:r>
-            <a:endParaRPr lang="en-US" sz="2000" dirty="0" smtClean="0"/>
           </a:p>
         </p:txBody>
       </p:sp>
@@ -7964,10 +7964,6 @@
               </a:rPr>
               <a:t>The file class is a wrapper class for the file name and its directory path.</a:t>
             </a:r>
-            <a:endParaRPr lang="en-US" sz="2000" dirty="0" smtClean="0">
-              <a:latin typeface="Arial" panose="020B0604020202020204" pitchFamily="34" charset="0"/>
-              <a:cs typeface="Arial" panose="020B0604020202020204" pitchFamily="34" charset="0"/>
-            </a:endParaRPr>
           </a:p>
           <a:p>
             <a:pPr marL="0" indent="0">
@@ -7987,10 +7983,6 @@
               </a:rPr>
               <a:t>   for example, </a:t>
             </a:r>
-            <a:endParaRPr lang="en-US" sz="2000" dirty="0" smtClean="0">
-              <a:latin typeface="Arial" panose="020B0604020202020204" pitchFamily="34" charset="0"/>
-              <a:cs typeface="Arial" panose="020B0604020202020204" pitchFamily="34" charset="0"/>
-            </a:endParaRPr>
           </a:p>
           <a:p>
             <a:pPr marL="0" indent="0">
@@ -8010,10 +8002,6 @@
               </a:rPr>
               <a:t>   new File(“c:\\book”)   , it creates a File object for the directory c:\book</a:t>
             </a:r>
-            <a:endParaRPr lang="en-US" sz="2000" dirty="0" smtClean="0">
-              <a:latin typeface="Arial" panose="020B0604020202020204" pitchFamily="34" charset="0"/>
-              <a:cs typeface="Arial" panose="020B0604020202020204" pitchFamily="34" charset="0"/>
-            </a:endParaRPr>
           </a:p>
           <a:p>
             <a:pPr marL="0" indent="0">
@@ -8033,10 +8021,6 @@
               </a:rPr>
               <a:t>   new File(“c:\\book\\test.dat”)  , it creates a File object for the file c:\book\test.dat</a:t>
             </a:r>
-            <a:endParaRPr lang="en-US" sz="2000" dirty="0" smtClean="0">
-              <a:latin typeface="Arial" panose="020B0604020202020204" pitchFamily="34" charset="0"/>
-              <a:cs typeface="Arial" panose="020B0604020202020204" pitchFamily="34" charset="0"/>
-            </a:endParaRPr>
           </a:p>
           <a:p>
             <a:r>
@@ -8081,10 +8065,6 @@
               </a:rPr>
               <a:t>objects:</a:t>
             </a:r>
-            <a:endParaRPr lang="en-US" sz="2000" dirty="0">
-              <a:latin typeface="Arial" panose="020B0604020202020204" pitchFamily="34" charset="0"/>
-              <a:cs typeface="Arial" panose="020B0604020202020204" pitchFamily="34" charset="0"/>
-            </a:endParaRPr>
           </a:p>
           <a:p>
             <a:r>
@@ -8108,10 +8088,6 @@
               </a:rPr>
               <a:t>)</a:t>
             </a:r>
-            <a:endParaRPr lang="en-IN" sz="2000" dirty="0">
-              <a:latin typeface="Arial" panose="020B0604020202020204" pitchFamily="34" charset="0"/>
-              <a:cs typeface="Arial" panose="020B0604020202020204" pitchFamily="34" charset="0"/>
-            </a:endParaRPr>
           </a:p>
           <a:p>
             <a:r>
@@ -8149,10 +8125,6 @@
               </a:rPr>
               <a:t>)</a:t>
             </a:r>
-            <a:endParaRPr lang="en-IN" sz="2000" dirty="0">
-              <a:latin typeface="Arial" panose="020B0604020202020204" pitchFamily="34" charset="0"/>
-              <a:cs typeface="Arial" panose="020B0604020202020204" pitchFamily="34" charset="0"/>
-            </a:endParaRPr>
           </a:p>
           <a:p>
             <a:r>
@@ -8190,10 +8162,6 @@
               </a:rPr>
               <a:t>)</a:t>
             </a:r>
-            <a:endParaRPr lang="en-IN" sz="2000" dirty="0">
-              <a:latin typeface="Arial" panose="020B0604020202020204" pitchFamily="34" charset="0"/>
-              <a:cs typeface="Arial" panose="020B0604020202020204" pitchFamily="34" charset="0"/>
-            </a:endParaRPr>
           </a:p>
           <a:p>
             <a:r>
@@ -8217,10 +8185,6 @@
               </a:rPr>
               <a:t>)</a:t>
             </a:r>
-            <a:endParaRPr lang="en-IN" sz="2000" dirty="0" smtClean="0">
-              <a:latin typeface="Arial" panose="020B0604020202020204" pitchFamily="34" charset="0"/>
-              <a:cs typeface="Arial" panose="020B0604020202020204" pitchFamily="34" charset="0"/>
-            </a:endParaRPr>
           </a:p>
           <a:p>
             <a:r>
@@ -8340,10 +8304,6 @@
               </a:rPr>
               <a:t>()</a:t>
             </a:r>
-            <a:endParaRPr lang="en-US" sz="2000" dirty="0" smtClean="0">
-              <a:latin typeface="Arial" panose="020B0604020202020204" pitchFamily="34" charset="0"/>
-              <a:cs typeface="Arial" panose="020B0604020202020204" pitchFamily="34" charset="0"/>
-            </a:endParaRPr>
           </a:p>
           <a:p>
             <a:r>
@@ -8367,10 +8327,6 @@
               </a:rPr>
               <a:t>()</a:t>
             </a:r>
-            <a:endParaRPr lang="en-US" altLang="en-US" sz="2000" dirty="0" smtClean="0">
-              <a:latin typeface="Arial" panose="020B0604020202020204" pitchFamily="34" charset="0"/>
-              <a:cs typeface="Arial" panose="020B0604020202020204" pitchFamily="34" charset="0"/>
-            </a:endParaRPr>
           </a:p>
           <a:p>
             <a:r>
@@ -8394,10 +8350,6 @@
               </a:rPr>
               <a:t>()</a:t>
             </a:r>
-            <a:endParaRPr lang="en-US" altLang="en-US" sz="2000" dirty="0" smtClean="0">
-              <a:latin typeface="Arial" panose="020B0604020202020204" pitchFamily="34" charset="0"/>
-              <a:cs typeface="Arial" panose="020B0604020202020204" pitchFamily="34" charset="0"/>
-            </a:endParaRPr>
           </a:p>
           <a:p>
             <a:r>
@@ -8407,10 +8359,6 @@
               </a:rPr>
               <a:t>Boolean exists()</a:t>
             </a:r>
-            <a:endParaRPr lang="en-US" altLang="en-US" sz="2000" dirty="0" smtClean="0">
-              <a:latin typeface="Arial" panose="020B0604020202020204" pitchFamily="34" charset="0"/>
-              <a:cs typeface="Arial" panose="020B0604020202020204" pitchFamily="34" charset="0"/>
-            </a:endParaRPr>
           </a:p>
           <a:p>
             <a:r>
@@ -8434,10 +8382,6 @@
               </a:rPr>
               <a:t>()</a:t>
             </a:r>
-            <a:endParaRPr lang="en-US" altLang="en-US" sz="2000" dirty="0" smtClean="0">
-              <a:latin typeface="Arial" panose="020B0604020202020204" pitchFamily="34" charset="0"/>
-              <a:cs typeface="Arial" panose="020B0604020202020204" pitchFamily="34" charset="0"/>
-            </a:endParaRPr>
           </a:p>
           <a:p>
             <a:r>
@@ -8461,10 +8405,6 @@
               </a:rPr>
               <a:t>()</a:t>
             </a:r>
-            <a:endParaRPr lang="en-US" altLang="en-US" sz="2000" dirty="0" smtClean="0">
-              <a:latin typeface="Arial" panose="020B0604020202020204" pitchFamily="34" charset="0"/>
-              <a:cs typeface="Arial" panose="020B0604020202020204" pitchFamily="34" charset="0"/>
-            </a:endParaRPr>
           </a:p>
           <a:p>
             <a:r>
@@ -8488,10 +8428,6 @@
               </a:rPr>
               <a:t>()</a:t>
             </a:r>
-            <a:endParaRPr lang="en-US" altLang="en-US" sz="2000" dirty="0" smtClean="0">
-              <a:latin typeface="Arial" panose="020B0604020202020204" pitchFamily="34" charset="0"/>
-              <a:cs typeface="Arial" panose="020B0604020202020204" pitchFamily="34" charset="0"/>
-            </a:endParaRPr>
           </a:p>
           <a:p>
             <a:r>
@@ -8515,10 +8451,6 @@
               </a:rPr>
               <a:t>()</a:t>
             </a:r>
-            <a:endParaRPr lang="en-US" altLang="en-US" sz="2000" dirty="0" smtClean="0">
-              <a:latin typeface="Arial" panose="020B0604020202020204" pitchFamily="34" charset="0"/>
-              <a:cs typeface="Arial" panose="020B0604020202020204" pitchFamily="34" charset="0"/>
-            </a:endParaRPr>
           </a:p>
           <a:p>
             <a:r>
@@ -8572,7 +8504,14 @@
         <p:cNvGrpSpPr/>
         <p:nvPr/>
       </p:nvGrpSpPr>
-      <p:grpSpPr/>
+      <p:grpSpPr>
+        <a:xfrm>
+          <a:off x="0" y="0"/>
+          <a:ext cx="0" cy="0"/>
+          <a:chOff x="0" y="0"/>
+          <a:chExt cx="0" cy="0"/>
+        </a:xfrm>
+      </p:grpSpPr>
       <p:sp>
         <p:nvSpPr>
           <p:cNvPr id="2" name="Title 1"/>
@@ -8591,6 +8530,7 @@
         </p:spPr>
         <p:txBody>
           <a:bodyPr/>
+          <a:lstStyle/>
           <a:p>
             <a:pPr algn="ctr"/>
             <a:r>
@@ -8610,9 +8550,6 @@
               </a:rPr>
               <a:t>(Class, COnstructors &amp; Methods)</a:t>
             </a:r>
-            <a:endParaRPr lang="en-US" altLang="en-US" sz="3600" b="1" dirty="0" smtClean="0">
-              <a:sym typeface="+mn-ea"/>
-            </a:endParaRPr>
           </a:p>
         </p:txBody>
       </p:sp>
@@ -8629,6 +8566,7 @@
         <p:spPr/>
         <p:txBody>
           <a:bodyPr/>
+          <a:lstStyle/>
           <a:p>
             <a:pPr>
               <a:defRPr/>
@@ -8654,12 +8592,14 @@
         <p:spPr/>
         <p:txBody>
           <a:bodyPr/>
+          <a:lstStyle/>
           <a:p>
             <a:pPr>
               <a:defRPr/>
             </a:pPr>
             <a:fld id="{A01CA5F2-CD08-4EF5-BAD9-872B7BB27165}" type="slidenum">
               <a:rPr lang="en-US" altLang="en-US"/>
+              <a:t>13</a:t>
             </a:fld>
             <a:endParaRPr lang="en-US" altLang="en-US"/>
           </a:p>
@@ -8679,12 +8619,12 @@
           <a:graphicData uri="http://schemas.openxmlformats.org/presentationml/2006/ole">
             <mc:AlternateContent xmlns:mc="http://schemas.openxmlformats.org/markup-compatibility/2006">
               <mc:Choice xmlns:v="urn:schemas-microsoft-com:vml" Requires="v">
-                <p:oleObj spid="_x0000_s8" name="" r:id="rId1" imgW="9525000" imgH="4705350" progId="Paint.Picture">
+                <p:oleObj spid="_x0000_s1026" r:id="rId3" imgW="9525000" imgH="4705350" progId="Paint.Picture">
                   <p:embed/>
                 </p:oleObj>
               </mc:Choice>
               <mc:Fallback>
-                <p:oleObj name="" r:id="rId1" imgW="9525000" imgH="4705350" progId="Paint.Picture">
+                <p:oleObj r:id="rId3" imgW="9525000" imgH="4705350" progId="Paint.Picture">
                   <p:embed/>
                   <p:pic>
                     <p:nvPicPr>
@@ -8693,7 +8633,7 @@
                       <p:nvPr/>
                     </p:nvPicPr>
                     <p:blipFill>
-                      <a:blip r:embed="rId2"/>
+                      <a:blip r:embed="rId4"/>
                       <a:stretch>
                         <a:fillRect/>
                       </a:stretch>
@@ -8719,6 +8659,13 @@
   <p:clrMapOvr>
     <a:masterClrMapping/>
   </p:clrMapOvr>
+  <p:timing>
+    <p:tnLst>
+      <p:par>
+        <p:cTn id="1" dur="indefinite" restart="never" nodeType="tmRoot"/>
+      </p:par>
+    </p:tnLst>
+  </p:timing>
 </p:sld>
 </file>
 
@@ -8731,7 +8678,14 @@
         <p:cNvGrpSpPr/>
         <p:nvPr/>
       </p:nvGrpSpPr>
-      <p:grpSpPr/>
+      <p:grpSpPr>
+        <a:xfrm>
+          <a:off x="0" y="0"/>
+          <a:ext cx="0" cy="0"/>
+          <a:chOff x="0" y="0"/>
+          <a:chExt cx="0" cy="0"/>
+        </a:xfrm>
+      </p:grpSpPr>
       <p:sp>
         <p:nvSpPr>
           <p:cNvPr id="2" name="Title 1"/>
@@ -8745,12 +8699,12 @@
         <p:spPr/>
         <p:txBody>
           <a:bodyPr/>
+          <a:lstStyle/>
           <a:p>
             <a:r>
               <a:rPr lang="en-US"/>
               <a:t>Output</a:t>
             </a:r>
-            <a:endParaRPr lang="en-US"/>
           </a:p>
         </p:txBody>
       </p:sp>
@@ -8767,6 +8721,7 @@
         <p:spPr/>
         <p:txBody>
           <a:bodyPr/>
+          <a:lstStyle/>
           <a:p>
             <a:pPr>
               <a:defRPr/>
@@ -8792,12 +8747,14 @@
         <p:spPr/>
         <p:txBody>
           <a:bodyPr/>
+          <a:lstStyle/>
           <a:p>
             <a:pPr>
               <a:defRPr/>
             </a:pPr>
             <a:fld id="{A01CA5F2-CD08-4EF5-BAD9-872B7BB27165}" type="slidenum">
               <a:rPr lang="en-US" altLang="en-US"/>
+              <a:t>14</a:t>
             </a:fld>
             <a:endParaRPr lang="en-US" altLang="en-US"/>
           </a:p>
@@ -8817,12 +8774,12 @@
           <a:graphicData uri="http://schemas.openxmlformats.org/presentationml/2006/ole">
             <mc:AlternateContent xmlns:mc="http://schemas.openxmlformats.org/markup-compatibility/2006">
               <mc:Choice xmlns:v="urn:schemas-microsoft-com:vml" Requires="v">
-                <p:oleObj spid="_x0000_s7" name="" r:id="rId1" imgW="4000500" imgH="2552700" progId="Paint.Picture">
+                <p:oleObj spid="_x0000_s2050" r:id="rId3" imgW="4000500" imgH="2552700" progId="Paint.Picture">
                   <p:embed/>
                 </p:oleObj>
               </mc:Choice>
               <mc:Fallback>
-                <p:oleObj name="" r:id="rId1" imgW="4000500" imgH="2552700" progId="Paint.Picture">
+                <p:oleObj r:id="rId3" imgW="4000500" imgH="2552700" progId="Paint.Picture">
                   <p:embed/>
                   <p:pic>
                     <p:nvPicPr>
@@ -8831,7 +8788,7 @@
                       <p:nvPr/>
                     </p:nvPicPr>
                     <p:blipFill>
-                      <a:blip r:embed="rId2"/>
+                      <a:blip r:embed="rId4"/>
                       <a:stretch>
                         <a:fillRect/>
                       </a:stretch>
@@ -8857,6 +8814,13 @@
   <p:clrMapOvr>
     <a:masterClrMapping/>
   </p:clrMapOvr>
+  <p:timing>
+    <p:tnLst>
+      <p:par>
+        <p:cTn id="1" dur="indefinite" restart="never" nodeType="tmRoot"/>
+      </p:par>
+    </p:tnLst>
+  </p:timing>
 </p:sld>
 </file>
 
@@ -8991,12 +8955,19 @@
         <p:cNvGrpSpPr/>
         <p:nvPr/>
       </p:nvGrpSpPr>
-      <p:grpSpPr/>
+      <p:grpSpPr>
+        <a:xfrm>
+          <a:off x="0" y="0"/>
+          <a:ext cx="0" cy="0"/>
+          <a:chOff x="0" y="0"/>
+          <a:chExt cx="0" cy="0"/>
+        </a:xfrm>
+      </p:grpSpPr>
       <p:graphicFrame>
         <p:nvGraphicFramePr>
           <p:cNvPr id="6" name="Content Placeholder 5"/>
           <p:cNvGraphicFramePr>
-            <a:graphicFrameLocks noChangeAspect="1"/>
+            <a:graphicFrameLocks noGrp="1" noChangeAspect="1"/>
           </p:cNvGraphicFramePr>
           <p:nvPr>
             <p:ph idx="1"/>
@@ -9010,12 +8981,12 @@
           <a:graphicData uri="http://schemas.openxmlformats.org/presentationml/2006/ole">
             <mc:AlternateContent xmlns:mc="http://schemas.openxmlformats.org/markup-compatibility/2006">
               <mc:Choice xmlns:v="urn:schemas-microsoft-com:vml" Requires="v">
-                <p:oleObj spid="_x0000_s7" name="" r:id="rId1" imgW="7880350" imgH="4699000" progId="Paint.Picture">
+                <p:oleObj spid="_x0000_s3074" r:id="rId3" imgW="7880350" imgH="4699000" progId="Paint.Picture">
                   <p:embed/>
                 </p:oleObj>
               </mc:Choice>
               <mc:Fallback>
-                <p:oleObj name="" r:id="rId1" imgW="7880350" imgH="4699000" progId="Paint.Picture">
+                <p:oleObj r:id="rId3" imgW="7880350" imgH="4699000" progId="Paint.Picture">
                   <p:embed/>
                   <p:pic>
                     <p:nvPicPr>
@@ -9024,7 +8995,7 @@
                       <p:nvPr/>
                     </p:nvPicPr>
                     <p:blipFill>
-                      <a:blip r:embed="rId2"/>
+                      <a:blip r:embed="rId4"/>
                       <a:stretch>
                         <a:fillRect/>
                       </a:stretch>
@@ -9058,6 +9029,7 @@
         <p:spPr/>
         <p:txBody>
           <a:bodyPr/>
+          <a:lstStyle/>
           <a:p>
             <a:pPr>
               <a:defRPr/>
@@ -9083,12 +9055,14 @@
         <p:spPr/>
         <p:txBody>
           <a:bodyPr/>
+          <a:lstStyle/>
           <a:p>
             <a:pPr>
               <a:defRPr/>
             </a:pPr>
             <a:fld id="{A01CA5F2-CD08-4EF5-BAD9-872B7BB27165}" type="slidenum">
               <a:rPr lang="en-US" altLang="en-US"/>
+              <a:t>16</a:t>
             </a:fld>
             <a:endParaRPr lang="en-US" altLang="en-US"/>
           </a:p>
@@ -9288,6 +9262,13 @@
   <p:clrMapOvr>
     <a:masterClrMapping/>
   </p:clrMapOvr>
+  <p:timing>
+    <p:tnLst>
+      <p:par>
+        <p:cTn id="1" dur="indefinite" restart="never" nodeType="tmRoot"/>
+      </p:par>
+    </p:tnLst>
+  </p:timing>
 </p:sld>
 </file>
 
@@ -9300,7 +9281,14 @@
         <p:cNvGrpSpPr/>
         <p:nvPr/>
       </p:nvGrpSpPr>
-      <p:grpSpPr/>
+      <p:grpSpPr>
+        <a:xfrm>
+          <a:off x="0" y="0"/>
+          <a:ext cx="0" cy="0"/>
+          <a:chOff x="0" y="0"/>
+          <a:chExt cx="0" cy="0"/>
+        </a:xfrm>
+      </p:grpSpPr>
       <p:sp>
         <p:nvSpPr>
           <p:cNvPr id="2" name="Title 1"/>
@@ -9314,12 +9302,12 @@
         <p:spPr/>
         <p:txBody>
           <a:bodyPr/>
+          <a:lstStyle/>
           <a:p>
             <a:r>
               <a:rPr lang="en-US"/>
               <a:t>Output</a:t>
             </a:r>
-            <a:endParaRPr lang="en-US"/>
           </a:p>
         </p:txBody>
       </p:sp>
@@ -9336,6 +9324,7 @@
         <p:spPr/>
         <p:txBody>
           <a:bodyPr/>
+          <a:lstStyle/>
           <a:p>
             <a:pPr>
               <a:defRPr/>
@@ -9361,12 +9350,14 @@
         <p:spPr/>
         <p:txBody>
           <a:bodyPr/>
+          <a:lstStyle/>
           <a:p>
             <a:pPr>
               <a:defRPr/>
             </a:pPr>
             <a:fld id="{A01CA5F2-CD08-4EF5-BAD9-872B7BB27165}" type="slidenum">
               <a:rPr lang="en-US" altLang="en-US"/>
+              <a:t>17</a:t>
             </a:fld>
             <a:endParaRPr lang="en-US" altLang="en-US"/>
           </a:p>
@@ -9386,12 +9377,12 @@
           <a:graphicData uri="http://schemas.openxmlformats.org/presentationml/2006/ole">
             <mc:AlternateContent xmlns:mc="http://schemas.openxmlformats.org/markup-compatibility/2006">
               <mc:Choice xmlns:v="urn:schemas-microsoft-com:vml" Requires="v">
-                <p:oleObj spid="_x0000_s8" name="" r:id="rId1" imgW="5727700" imgH="1771650" progId="Paint.Picture">
+                <p:oleObj spid="_x0000_s4098" r:id="rId3" imgW="5727700" imgH="1771650" progId="Paint.Picture">
                   <p:embed/>
                 </p:oleObj>
               </mc:Choice>
               <mc:Fallback>
-                <p:oleObj name="" r:id="rId1" imgW="5727700" imgH="1771650" progId="Paint.Picture">
+                <p:oleObj r:id="rId3" imgW="5727700" imgH="1771650" progId="Paint.Picture">
                   <p:embed/>
                   <p:pic>
                     <p:nvPicPr>
@@ -9400,7 +9391,7 @@
                       <p:nvPr/>
                     </p:nvPicPr>
                     <p:blipFill>
-                      <a:blip r:embed="rId2"/>
+                      <a:blip r:embed="rId4"/>
                       <a:stretch>
                         <a:fillRect/>
                       </a:stretch>
@@ -9426,6 +9417,13 @@
   <p:clrMapOvr>
     <a:masterClrMapping/>
   </p:clrMapOvr>
+  <p:timing>
+    <p:tnLst>
+      <p:par>
+        <p:cTn id="1" dur="indefinite" restart="never" nodeType="tmRoot"/>
+      </p:par>
+    </p:tnLst>
+  </p:timing>
 </p:sld>
 </file>
 
@@ -9505,10 +9503,6 @@
               </a:rPr>
               <a:t>In Java, all files are byte-oriented, and java provides methods to read and write bytes from and to a file.</a:t>
             </a:r>
-            <a:endParaRPr lang="en-US" sz="2000" dirty="0" smtClean="0">
-              <a:latin typeface="Arial" panose="020B0604020202020204" pitchFamily="34" charset="0"/>
-              <a:cs typeface="Arial" panose="020B0604020202020204" pitchFamily="34" charset="0"/>
-            </a:endParaRPr>
           </a:p>
           <a:p>
             <a:r>
@@ -9518,10 +9512,6 @@
               </a:rPr>
               <a:t>Java allows us to wrap a byte-oriented file stream within a character-based object.</a:t>
             </a:r>
-            <a:endParaRPr lang="en-US" altLang="en-US" sz="2000" dirty="0" smtClean="0">
-              <a:latin typeface="Arial" panose="020B0604020202020204" pitchFamily="34" charset="0"/>
-              <a:cs typeface="Arial" panose="020B0604020202020204" pitchFamily="34" charset="0"/>
-            </a:endParaRPr>
           </a:p>
           <a:p>
             <a:r>
@@ -9570,6 +9560,13 @@
   <p:clrMapOvr>
     <a:masterClrMapping/>
   </p:clrMapOvr>
+  <p:timing>
+    <p:tnLst>
+      <p:par>
+        <p:cTn id="1" dur="indefinite" restart="never" nodeType="tmRoot"/>
+      </p:par>
+    </p:tnLst>
+  </p:timing>
 </p:sld>
 </file>
 
@@ -9655,10 +9652,6 @@
               </a:rPr>
               <a:t>Character-based class.</a:t>
             </a:r>
-            <a:endParaRPr lang="en-US" sz="2000" dirty="0" smtClean="0">
-              <a:latin typeface="Arial" panose="020B0604020202020204" pitchFamily="34" charset="0"/>
-              <a:cs typeface="Arial" panose="020B0604020202020204" pitchFamily="34" charset="0"/>
-            </a:endParaRPr>
           </a:p>
           <a:p>
             <a:r>
@@ -9668,10 +9661,6 @@
               </a:rPr>
               <a:t>Using a character-based class for console output makes it easier to internationalize the program.</a:t>
             </a:r>
-            <a:endParaRPr lang="en-US" altLang="en-US" sz="2000" dirty="0" smtClean="0">
-              <a:latin typeface="Arial" panose="020B0604020202020204" pitchFamily="34" charset="0"/>
-              <a:cs typeface="Arial" panose="020B0604020202020204" pitchFamily="34" charset="0"/>
-            </a:endParaRPr>
           </a:p>
           <a:p>
             <a:r>
@@ -9744,10 +9733,6 @@
               </a:rPr>
               <a:t>)</a:t>
             </a:r>
-            <a:endParaRPr lang="en-US" altLang="en-US" sz="2000" dirty="0" smtClean="0">
-              <a:latin typeface="Arial" panose="020B0604020202020204" pitchFamily="34" charset="0"/>
-              <a:cs typeface="Arial" panose="020B0604020202020204" pitchFamily="34" charset="0"/>
-            </a:endParaRPr>
           </a:p>
           <a:p>
             <a:pPr marL="0" indent="0">
@@ -9788,10 +9773,6 @@
               </a:rPr>
               <a:t>.</a:t>
             </a:r>
-            <a:endParaRPr lang="en-US" altLang="en-US" sz="2000" dirty="0" smtClean="0">
-              <a:latin typeface="Arial" panose="020B0604020202020204" pitchFamily="34" charset="0"/>
-              <a:cs typeface="Arial" panose="020B0604020202020204" pitchFamily="34" charset="0"/>
-            </a:endParaRPr>
           </a:p>
           <a:p>
             <a:r>
@@ -9822,10 +9803,6 @@
               </a:rPr>
               <a:t>() method is called.</a:t>
             </a:r>
-            <a:endParaRPr lang="en-US" altLang="en-US" sz="2000" dirty="0" smtClean="0">
-              <a:latin typeface="Arial" panose="020B0604020202020204" pitchFamily="34" charset="0"/>
-              <a:cs typeface="Arial" panose="020B0604020202020204" pitchFamily="34" charset="0"/>
-            </a:endParaRPr>
           </a:p>
           <a:p>
             <a:r>
@@ -9849,10 +9826,6 @@
               </a:rPr>
               <a:t> is true, flushing automatically takes place.</a:t>
             </a:r>
-            <a:endParaRPr lang="en-US" altLang="en-US" sz="2000" dirty="0" smtClean="0">
-              <a:latin typeface="Arial" panose="020B0604020202020204" pitchFamily="34" charset="0"/>
-              <a:cs typeface="Arial" panose="020B0604020202020204" pitchFamily="34" charset="0"/>
-            </a:endParaRPr>
           </a:p>
           <a:p>
             <a:r>
@@ -9873,6 +9846,13 @@
   <p:clrMapOvr>
     <a:masterClrMapping/>
   </p:clrMapOvr>
+  <p:timing>
+    <p:tnLst>
+      <p:par>
+        <p:cTn id="1" dur="indefinite" restart="never" nodeType="tmRoot"/>
+      </p:par>
+    </p:tnLst>
+  </p:timing>
 </p:sld>
 </file>
 
@@ -9946,6 +9926,7 @@
             </a:pPr>
             <a:fld id="{A01CA5F2-CD08-4EF5-BAD9-872B7BB27165}" type="slidenum">
               <a:rPr lang="en-US" altLang="en-US" smtClean="0"/>
+              <a:t>2</a:t>
             </a:fld>
             <a:endParaRPr lang="en-US" altLang="en-US"/>
           </a:p>
@@ -10045,11 +10026,11 @@
   <p:clrMapOvr>
     <a:masterClrMapping/>
   </p:clrMapOvr>
-  <mc:AlternateContent xmlns:mc="http://schemas.openxmlformats.org/markup-compatibility/2006">
-    <mc:Choice xmlns:p14="http://schemas.microsoft.com/office/powerpoint/2010/main" Requires="p14">
+  <mc:AlternateContent xmlns:mc="http://schemas.openxmlformats.org/markup-compatibility/2006" xmlns:p14="http://schemas.microsoft.com/office/powerpoint/2010/main">
+    <mc:Choice Requires="p14">
       <p:transition spd="slow" p14:dur="2000"/>
     </mc:Choice>
-    <mc:Fallback>
+    <mc:Fallback xmlns="">
       <p:transition spd="slow"/>
     </mc:Fallback>
   </mc:AlternateContent>
@@ -10072,7 +10053,14 @@
         <p:cNvGrpSpPr/>
         <p:nvPr/>
       </p:nvGrpSpPr>
-      <p:grpSpPr/>
+      <p:grpSpPr>
+        <a:xfrm>
+          <a:off x="0" y="0"/>
+          <a:ext cx="0" cy="0"/>
+          <a:chOff x="0" y="0"/>
+          <a:chExt cx="0" cy="0"/>
+        </a:xfrm>
+      </p:grpSpPr>
       <p:sp>
         <p:nvSpPr>
           <p:cNvPr id="4" name="Footer Placeholder 3"/>
@@ -10086,6 +10074,7 @@
         <p:spPr/>
         <p:txBody>
           <a:bodyPr/>
+          <a:lstStyle/>
           <a:p>
             <a:pPr>
               <a:defRPr/>
@@ -10116,12 +10105,14 @@
         </p:spPr>
         <p:txBody>
           <a:bodyPr/>
+          <a:lstStyle/>
           <a:p>
             <a:pPr>
               <a:defRPr/>
             </a:pPr>
             <a:fld id="{A01CA5F2-CD08-4EF5-BAD9-872B7BB27165}" type="slidenum">
               <a:rPr lang="en-US" altLang="en-US"/>
+              <a:t>20</a:t>
             </a:fld>
             <a:endParaRPr lang="en-US" altLang="en-US"/>
           </a:p>
@@ -10141,12 +10132,12 @@
           <a:graphicData uri="http://schemas.openxmlformats.org/presentationml/2006/ole">
             <mc:AlternateContent xmlns:mc="http://schemas.openxmlformats.org/markup-compatibility/2006">
               <mc:Choice xmlns:v="urn:schemas-microsoft-com:vml" Requires="v">
-                <p:oleObj spid="_x0000_s9" name="" r:id="rId1" imgW="6604000" imgH="4203700" progId="Paint.Picture">
+                <p:oleObj spid="_x0000_s5123" r:id="rId3" imgW="6604000" imgH="4203700" progId="Paint.Picture">
                   <p:embed/>
                 </p:oleObj>
               </mc:Choice>
               <mc:Fallback>
-                <p:oleObj name="" r:id="rId1" imgW="6604000" imgH="4203700" progId="Paint.Picture">
+                <p:oleObj r:id="rId3" imgW="6604000" imgH="4203700" progId="Paint.Picture">
                   <p:embed/>
                   <p:pic>
                     <p:nvPicPr>
@@ -10155,7 +10146,7 @@
                       <p:nvPr/>
                     </p:nvPicPr>
                     <p:blipFill>
-                      <a:blip r:embed="rId2"/>
+                      <a:blip r:embed="rId4"/>
                       <a:stretch>
                         <a:fillRect/>
                       </a:stretch>
@@ -10179,7 +10170,7 @@
       <p:graphicFrame>
         <p:nvGraphicFramePr>
           <p:cNvPr id="10" name="Object 9">
-            <a:hlinkClick r:id="" action="ppaction://ole?verb="/>
+            <a:hlinkClick r:id="" action="ppaction://ole?verb=0"/>
           </p:cNvPr>
           <p:cNvGraphicFramePr>
             <a:graphicFrameLocks noChangeAspect="1"/>
@@ -10194,12 +10185,12 @@
           <a:graphicData uri="http://schemas.openxmlformats.org/presentationml/2006/ole">
             <mc:AlternateContent xmlns:mc="http://schemas.openxmlformats.org/markup-compatibility/2006">
               <mc:Choice xmlns:v="urn:schemas-microsoft-com:vml" Requires="v">
-                <p:oleObj spid="_x0000_s1025" name="" showAsIcon="1" r:id="rId3" imgW="971550" imgH="971550" progId="Package">
+                <p:oleObj spid="_x0000_s5124" showAsIcon="1" r:id="rId5" imgW="971550" imgH="971550" progId="Package">
                   <p:embed/>
                 </p:oleObj>
               </mc:Choice>
               <mc:Fallback>
-                <p:oleObj name="" showAsIcon="1" r:id="rId3" imgW="971550" imgH="971550" progId="Package">
+                <p:oleObj showAsIcon="1" r:id="rId5" imgW="971550" imgH="971550" progId="Package">
                   <p:embed/>
                   <p:pic>
                     <p:nvPicPr>
@@ -10208,7 +10199,7 @@
                       <p:nvPr/>
                     </p:nvPicPr>
                     <p:blipFill>
-                      <a:blip r:embed="rId4"/>
+                      <a:blip r:embed="rId6"/>
                       <a:stretch>
                         <a:fillRect/>
                       </a:stretch>
@@ -10234,6 +10225,13 @@
   <p:clrMapOvr>
     <a:masterClrMapping/>
   </p:clrMapOvr>
+  <p:timing>
+    <p:tnLst>
+      <p:par>
+        <p:cTn id="1" dur="indefinite" restart="never" nodeType="tmRoot"/>
+      </p:par>
+    </p:tnLst>
+  </p:timing>
 </p:sld>
 </file>
 
@@ -10313,10 +10311,6 @@
               </a:rPr>
               <a:t>To read from the keyboard, we create a Scanner as follows:</a:t>
             </a:r>
-            <a:endParaRPr lang="en-US" sz="2000" dirty="0" smtClean="0">
-              <a:latin typeface="Arial" panose="020B0604020202020204" pitchFamily="34" charset="0"/>
-              <a:cs typeface="Arial" panose="020B0604020202020204" pitchFamily="34" charset="0"/>
-            </a:endParaRPr>
           </a:p>
           <a:p>
             <a:pPr marL="0" indent="0">
@@ -10350,10 +10344,6 @@
               </a:rPr>
               <a:t>=new Scanner(System.in);</a:t>
             </a:r>
-            <a:endParaRPr lang="en-US" altLang="en-US" sz="2000" dirty="0" smtClean="0">
-              <a:latin typeface="Arial" panose="020B0604020202020204" pitchFamily="34" charset="0"/>
-              <a:cs typeface="Arial" panose="020B0604020202020204" pitchFamily="34" charset="0"/>
-            </a:endParaRPr>
           </a:p>
           <a:p>
             <a:r>
@@ -10363,10 +10353,6 @@
               </a:rPr>
               <a:t>To read from a file, create a Scanner for a file, as follows:</a:t>
             </a:r>
-            <a:endParaRPr lang="en-US" altLang="en-US" sz="2000" dirty="0" smtClean="0">
-              <a:latin typeface="Arial" panose="020B0604020202020204" pitchFamily="34" charset="0"/>
-              <a:cs typeface="Arial" panose="020B0604020202020204" pitchFamily="34" charset="0"/>
-            </a:endParaRPr>
           </a:p>
           <a:p>
             <a:pPr marL="0" indent="0">
@@ -10393,10 +10379,6 @@
               </a:rPr>
               <a:t>=new Scanner(new File(filename));</a:t>
             </a:r>
-            <a:endParaRPr lang="en-US" altLang="en-US" sz="2000" dirty="0" smtClean="0">
-              <a:latin typeface="Arial" panose="020B0604020202020204" pitchFamily="34" charset="0"/>
-              <a:cs typeface="Arial" panose="020B0604020202020204" pitchFamily="34" charset="0"/>
-            </a:endParaRPr>
           </a:p>
           <a:p>
             <a:pPr marL="0" indent="0">
@@ -10422,10 +10404,6 @@
               </a:rPr>
               <a:t> 	next()</a:t>
             </a:r>
-            <a:endParaRPr lang="en-US" altLang="en-US" sz="2000" dirty="0" smtClean="0">
-              <a:latin typeface="Arial" panose="020B0604020202020204" pitchFamily="34" charset="0"/>
-              <a:cs typeface="Arial" panose="020B0604020202020204" pitchFamily="34" charset="0"/>
-            </a:endParaRPr>
           </a:p>
           <a:p>
             <a:pPr marL="0" indent="0">
@@ -10452,10 +10430,6 @@
               </a:rPr>
               <a:t>()</a:t>
             </a:r>
-            <a:endParaRPr lang="en-US" altLang="en-US" sz="2000" dirty="0" smtClean="0">
-              <a:latin typeface="Arial" panose="020B0604020202020204" pitchFamily="34" charset="0"/>
-              <a:cs typeface="Arial" panose="020B0604020202020204" pitchFamily="34" charset="0"/>
-            </a:endParaRPr>
           </a:p>
           <a:p>
             <a:pPr marL="0" indent="0">
@@ -10482,10 +10456,6 @@
               </a:rPr>
               <a:t>()</a:t>
             </a:r>
-            <a:endParaRPr lang="en-US" altLang="en-US" sz="2000" dirty="0" smtClean="0">
-              <a:latin typeface="Arial" panose="020B0604020202020204" pitchFamily="34" charset="0"/>
-              <a:cs typeface="Arial" panose="020B0604020202020204" pitchFamily="34" charset="0"/>
-            </a:endParaRPr>
           </a:p>
           <a:p>
             <a:pPr marL="0" indent="0">
@@ -10509,6 +10479,13 @@
   <p:clrMapOvr>
     <a:masterClrMapping/>
   </p:clrMapOvr>
+  <p:timing>
+    <p:tnLst>
+      <p:par>
+        <p:cTn id="1" dur="indefinite" restart="never" nodeType="tmRoot"/>
+      </p:par>
+    </p:tnLst>
+  </p:timing>
 </p:sld>
 </file>
 
@@ -10521,7 +10498,14 @@
         <p:cNvGrpSpPr/>
         <p:nvPr/>
       </p:nvGrpSpPr>
-      <p:grpSpPr/>
+      <p:grpSpPr>
+        <a:xfrm>
+          <a:off x="0" y="0"/>
+          <a:ext cx="0" cy="0"/>
+          <a:chOff x="0" y="0"/>
+          <a:chExt cx="0" cy="0"/>
+        </a:xfrm>
+      </p:grpSpPr>
       <p:sp>
         <p:nvSpPr>
           <p:cNvPr id="4" name="Footer Placeholder 3"/>
@@ -10535,6 +10519,7 @@
         <p:spPr/>
         <p:txBody>
           <a:bodyPr/>
+          <a:lstStyle/>
           <a:p>
             <a:pPr>
               <a:defRPr/>
@@ -10560,12 +10545,14 @@
         <p:spPr/>
         <p:txBody>
           <a:bodyPr/>
+          <a:lstStyle/>
           <a:p>
             <a:pPr>
               <a:defRPr/>
             </a:pPr>
             <a:fld id="{A01CA5F2-CD08-4EF5-BAD9-872B7BB27165}" type="slidenum">
               <a:rPr lang="en-US" altLang="en-US"/>
+              <a:t>22</a:t>
             </a:fld>
             <a:endParaRPr lang="en-US" altLang="en-US"/>
           </a:p>
@@ -10585,12 +10572,12 @@
           <a:graphicData uri="http://schemas.openxmlformats.org/presentationml/2006/ole">
             <mc:AlternateContent xmlns:mc="http://schemas.openxmlformats.org/markup-compatibility/2006">
               <mc:Choice xmlns:v="urn:schemas-microsoft-com:vml" Requires="v">
-                <p:oleObj spid="_x0000_s7" name="" r:id="rId1" imgW="7181850" imgH="5099050" progId="Paint.Picture">
+                <p:oleObj spid="_x0000_s6146" r:id="rId3" imgW="7181850" imgH="5099050" progId="Paint.Picture">
                   <p:embed/>
                 </p:oleObj>
               </mc:Choice>
               <mc:Fallback>
-                <p:oleObj name="" r:id="rId1" imgW="7181850" imgH="5099050" progId="Paint.Picture">
+                <p:oleObj r:id="rId3" imgW="7181850" imgH="5099050" progId="Paint.Picture">
                   <p:embed/>
                   <p:pic>
                     <p:nvPicPr>
@@ -10599,7 +10586,7 @@
                       <p:nvPr/>
                     </p:nvPicPr>
                     <p:blipFill>
-                      <a:blip r:embed="rId2"/>
+                      <a:blip r:embed="rId4"/>
                       <a:stretch>
                         <a:fillRect/>
                       </a:stretch>
@@ -10625,6 +10612,13 @@
   <p:clrMapOvr>
     <a:masterClrMapping/>
   </p:clrMapOvr>
+  <p:timing>
+    <p:tnLst>
+      <p:par>
+        <p:cTn id="1" dur="indefinite" restart="never" nodeType="tmRoot"/>
+      </p:par>
+    </p:tnLst>
+  </p:timing>
 </p:sld>
 </file>
 
@@ -10637,7 +10631,14 @@
         <p:cNvGrpSpPr/>
         <p:nvPr/>
       </p:nvGrpSpPr>
-      <p:grpSpPr/>
+      <p:grpSpPr>
+        <a:xfrm>
+          <a:off x="0" y="0"/>
+          <a:ext cx="0" cy="0"/>
+          <a:chOff x="0" y="0"/>
+          <a:chExt cx="0" cy="0"/>
+        </a:xfrm>
+      </p:grpSpPr>
       <p:sp>
         <p:nvSpPr>
           <p:cNvPr id="2" name="Title 1"/>
@@ -10656,12 +10657,12 @@
         </p:spPr>
         <p:txBody>
           <a:bodyPr/>
+          <a:lstStyle/>
           <a:p>
             <a:r>
               <a:rPr lang="en-US"/>
               <a:t>Output</a:t>
             </a:r>
-            <a:endParaRPr lang="en-US"/>
           </a:p>
         </p:txBody>
       </p:sp>
@@ -10678,6 +10679,7 @@
         <p:spPr/>
         <p:txBody>
           <a:bodyPr/>
+          <a:lstStyle/>
           <a:p>
             <a:pPr>
               <a:defRPr/>
@@ -10703,12 +10705,14 @@
         <p:spPr/>
         <p:txBody>
           <a:bodyPr/>
+          <a:lstStyle/>
           <a:p>
             <a:pPr>
               <a:defRPr/>
             </a:pPr>
             <a:fld id="{A01CA5F2-CD08-4EF5-BAD9-872B7BB27165}" type="slidenum">
               <a:rPr lang="en-US" altLang="en-US"/>
+              <a:t>23</a:t>
             </a:fld>
             <a:endParaRPr lang="en-US" altLang="en-US"/>
           </a:p>
@@ -10728,12 +10732,12 @@
           <a:graphicData uri="http://schemas.openxmlformats.org/presentationml/2006/ole">
             <mc:AlternateContent xmlns:mc="http://schemas.openxmlformats.org/markup-compatibility/2006">
               <mc:Choice xmlns:v="urn:schemas-microsoft-com:vml" Requires="v">
-                <p:oleObj spid="_x0000_s7" name="" r:id="rId1" imgW="3225800" imgH="2717800" progId="Paint.Picture">
+                <p:oleObj spid="_x0000_s7170" r:id="rId3" imgW="3225800" imgH="2717800" progId="Paint.Picture">
                   <p:embed/>
                 </p:oleObj>
               </mc:Choice>
               <mc:Fallback>
-                <p:oleObj name="" r:id="rId1" imgW="3225800" imgH="2717800" progId="Paint.Picture">
+                <p:oleObj r:id="rId3" imgW="3225800" imgH="2717800" progId="Paint.Picture">
                   <p:embed/>
                   <p:pic>
                     <p:nvPicPr>
@@ -10742,7 +10746,7 @@
                       <p:nvPr/>
                     </p:nvPicPr>
                     <p:blipFill>
-                      <a:blip r:embed="rId2"/>
+                      <a:blip r:embed="rId4"/>
                       <a:stretch>
                         <a:fillRect/>
                       </a:stretch>
@@ -10768,6 +10772,13 @@
   <p:clrMapOvr>
     <a:masterClrMapping/>
   </p:clrMapOvr>
+  <p:timing>
+    <p:tnLst>
+      <p:par>
+        <p:cTn id="1" dur="indefinite" restart="never" nodeType="tmRoot"/>
+      </p:par>
+    </p:tnLst>
+  </p:timing>
 </p:sld>
 </file>
 
@@ -10867,6 +10878,7 @@
             </a:pPr>
             <a:fld id="{A01CA5F2-CD08-4EF5-BAD9-872B7BB27165}" type="slidenum">
               <a:rPr lang="en-US" altLang="en-US" smtClean="0"/>
+              <a:t>24</a:t>
             </a:fld>
             <a:endParaRPr lang="en-US" altLang="en-US"/>
           </a:p>
@@ -10877,6 +10889,13 @@
   <p:clrMapOvr>
     <a:masterClrMapping/>
   </p:clrMapOvr>
+  <p:timing>
+    <p:tnLst>
+      <p:par>
+        <p:cTn id="1" dur="indefinite" restart="never" nodeType="tmRoot"/>
+      </p:par>
+    </p:tnLst>
+  </p:timing>
 </p:sld>
 </file>
 
@@ -10921,7 +10940,6 @@
               <a:rPr lang="en-US" altLang="en-US" dirty="0"/>
               <a:t>Streams</a:t>
             </a:r>
-            <a:endParaRPr lang="en-US" altLang="en-US" dirty="0"/>
           </a:p>
         </p:txBody>
       </p:sp>
@@ -10953,7 +10971,6 @@
               <a:rPr lang="en-US" altLang="en-US" sz="2000" dirty="0"/>
               <a:t>: an object that either delivers data to its destination (screen, file, etc.) or that takes data from a source (keyboard, file, etc.)</a:t>
             </a:r>
-            <a:endParaRPr lang="en-US" altLang="en-US" sz="2000" dirty="0"/>
           </a:p>
           <a:p>
             <a:pPr lvl="1"/>
@@ -10961,7 +10978,6 @@
               <a:rPr lang="en-US" altLang="en-US" sz="2000" dirty="0"/>
               <a:t>it acts as a buffer between the data source and destination</a:t>
             </a:r>
-            <a:endParaRPr lang="en-US" altLang="en-US" sz="2000" dirty="0"/>
           </a:p>
           <a:p>
             <a:r>
@@ -10972,7 +10988,6 @@
               <a:rPr lang="en-US" altLang="en-US" sz="2000" dirty="0"/>
               <a:t>: a stream that provides input to a program</a:t>
             </a:r>
-            <a:endParaRPr lang="en-US" altLang="en-US" sz="2000" dirty="0"/>
           </a:p>
           <a:p>
             <a:pPr lvl="1"/>
@@ -10986,7 +11001,6 @@
               <a:rPr lang="en-US" altLang="en-US" sz="2000" dirty="0"/>
               <a:t> is an input stream</a:t>
             </a:r>
-            <a:endParaRPr lang="en-US" altLang="en-US" sz="2000" dirty="0"/>
           </a:p>
           <a:p>
             <a:r>
@@ -10997,7 +11011,6 @@
               <a:rPr lang="en-US" altLang="en-US" sz="2000" dirty="0"/>
               <a:t>: a stream that accepts output from a program</a:t>
             </a:r>
-            <a:endParaRPr lang="en-US" altLang="en-US" sz="2000" dirty="0"/>
           </a:p>
           <a:p>
             <a:pPr lvl="1"/>
@@ -11011,14 +11024,12 @@
               <a:rPr lang="en-US" altLang="en-US" sz="2000" dirty="0"/>
               <a:t> is an output stream</a:t>
             </a:r>
-            <a:endParaRPr lang="en-US" altLang="en-US" sz="2000" dirty="0"/>
           </a:p>
           <a:p>
             <a:r>
               <a:rPr lang="en-US" altLang="en-US" sz="2000" dirty="0"/>
               <a:t>A stream connects a program to an I/O object</a:t>
             </a:r>
-            <a:endParaRPr lang="en-US" altLang="en-US" sz="2000" dirty="0"/>
           </a:p>
           <a:p>
             <a:pPr lvl="1"/>
@@ -11032,7 +11043,6 @@
               <a:rPr lang="en-US" altLang="en-US" sz="2000" dirty="0"/>
               <a:t> connects a program to the screen</a:t>
             </a:r>
-            <a:endParaRPr lang="en-US" altLang="en-US" sz="2000" dirty="0"/>
           </a:p>
           <a:p>
             <a:pPr lvl="1"/>
@@ -11046,7 +11056,6 @@
               <a:rPr lang="en-US" altLang="en-US" sz="2000" dirty="0"/>
               <a:t> connects a program to the keyboard</a:t>
             </a:r>
-            <a:endParaRPr lang="en-US" altLang="en-US" sz="2000" dirty="0"/>
           </a:p>
           <a:p>
             <a:endParaRPr lang="en-US" altLang="en-US" sz="2000" dirty="0"/>
@@ -11062,7 +11071,7 @@
           <p:nvPr/>
         </p:nvPicPr>
         <p:blipFill>
-          <a:blip r:embed="rId1">
+          <a:blip r:embed="rId3">
             <a:extLst>
               <a:ext uri="{28A0092B-C50C-407E-A947-70E740481C1C}">
                 <a14:useLocalDpi xmlns:a14="http://schemas.microsoft.com/office/drawing/2010/main" val="0"/>
@@ -11312,7 +11321,7 @@
           <p:nvPr/>
         </p:nvPicPr>
         <p:blipFill>
-          <a:blip r:embed="rId2">
+          <a:blip r:embed="rId4">
             <a:extLst>
               <a:ext uri="{28A0092B-C50C-407E-A947-70E740481C1C}">
                 <a14:useLocalDpi xmlns:a14="http://schemas.microsoft.com/office/drawing/2010/main" val="0"/>
@@ -11547,6 +11556,13 @@
   <p:clrMapOvr>
     <a:masterClrMapping/>
   </p:clrMapOvr>
+  <p:timing>
+    <p:tnLst>
+      <p:par>
+        <p:cTn id="1" dur="indefinite" restart="never" nodeType="tmRoot"/>
+      </p:par>
+    </p:tnLst>
+  </p:timing>
 </p:sld>
 </file>
 
@@ -11619,7 +11635,6 @@
               <a:rPr lang="en-US" altLang="en-US" sz="2000" b="1" i="1" dirty="0" smtClean="0"/>
               <a:t>Java defines two different types of Streams-</a:t>
             </a:r>
-            <a:endParaRPr lang="en-US" altLang="en-US" sz="2000" b="1" i="1" dirty="0" smtClean="0"/>
           </a:p>
           <a:p>
             <a:pPr marL="0" indent="0">
@@ -11637,7 +11652,6 @@
               <a:rPr lang="en-US" altLang="en-US" sz="2000" b="1" i="1" dirty="0" smtClean="0"/>
               <a:t> </a:t>
             </a:r>
-            <a:endParaRPr lang="en-US" altLang="en-US" sz="2000" b="1" i="1" dirty="0" smtClean="0"/>
           </a:p>
           <a:p>
             <a:pPr marL="0" indent="0">
@@ -12169,9 +12183,6 @@
               </a:rPr>
               <a:t>Programs use byte streams to perform input and output of 8-bit bytes</a:t>
             </a:r>
-            <a:endParaRPr lang="en-US" altLang="en-US" sz="2000" dirty="0" smtClean="0">
-              <a:latin typeface="Arial" panose="020B0604020202020204" pitchFamily="34" charset="0"/>
-            </a:endParaRPr>
           </a:p>
           <a:p>
             <a:pPr algn="just"/>
@@ -12181,9 +12192,6 @@
               </a:rPr>
               <a:t>Byte streams are defined by using two class hierarchies</a:t>
             </a:r>
-            <a:endParaRPr lang="en-US" altLang="en-US" sz="2000" dirty="0" smtClean="0">
-              <a:latin typeface="Arial" panose="020B0604020202020204" pitchFamily="34" charset="0"/>
-            </a:endParaRPr>
           </a:p>
           <a:p>
             <a:pPr algn="just"/>
@@ -12268,6 +12276,42 @@
               </a:rPr>
               <a:t> define several key methods that the other stream classes implement</a:t>
             </a:r>
+          </a:p>
+          <a:p>
+            <a:pPr algn="just"/>
+            <a:r>
+              <a:rPr lang="en-US" altLang="en-US" sz="2000" dirty="0" smtClean="0">
+                <a:latin typeface="Arial" panose="020B0604020202020204" pitchFamily="34" charset="0"/>
+              </a:rPr>
+              <a:t>Two of the most important methods are read() and write() , which respectively read and write bytes of data</a:t>
+            </a:r>
+          </a:p>
+          <a:p>
+            <a:pPr algn="just"/>
+            <a:r>
+              <a:rPr lang="en-US" altLang="en-US" sz="2000" dirty="0" smtClean="0">
+                <a:latin typeface="Arial" panose="020B0604020202020204" pitchFamily="34" charset="0"/>
+              </a:rPr>
+              <a:t>Both methods are declared as abstract inside </a:t>
+            </a:r>
+            <a:r>
+              <a:rPr lang="en-US" altLang="en-US" sz="2000" dirty="0" err="1" smtClean="0">
+                <a:latin typeface="Arial" panose="020B0604020202020204" pitchFamily="34" charset="0"/>
+              </a:rPr>
+              <a:t>InputStream</a:t>
+            </a:r>
+            <a:r>
+              <a:rPr lang="en-US" altLang="en-US" sz="2000" dirty="0" smtClean="0">
+                <a:latin typeface="Arial" panose="020B0604020202020204" pitchFamily="34" charset="0"/>
+              </a:rPr>
+              <a:t> and </a:t>
+            </a:r>
+            <a:r>
+              <a:rPr lang="en-US" altLang="en-US" sz="2000" dirty="0" err="1" smtClean="0">
+                <a:latin typeface="Arial" panose="020B0604020202020204" pitchFamily="34" charset="0"/>
+              </a:rPr>
+              <a:t>OutputStream</a:t>
+            </a:r>
             <a:endParaRPr lang="en-US" altLang="en-US" sz="2000" dirty="0" smtClean="0">
               <a:latin typeface="Arial" panose="020B0604020202020204" pitchFamily="34" charset="0"/>
             </a:endParaRPr>
@@ -12278,53 +12322,8 @@
               <a:rPr lang="en-US" altLang="en-US" sz="2000" dirty="0" smtClean="0">
                 <a:latin typeface="Arial" panose="020B0604020202020204" pitchFamily="34" charset="0"/>
               </a:rPr>
-              <a:t>Two of the most important methods are read() and write() , which respectively read and write bytes of data</a:t>
-            </a:r>
-            <a:endParaRPr lang="en-US" altLang="en-US" sz="2000" dirty="0" smtClean="0">
-              <a:latin typeface="Arial" panose="020B0604020202020204" pitchFamily="34" charset="0"/>
-            </a:endParaRPr>
-          </a:p>
-          <a:p>
-            <a:pPr algn="just"/>
-            <a:r>
-              <a:rPr lang="en-US" altLang="en-US" sz="2000" dirty="0" smtClean="0">
-                <a:latin typeface="Arial" panose="020B0604020202020204" pitchFamily="34" charset="0"/>
-              </a:rPr>
-              <a:t>Both methods are declared as abstract inside </a:t>
-            </a:r>
-            <a:r>
-              <a:rPr lang="en-US" altLang="en-US" sz="2000" dirty="0" err="1" smtClean="0">
-                <a:latin typeface="Arial" panose="020B0604020202020204" pitchFamily="34" charset="0"/>
-              </a:rPr>
-              <a:t>InputStream</a:t>
-            </a:r>
-            <a:r>
-              <a:rPr lang="en-US" altLang="en-US" sz="2000" dirty="0" smtClean="0">
-                <a:latin typeface="Arial" panose="020B0604020202020204" pitchFamily="34" charset="0"/>
-              </a:rPr>
-              <a:t> and </a:t>
-            </a:r>
-            <a:r>
-              <a:rPr lang="en-US" altLang="en-US" sz="2000" dirty="0" err="1" smtClean="0">
-                <a:latin typeface="Arial" panose="020B0604020202020204" pitchFamily="34" charset="0"/>
-              </a:rPr>
-              <a:t>OutputStream</a:t>
-            </a:r>
-            <a:endParaRPr lang="en-US" altLang="en-US" sz="2000" dirty="0" smtClean="0">
-              <a:latin typeface="Arial" panose="020B0604020202020204" pitchFamily="34" charset="0"/>
-            </a:endParaRPr>
-          </a:p>
-          <a:p>
-            <a:pPr algn="just"/>
-            <a:r>
-              <a:rPr lang="en-US" altLang="en-US" sz="2000" dirty="0" smtClean="0">
-                <a:latin typeface="Arial" panose="020B0604020202020204" pitchFamily="34" charset="0"/>
-              </a:rPr>
               <a:t>It is important that we have used a finally block to guarantee that both streams will be closed even if an error occurs. This helps resource leaks.</a:t>
             </a:r>
-            <a:endParaRPr lang="en-US" altLang="en-US" sz="2000" dirty="0" smtClean="0">
-              <a:latin typeface="Arial" panose="020B0604020202020204" pitchFamily="34" charset="0"/>
-            </a:endParaRPr>
           </a:p>
           <a:p>
             <a:pPr algn="just"/>
@@ -12477,7 +12476,7 @@
           <p:nvPr/>
         </p:nvPicPr>
         <p:blipFill>
-          <a:blip r:embed="rId1">
+          <a:blip r:embed="rId3">
             <a:extLst>
               <a:ext uri="{28A0092B-C50C-407E-A947-70E740481C1C}">
                 <a14:useLocalDpi xmlns:a14="http://schemas.microsoft.com/office/drawing/2010/main" val="0"/>
@@ -12503,6 +12502,13 @@
   <p:clrMapOvr>
     <a:masterClrMapping/>
   </p:clrMapOvr>
+  <p:timing>
+    <p:tnLst>
+      <p:par>
+        <p:cTn id="1" dur="indefinite" restart="never" nodeType="tmRoot"/>
+      </p:par>
+    </p:tnLst>
+  </p:timing>
 </p:sld>
 </file>
 
@@ -12636,9 +12642,6 @@
               </a:rPr>
               <a:t>.</a:t>
             </a:r>
-            <a:endParaRPr lang="en-US" altLang="en-US" sz="2000" dirty="0" smtClean="0">
-              <a:latin typeface="Arial" panose="020B0604020202020204" pitchFamily="34" charset="0"/>
-            </a:endParaRPr>
           </a:p>
           <a:p>
             <a:pPr marL="0" indent="0">
@@ -12656,9 +12659,6 @@
               </a:rPr>
               <a:t> : contain methods to read from input stream buffer</a:t>
             </a:r>
-            <a:endParaRPr lang="en-US" altLang="en-US" sz="2000" dirty="0" smtClean="0">
-              <a:latin typeface="Arial" panose="020B0604020202020204" pitchFamily="34" charset="0"/>
-            </a:endParaRPr>
           </a:p>
           <a:p>
             <a:pPr marL="0" indent="0">
@@ -12676,9 +12676,6 @@
               </a:rPr>
               <a:t> : to write </a:t>
             </a:r>
-            <a:endParaRPr lang="en-US" altLang="en-US" sz="2000" dirty="0" smtClean="0">
-              <a:latin typeface="Arial" panose="020B0604020202020204" pitchFamily="34" charset="0"/>
-            </a:endParaRPr>
           </a:p>
           <a:p>
             <a:pPr marL="0" indent="0">
@@ -12696,9 +12693,6 @@
               </a:rPr>
               <a:t> : contain methods for reading the Java standard data types</a:t>
             </a:r>
-            <a:endParaRPr lang="en-US" altLang="en-US" sz="2000" dirty="0" smtClean="0">
-              <a:latin typeface="Arial" panose="020B0604020202020204" pitchFamily="34" charset="0"/>
-            </a:endParaRPr>
           </a:p>
           <a:p>
             <a:pPr marL="0" indent="0">
@@ -12716,9 +12710,6 @@
               </a:rPr>
               <a:t> : contain methods for writing the Java standard data types</a:t>
             </a:r>
-            <a:endParaRPr lang="en-US" altLang="en-US" sz="2000" dirty="0" smtClean="0">
-              <a:latin typeface="Arial" panose="020B0604020202020204" pitchFamily="34" charset="0"/>
-            </a:endParaRPr>
           </a:p>
           <a:p>
             <a:pPr marL="0" indent="0">
@@ -12736,9 +12727,6 @@
               </a:rPr>
               <a:t> : Input stream that reads from a file</a:t>
             </a:r>
-            <a:endParaRPr lang="en-US" altLang="en-US" sz="2000" dirty="0" smtClean="0">
-              <a:latin typeface="Arial" panose="020B0604020202020204" pitchFamily="34" charset="0"/>
-            </a:endParaRPr>
           </a:p>
           <a:p>
             <a:pPr marL="0" indent="0">
@@ -12756,9 +12744,6 @@
               </a:rPr>
               <a:t> : output stream the writes to a file</a:t>
             </a:r>
-            <a:endParaRPr lang="en-US" altLang="en-US" sz="2000" dirty="0" smtClean="0">
-              <a:latin typeface="Arial" panose="020B0604020202020204" pitchFamily="34" charset="0"/>
-            </a:endParaRPr>
           </a:p>
           <a:p>
             <a:pPr marL="0" indent="0">
@@ -12776,9 +12761,6 @@
               </a:rPr>
               <a:t> : abstract class that describes stream inputs</a:t>
             </a:r>
-            <a:endParaRPr lang="en-US" altLang="en-US" sz="2000" dirty="0" smtClean="0">
-              <a:latin typeface="Arial" panose="020B0604020202020204" pitchFamily="34" charset="0"/>
-            </a:endParaRPr>
           </a:p>
           <a:p>
             <a:pPr marL="0" indent="0">
@@ -12796,9 +12778,6 @@
               </a:rPr>
               <a:t> : abstract class that describes stream outputs</a:t>
             </a:r>
-            <a:endParaRPr lang="en-US" altLang="en-US" sz="2000" dirty="0" smtClean="0">
-              <a:latin typeface="Arial" panose="020B0604020202020204" pitchFamily="34" charset="0"/>
-            </a:endParaRPr>
           </a:p>
           <a:p>
             <a:pPr marL="0" indent="0">
@@ -12828,9 +12807,6 @@
               </a:rPr>
               <a:t>()</a:t>
             </a:r>
-            <a:endParaRPr lang="en-US" altLang="en-US" sz="2000" dirty="0" smtClean="0">
-              <a:latin typeface="Arial" panose="020B0604020202020204" pitchFamily="34" charset="0"/>
-            </a:endParaRPr>
           </a:p>
           <a:p>
             <a:pPr marL="0" indent="0">
@@ -12848,9 +12824,6 @@
               </a:rPr>
               <a:t> : Input pipe</a:t>
             </a:r>
-            <a:endParaRPr lang="en-US" altLang="en-US" sz="2000" dirty="0" smtClean="0">
-              <a:latin typeface="Arial" panose="020B0604020202020204" pitchFamily="34" charset="0"/>
-            </a:endParaRPr>
           </a:p>
           <a:p>
             <a:pPr marL="0" indent="0">
@@ -12868,9 +12841,6 @@
               </a:rPr>
               <a:t> : Output pipe</a:t>
             </a:r>
-            <a:endParaRPr lang="en-US" altLang="en-US" sz="2000" dirty="0" smtClean="0">
-              <a:latin typeface="Arial" panose="020B0604020202020204" pitchFamily="34" charset="0"/>
-            </a:endParaRPr>
           </a:p>
           <a:p>
             <a:pPr marL="0" indent="0">
@@ -12895,6 +12865,13 @@
   <p:clrMapOvr>
     <a:masterClrMapping/>
   </p:clrMapOvr>
+  <p:timing>
+    <p:tnLst>
+      <p:par>
+        <p:cTn id="1" dur="indefinite" restart="never" nodeType="tmRoot"/>
+      </p:par>
+    </p:tnLst>
+  </p:timing>
 </p:sld>
 </file>
 
@@ -13003,10 +12980,6 @@
               </a:rPr>
               <a:t>The java.io.* package</a:t>
             </a:r>
-            <a:endParaRPr lang="en-US" sz="2400" dirty="0" smtClean="0">
-              <a:latin typeface="Times New Roman" panose="02020603050405020304" pitchFamily="18" charset="0"/>
-              <a:cs typeface="Times New Roman" panose="02020603050405020304" pitchFamily="18" charset="0"/>
-            </a:endParaRPr>
           </a:p>
           <a:p>
             <a:pPr fontAlgn="auto">
@@ -13028,10 +13001,6 @@
               </a:rPr>
               <a:t>File operations</a:t>
             </a:r>
-            <a:endParaRPr lang="en-US" sz="2400" dirty="0" smtClean="0">
-              <a:latin typeface="Times New Roman" panose="02020603050405020304" pitchFamily="18" charset="0"/>
-              <a:cs typeface="Times New Roman" panose="02020603050405020304" pitchFamily="18" charset="0"/>
-            </a:endParaRPr>
           </a:p>
           <a:p>
             <a:pPr fontAlgn="auto">
@@ -13053,10 +13022,6 @@
               </a:rPr>
               <a:t>Channel and Buffer usages</a:t>
             </a:r>
-            <a:endParaRPr lang="en-US" sz="2400" dirty="0" smtClean="0">
-              <a:latin typeface="Times New Roman" panose="02020603050405020304" pitchFamily="18" charset="0"/>
-              <a:cs typeface="Times New Roman" panose="02020603050405020304" pitchFamily="18" charset="0"/>
-            </a:endParaRPr>
           </a:p>
           <a:p>
             <a:pPr fontAlgn="auto">
@@ -13078,10 +13043,6 @@
               </a:rPr>
               <a:t>Serialization of network objects</a:t>
             </a:r>
-            <a:endParaRPr lang="en-US" sz="2400" dirty="0" smtClean="0">
-              <a:latin typeface="Times New Roman" panose="02020603050405020304" pitchFamily="18" charset="0"/>
-              <a:cs typeface="Times New Roman" panose="02020603050405020304" pitchFamily="18" charset="0"/>
-            </a:endParaRPr>
           </a:p>
           <a:p>
             <a:pPr fontAlgn="auto">
@@ -13130,6 +13091,7 @@
             </a:pPr>
             <a:fld id="{A01CA5F2-CD08-4EF5-BAD9-872B7BB27165}" type="slidenum">
               <a:rPr lang="en-US" altLang="en-US" smtClean="0"/>
+              <a:t>3</a:t>
             </a:fld>
             <a:endParaRPr lang="en-US" altLang="en-US"/>
           </a:p>
@@ -13229,11 +13191,11 @@
   <p:clrMapOvr>
     <a:masterClrMapping/>
   </p:clrMapOvr>
-  <mc:AlternateContent xmlns:mc="http://schemas.openxmlformats.org/markup-compatibility/2006">
-    <mc:Choice xmlns:p14="http://schemas.microsoft.com/office/powerpoint/2010/main" Requires="p14">
+  <mc:AlternateContent xmlns:mc="http://schemas.openxmlformats.org/markup-compatibility/2006" xmlns:p14="http://schemas.microsoft.com/office/powerpoint/2010/main">
+    <mc:Choice Requires="p14">
       <p:transition spd="slow" p14:dur="2000"/>
     </mc:Choice>
-    <mc:Fallback>
+    <mc:Fallback xmlns="">
       <p:transition spd="slow"/>
     </mc:Fallback>
   </mc:AlternateContent>
@@ -13353,9 +13315,6 @@
               </a:rPr>
               <a:t>.</a:t>
             </a:r>
-            <a:endParaRPr lang="en-US" altLang="en-US" sz="2000" dirty="0" smtClean="0">
-              <a:latin typeface="Arial" panose="020B0604020202020204" pitchFamily="34" charset="0"/>
-            </a:endParaRPr>
           </a:p>
           <a:p>
             <a:pPr marL="0" indent="0">
@@ -13379,9 +13338,6 @@
               </a:rPr>
               <a:t> available() </a:t>
             </a:r>
-            <a:endParaRPr lang="en-US" altLang="en-US" sz="2000" dirty="0" smtClean="0">
-              <a:latin typeface="Arial" panose="020B0604020202020204" pitchFamily="34" charset="0"/>
-            </a:endParaRPr>
           </a:p>
           <a:p>
             <a:pPr marL="0" indent="0">
@@ -13399,9 +13355,6 @@
               </a:rPr>
               <a:t>void close()</a:t>
             </a:r>
-            <a:endParaRPr lang="en-US" altLang="en-US" sz="2000" dirty="0" smtClean="0">
-              <a:latin typeface="Arial" panose="020B0604020202020204" pitchFamily="34" charset="0"/>
-            </a:endParaRPr>
           </a:p>
           <a:p>
             <a:pPr marL="0" indent="0">
@@ -13443,9 +13396,6 @@
               </a:rPr>
               <a:t>)</a:t>
             </a:r>
-            <a:endParaRPr lang="en-US" altLang="en-US" sz="2000" dirty="0" smtClean="0">
-              <a:latin typeface="Arial" panose="020B0604020202020204" pitchFamily="34" charset="0"/>
-            </a:endParaRPr>
           </a:p>
           <a:p>
             <a:pPr marL="0" indent="0">
@@ -13469,9 +13419,6 @@
               </a:rPr>
               <a:t> read()</a:t>
             </a:r>
-            <a:endParaRPr lang="en-US" altLang="en-US" sz="2000" dirty="0" smtClean="0">
-              <a:latin typeface="Arial" panose="020B0604020202020204" pitchFamily="34" charset="0"/>
-            </a:endParaRPr>
           </a:p>
           <a:p>
             <a:pPr marL="0" indent="0">
@@ -13495,9 +13442,6 @@
               </a:rPr>
               <a:t> read(byte buffer[])</a:t>
             </a:r>
-            <a:endParaRPr lang="en-US" altLang="en-US" sz="2000" dirty="0" smtClean="0">
-              <a:latin typeface="Arial" panose="020B0604020202020204" pitchFamily="34" charset="0"/>
-            </a:endParaRPr>
           </a:p>
           <a:p>
             <a:pPr marL="0" indent="0">
@@ -13643,9 +13587,6 @@
               </a:rPr>
               <a:t>.</a:t>
             </a:r>
-            <a:endParaRPr lang="en-US" altLang="en-US" sz="2000" dirty="0" smtClean="0">
-              <a:latin typeface="Arial" panose="020B0604020202020204" pitchFamily="34" charset="0"/>
-            </a:endParaRPr>
           </a:p>
           <a:p>
             <a:pPr marL="0" indent="0">
@@ -13663,9 +13604,6 @@
               </a:rPr>
               <a:t>void close() </a:t>
             </a:r>
-            <a:endParaRPr lang="en-US" altLang="en-US" sz="2000" dirty="0" smtClean="0">
-              <a:latin typeface="Arial" panose="020B0604020202020204" pitchFamily="34" charset="0"/>
-            </a:endParaRPr>
           </a:p>
           <a:p>
             <a:pPr marL="0" indent="0">
@@ -13683,9 +13621,6 @@
               </a:rPr>
               <a:t>void flush()</a:t>
             </a:r>
-            <a:endParaRPr lang="en-US" altLang="en-US" sz="2000" dirty="0" smtClean="0">
-              <a:latin typeface="Arial" panose="020B0604020202020204" pitchFamily="34" charset="0"/>
-            </a:endParaRPr>
           </a:p>
           <a:p>
             <a:pPr marL="0" indent="0">
@@ -13715,9 +13650,6 @@
               </a:rPr>
               <a:t> b)</a:t>
             </a:r>
-            <a:endParaRPr lang="en-US" altLang="en-US" sz="2000" dirty="0" smtClean="0">
-              <a:latin typeface="Arial" panose="020B0604020202020204" pitchFamily="34" charset="0"/>
-            </a:endParaRPr>
           </a:p>
           <a:p>
             <a:pPr marL="0" indent="0">
@@ -13735,9 +13667,6 @@
               </a:rPr>
               <a:t>void write(byte[] buffer)</a:t>
             </a:r>
-            <a:endParaRPr lang="en-US" altLang="en-US" sz="2000" dirty="0" smtClean="0">
-              <a:latin typeface="Arial" panose="020B0604020202020204" pitchFamily="34" charset="0"/>
-            </a:endParaRPr>
           </a:p>
           <a:p>
             <a:pPr marL="0" indent="0">
@@ -13791,9 +13720,6 @@
               </a:rPr>
               <a:t>)</a:t>
             </a:r>
-            <a:endParaRPr lang="en-US" altLang="en-US" sz="2000" dirty="0" smtClean="0">
-              <a:latin typeface="Arial" panose="020B0604020202020204" pitchFamily="34" charset="0"/>
-            </a:endParaRPr>
           </a:p>
           <a:p>
             <a:pPr marL="0" indent="0">
@@ -13924,9 +13850,6 @@
               </a:rPr>
               <a:t> are stream classes which create streams linked to files.</a:t>
             </a:r>
-            <a:endParaRPr lang="en-US" altLang="en-US" sz="2000" dirty="0" smtClean="0">
-              <a:latin typeface="Arial" panose="020B0604020202020204" pitchFamily="34" charset="0"/>
-            </a:endParaRPr>
           </a:p>
           <a:p>
             <a:r>
@@ -13941,9 +13864,6 @@
               </a:rPr>
               <a:t>r</a:t>
             </a:r>
-            <a:endParaRPr lang="en-US" altLang="en-US" sz="2000" u="sng" dirty="0" smtClean="0">
-              <a:latin typeface="Arial" panose="020B0604020202020204" pitchFamily="34" charset="0"/>
-            </a:endParaRPr>
           </a:p>
           <a:p>
             <a:r>
@@ -14318,72 +14238,63 @@
               </a:rPr>
               <a:t> </a:t>
             </a:r>
+          </a:p>
+          <a:p>
+            <a:r>
+              <a:rPr lang="en-US" altLang="en-US" sz="2000" dirty="0">
+                <a:latin typeface="Arial" panose="020B0604020202020204" pitchFamily="34" charset="0"/>
+              </a:rPr>
+              <a:t> </a:t>
+            </a:r>
+            <a:r>
+              <a:rPr lang="en-US" altLang="en-US" sz="2000" dirty="0" err="1" smtClean="0">
+                <a:latin typeface="Arial" panose="020B0604020202020204" pitchFamily="34" charset="0"/>
+              </a:rPr>
+              <a:t>int</a:t>
+            </a:r>
+            <a:r>
+              <a:rPr lang="en-US" altLang="en-US" sz="2000" dirty="0" smtClean="0">
+                <a:latin typeface="Arial" panose="020B0604020202020204" pitchFamily="34" charset="0"/>
+              </a:rPr>
+              <a:t> read() throws </a:t>
+            </a:r>
+            <a:r>
+              <a:rPr lang="en-US" altLang="en-US" sz="2000" dirty="0" err="1" smtClean="0">
+                <a:latin typeface="Arial" panose="020B0604020202020204" pitchFamily="34" charset="0"/>
+              </a:rPr>
+              <a:t>IOException</a:t>
+            </a:r>
             <a:endParaRPr lang="en-US" altLang="en-US" sz="2000" dirty="0" smtClean="0">
               <a:latin typeface="Arial" panose="020B0604020202020204" pitchFamily="34" charset="0"/>
             </a:endParaRPr>
           </a:p>
           <a:p>
             <a:r>
-              <a:rPr lang="en-US" altLang="en-US" sz="2000" dirty="0">
-                <a:latin typeface="Arial" panose="020B0604020202020204" pitchFamily="34" charset="0"/>
-              </a:rPr>
-              <a:t> </a:t>
+              <a:rPr lang="en-US" altLang="en-US" sz="2000" dirty="0" smtClean="0">
+                <a:latin typeface="Arial" panose="020B0604020202020204" pitchFamily="34" charset="0"/>
+              </a:rPr>
+              <a:t>Each time read() is called, it reads a single byte from the file and returns the byte as an integer value.</a:t>
+            </a:r>
+          </a:p>
+          <a:p>
+            <a:r>
+              <a:rPr lang="en-US" altLang="en-US" sz="2000" dirty="0" smtClean="0">
+                <a:latin typeface="Arial" panose="020B0604020202020204" pitchFamily="34" charset="0"/>
+              </a:rPr>
+              <a:t>To write a file, we can use the write() method defined by </a:t>
             </a:r>
             <a:r>
               <a:rPr lang="en-US" altLang="en-US" sz="2000" dirty="0" err="1" smtClean="0">
                 <a:latin typeface="Arial" panose="020B0604020202020204" pitchFamily="34" charset="0"/>
               </a:rPr>
-              <a:t>int</a:t>
+              <a:t>FileOutputStream</a:t>
             </a:r>
             <a:r>
               <a:rPr lang="en-US" altLang="en-US" sz="2000" dirty="0" smtClean="0">
                 <a:latin typeface="Arial" panose="020B0604020202020204" pitchFamily="34" charset="0"/>
               </a:rPr>
-              <a:t> read() throws </a:t>
-            </a:r>
-            <a:r>
-              <a:rPr lang="en-US" altLang="en-US" sz="2000" dirty="0" err="1" smtClean="0">
-                <a:latin typeface="Arial" panose="020B0604020202020204" pitchFamily="34" charset="0"/>
-              </a:rPr>
-              <a:t>IOException</a:t>
-            </a:r>
-            <a:endParaRPr lang="en-US" altLang="en-US" sz="2000" dirty="0" smtClean="0">
-              <a:latin typeface="Arial" panose="020B0604020202020204" pitchFamily="34" charset="0"/>
-            </a:endParaRPr>
-          </a:p>
-          <a:p>
-            <a:r>
-              <a:rPr lang="en-US" altLang="en-US" sz="2000" dirty="0" smtClean="0">
-                <a:latin typeface="Arial" panose="020B0604020202020204" pitchFamily="34" charset="0"/>
-              </a:rPr>
-              <a:t>Each time read() is called, it reads a single byte from the file and returns the byte as an integer value.</a:t>
-            </a:r>
-            <a:endParaRPr lang="en-US" altLang="en-US" sz="2000" dirty="0" smtClean="0">
-              <a:latin typeface="Arial" panose="020B0604020202020204" pitchFamily="34" charset="0"/>
-            </a:endParaRPr>
-          </a:p>
-          <a:p>
-            <a:r>
-              <a:rPr lang="en-US" altLang="en-US" sz="2000" dirty="0" smtClean="0">
-                <a:latin typeface="Arial" panose="020B0604020202020204" pitchFamily="34" charset="0"/>
-              </a:rPr>
-              <a:t>To write a file, we can use the write() method defined by </a:t>
-            </a:r>
-            <a:r>
-              <a:rPr lang="en-US" altLang="en-US" sz="2000" dirty="0" err="1" smtClean="0">
-                <a:latin typeface="Arial" panose="020B0604020202020204" pitchFamily="34" charset="0"/>
-              </a:rPr>
-              <a:t>FileOutputStream</a:t>
-            </a:r>
-            <a:r>
-              <a:rPr lang="en-US" altLang="en-US" sz="2000" dirty="0" smtClean="0">
-                <a:latin typeface="Arial" panose="020B0604020202020204" pitchFamily="34" charset="0"/>
-              </a:rPr>
               <a:t>.</a:t>
             </a:r>
-            <a:endParaRPr lang="en-US" altLang="en-US" sz="2000" dirty="0" smtClean="0">
-              <a:latin typeface="Arial" panose="020B0604020202020204" pitchFamily="34" charset="0"/>
-            </a:endParaRPr>
           </a:p>
           <a:p>
             <a:r>
@@ -14552,12 +14463,12 @@
           <a:graphicData uri="http://schemas.openxmlformats.org/presentationml/2006/ole">
             <mc:AlternateContent xmlns:mc="http://schemas.openxmlformats.org/markup-compatibility/2006">
               <mc:Choice xmlns:v="urn:schemas-microsoft-com:vml" Requires="v">
-                <p:oleObj spid="_x0000_s4" name="" r:id="rId1" imgW="7734300" imgH="3886200" progId="Paint.Picture">
+                <p:oleObj spid="_x0000_s8194" r:id="rId4" imgW="7734300" imgH="3886200" progId="Paint.Picture">
                   <p:embed/>
                 </p:oleObj>
               </mc:Choice>
               <mc:Fallback>
-                <p:oleObj name="" r:id="rId1" imgW="7734300" imgH="3886200" progId="Paint.Picture">
+                <p:oleObj r:id="rId4" imgW="7734300" imgH="3886200" progId="Paint.Picture">
                   <p:embed/>
                   <p:pic>
                     <p:nvPicPr>
@@ -14566,7 +14477,7 @@
                       <p:nvPr/>
                     </p:nvPicPr>
                     <p:blipFill>
-                      <a:blip r:embed="rId2"/>
+                      <a:blip r:embed="rId5"/>
                       <a:stretch>
                         <a:fillRect/>
                       </a:stretch>
@@ -14604,7 +14515,14 @@
         <p:cNvGrpSpPr/>
         <p:nvPr/>
       </p:nvGrpSpPr>
-      <p:grpSpPr/>
+      <p:grpSpPr>
+        <a:xfrm>
+          <a:off x="0" y="0"/>
+          <a:ext cx="0" cy="0"/>
+          <a:chOff x="0" y="0"/>
+          <a:chExt cx="0" cy="0"/>
+        </a:xfrm>
+      </p:grpSpPr>
       <p:sp>
         <p:nvSpPr>
           <p:cNvPr id="2" name="Title 1"/>
@@ -14618,12 +14536,12 @@
         <p:spPr/>
         <p:txBody>
           <a:bodyPr/>
+          <a:lstStyle/>
           <a:p>
             <a:r>
               <a:rPr lang="en-US"/>
               <a:t>Output</a:t>
             </a:r>
-            <a:endParaRPr lang="en-US"/>
           </a:p>
         </p:txBody>
       </p:sp>
@@ -14640,6 +14558,7 @@
         <p:spPr/>
         <p:txBody>
           <a:bodyPr/>
+          <a:lstStyle/>
           <a:p>
             <a:pPr>
               <a:defRPr/>
@@ -14665,12 +14584,14 @@
         <p:spPr/>
         <p:txBody>
           <a:bodyPr/>
+          <a:lstStyle/>
           <a:p>
             <a:pPr>
               <a:defRPr/>
             </a:pPr>
             <a:fld id="{A01CA5F2-CD08-4EF5-BAD9-872B7BB27165}" type="slidenum">
               <a:rPr lang="en-US" altLang="en-US"/>
+              <a:t>35</a:t>
             </a:fld>
             <a:endParaRPr lang="en-US" altLang="en-US"/>
           </a:p>
@@ -14690,12 +14611,12 @@
           <a:graphicData uri="http://schemas.openxmlformats.org/presentationml/2006/ole">
             <mc:AlternateContent xmlns:mc="http://schemas.openxmlformats.org/markup-compatibility/2006">
               <mc:Choice xmlns:v="urn:schemas-microsoft-com:vml" Requires="v">
-                <p:oleObj spid="_x0000_s7" name="" r:id="rId1" imgW="4387850" imgH="615950" progId="Paint.Picture">
+                <p:oleObj spid="_x0000_s9219" r:id="rId3" imgW="4387850" imgH="615950" progId="Paint.Picture">
                   <p:embed/>
                 </p:oleObj>
               </mc:Choice>
               <mc:Fallback>
-                <p:oleObj name="" r:id="rId1" imgW="4387850" imgH="615950" progId="Paint.Picture">
+                <p:oleObj r:id="rId3" imgW="4387850" imgH="615950" progId="Paint.Picture">
                   <p:embed/>
                   <p:pic>
                     <p:nvPicPr>
@@ -14704,7 +14625,7 @@
                       <p:nvPr/>
                     </p:nvPicPr>
                     <p:blipFill>
-                      <a:blip r:embed="rId2"/>
+                      <a:blip r:embed="rId4"/>
                       <a:stretch>
                         <a:fillRect/>
                       </a:stretch>
@@ -14728,7 +14649,7 @@
       <p:graphicFrame>
         <p:nvGraphicFramePr>
           <p:cNvPr id="8" name="Object 7">
-            <a:hlinkClick r:id="" action="ppaction://ole?verb="/>
+            <a:hlinkClick r:id="" action="ppaction://ole?verb=0"/>
           </p:cNvPr>
           <p:cNvGraphicFramePr>
             <a:graphicFrameLocks noChangeAspect="1"/>
@@ -14743,12 +14664,12 @@
           <a:graphicData uri="http://schemas.openxmlformats.org/presentationml/2006/ole">
             <mc:AlternateContent xmlns:mc="http://schemas.openxmlformats.org/markup-compatibility/2006">
               <mc:Choice xmlns:v="urn:schemas-microsoft-com:vml" Requires="v">
-                <p:oleObj spid="_x0000_s2049" name="" showAsIcon="1" r:id="rId3" imgW="971550" imgH="971550" progId="Package">
+                <p:oleObj spid="_x0000_s9220" showAsIcon="1" r:id="rId5" imgW="971550" imgH="971550" progId="Package">
                   <p:embed/>
                 </p:oleObj>
               </mc:Choice>
               <mc:Fallback>
-                <p:oleObj name="" showAsIcon="1" r:id="rId3" imgW="971550" imgH="971550" progId="Package">
+                <p:oleObj showAsIcon="1" r:id="rId5" imgW="971550" imgH="971550" progId="Package">
                   <p:embed/>
                   <p:pic>
                     <p:nvPicPr>
@@ -14757,7 +14678,7 @@
                       <p:nvPr/>
                     </p:nvPicPr>
                     <p:blipFill>
-                      <a:blip r:embed="rId4"/>
+                      <a:blip r:embed="rId6"/>
                       <a:stretch>
                         <a:fillRect/>
                       </a:stretch>
@@ -14795,51 +14716,35 @@
         <p:cNvGrpSpPr/>
         <p:nvPr/>
       </p:nvGrpSpPr>
-      <p:grpSpPr/>
-      <p:sp>
-        <p:nvSpPr>
-          <p:cNvPr id="4" name="Footer Placeholder 3"/>
+      <p:grpSpPr>
+        <a:xfrm>
+          <a:off x="0" y="0"/>
+          <a:ext cx="0" cy="0"/>
+          <a:chOff x="0" y="0"/>
+          <a:chExt cx="0" cy="0"/>
+        </a:xfrm>
+      </p:grpSpPr>
+      <p:sp>
+        <p:nvSpPr>
+          <p:cNvPr id="5" name="Slide Number Placeholder 4"/>
           <p:cNvSpPr>
             <a:spLocks noGrp="1"/>
           </p:cNvSpPr>
           <p:nvPr>
-            <p:ph type="ftr" sz="quarter" idx="11"/>
+            <p:ph type="sldNum" sz="quarter" idx="12"/>
           </p:nvPr>
         </p:nvSpPr>
         <p:spPr/>
         <p:txBody>
           <a:bodyPr/>
+          <a:lstStyle/>
           <a:p>
             <a:pPr>
               <a:defRPr/>
             </a:pPr>
-            <a:r>
-              <a:rPr lang="en-US" smtClean="0"/>
-              <a:t>Mr. R C Ravindranath, Asst. Prof, SOE-CSE</a:t>
-            </a:r>
-            <a:endParaRPr lang="en-US"/>
-          </a:p>
-        </p:txBody>
-      </p:sp>
-      <p:sp>
-        <p:nvSpPr>
-          <p:cNvPr id="5" name="Slide Number Placeholder 4"/>
-          <p:cNvSpPr>
-            <a:spLocks noGrp="1"/>
-          </p:cNvSpPr>
-          <p:nvPr>
-            <p:ph type="sldNum" sz="quarter" idx="12"/>
-          </p:nvPr>
-        </p:nvSpPr>
-        <p:spPr/>
-        <p:txBody>
-          <a:bodyPr/>
-          <a:p>
-            <a:pPr>
-              <a:defRPr/>
-            </a:pPr>
             <a:fld id="{A01CA5F2-CD08-4EF5-BAD9-872B7BB27165}" type="slidenum">
               <a:rPr lang="en-US" altLang="en-US"/>
+              <a:t>36</a:t>
             </a:fld>
             <a:endParaRPr lang="en-US" altLang="en-US"/>
           </a:p>
@@ -14895,12 +14800,12 @@
           <a:graphicData uri="http://schemas.openxmlformats.org/presentationml/2006/ole">
             <mc:AlternateContent xmlns:mc="http://schemas.openxmlformats.org/markup-compatibility/2006">
               <mc:Choice xmlns:v="urn:schemas-microsoft-com:vml" Requires="v">
-                <p:oleObj spid="_x0000_s7" name="" r:id="rId1" imgW="6819900" imgH="3613150" progId="Paint.Picture">
+                <p:oleObj spid="_x0000_s10242" r:id="rId3" imgW="6819900" imgH="3613150" progId="Paint.Picture">
                   <p:embed/>
                 </p:oleObj>
               </mc:Choice>
               <mc:Fallback>
-                <p:oleObj name="" r:id="rId1" imgW="6819900" imgH="3613150" progId="Paint.Picture">
+                <p:oleObj r:id="rId3" imgW="6819900" imgH="3613150" progId="Paint.Picture">
                   <p:embed/>
                   <p:pic>
                     <p:nvPicPr>
@@ -14909,7 +14814,7 @@
                       <p:nvPr/>
                     </p:nvPicPr>
                     <p:blipFill>
-                      <a:blip r:embed="rId2"/>
+                      <a:blip r:embed="rId4"/>
                       <a:stretch>
                         <a:fillRect/>
                       </a:stretch>
@@ -14947,7 +14852,14 @@
         <p:cNvGrpSpPr/>
         <p:nvPr/>
       </p:nvGrpSpPr>
-      <p:grpSpPr/>
+      <p:grpSpPr>
+        <a:xfrm>
+          <a:off x="0" y="0"/>
+          <a:ext cx="0" cy="0"/>
+          <a:chOff x="0" y="0"/>
+          <a:chExt cx="0" cy="0"/>
+        </a:xfrm>
+      </p:grpSpPr>
       <p:sp>
         <p:nvSpPr>
           <p:cNvPr id="2" name="Title 1"/>
@@ -14961,59 +14873,36 @@
         <p:spPr/>
         <p:txBody>
           <a:bodyPr/>
+          <a:lstStyle/>
           <a:p>
             <a:r>
               <a:rPr lang="en-US"/>
               <a:t>Output</a:t>
             </a:r>
-            <a:endParaRPr lang="en-US"/>
-          </a:p>
-        </p:txBody>
-      </p:sp>
-      <p:sp>
-        <p:nvSpPr>
-          <p:cNvPr id="4" name="Footer Placeholder 3"/>
+          </a:p>
+        </p:txBody>
+      </p:sp>
+      <p:sp>
+        <p:nvSpPr>
+          <p:cNvPr id="5" name="Slide Number Placeholder 4"/>
           <p:cNvSpPr>
             <a:spLocks noGrp="1"/>
           </p:cNvSpPr>
           <p:nvPr>
-            <p:ph type="ftr" sz="quarter" idx="11"/>
+            <p:ph type="sldNum" sz="quarter" idx="12"/>
           </p:nvPr>
         </p:nvSpPr>
         <p:spPr/>
         <p:txBody>
           <a:bodyPr/>
+          <a:lstStyle/>
           <a:p>
             <a:pPr>
               <a:defRPr/>
             </a:pPr>
-            <a:r>
-              <a:rPr lang="en-US" smtClean="0"/>
-              <a:t>Mr. R C Ravindranath, Asst. Prof, SOE-CSE</a:t>
-            </a:r>
-            <a:endParaRPr lang="en-US"/>
-          </a:p>
-        </p:txBody>
-      </p:sp>
-      <p:sp>
-        <p:nvSpPr>
-          <p:cNvPr id="5" name="Slide Number Placeholder 4"/>
-          <p:cNvSpPr>
-            <a:spLocks noGrp="1"/>
-          </p:cNvSpPr>
-          <p:nvPr>
-            <p:ph type="sldNum" sz="quarter" idx="12"/>
-          </p:nvPr>
-        </p:nvSpPr>
-        <p:spPr/>
-        <p:txBody>
-          <a:bodyPr/>
-          <a:p>
-            <a:pPr>
-              <a:defRPr/>
-            </a:pPr>
             <a:fld id="{A01CA5F2-CD08-4EF5-BAD9-872B7BB27165}" type="slidenum">
               <a:rPr lang="en-US" altLang="en-US"/>
+              <a:t>37</a:t>
             </a:fld>
             <a:endParaRPr lang="en-US" altLang="en-US"/>
           </a:p>
@@ -15033,12 +14922,12 @@
           <a:graphicData uri="http://schemas.openxmlformats.org/presentationml/2006/ole">
             <mc:AlternateContent xmlns:mc="http://schemas.openxmlformats.org/markup-compatibility/2006">
               <mc:Choice xmlns:v="urn:schemas-microsoft-com:vml" Requires="v">
-                <p:oleObj spid="_x0000_s9" name="" r:id="rId1" imgW="5156200" imgH="596900" progId="Paint.Picture">
+                <p:oleObj spid="_x0000_s11267" r:id="rId3" imgW="5156200" imgH="596900" progId="Paint.Picture">
                   <p:embed/>
                 </p:oleObj>
               </mc:Choice>
               <mc:Fallback>
-                <p:oleObj name="" r:id="rId1" imgW="5156200" imgH="596900" progId="Paint.Picture">
+                <p:oleObj r:id="rId3" imgW="5156200" imgH="596900" progId="Paint.Picture">
                   <p:embed/>
                   <p:pic>
                     <p:nvPicPr>
@@ -15047,7 +14936,7 @@
                       <p:nvPr/>
                     </p:nvPicPr>
                     <p:blipFill>
-                      <a:blip r:embed="rId2"/>
+                      <a:blip r:embed="rId4"/>
                       <a:stretch>
                         <a:fillRect/>
                       </a:stretch>
@@ -15071,7 +14960,7 @@
       <p:graphicFrame>
         <p:nvGraphicFramePr>
           <p:cNvPr id="10" name="Object 9">
-            <a:hlinkClick r:id="" action="ppaction://ole?verb="/>
+            <a:hlinkClick r:id="" action="ppaction://ole?verb=0"/>
           </p:cNvPr>
           <p:cNvGraphicFramePr>
             <a:graphicFrameLocks noChangeAspect="1"/>
@@ -15086,12 +14975,12 @@
           <a:graphicData uri="http://schemas.openxmlformats.org/presentationml/2006/ole">
             <mc:AlternateContent xmlns:mc="http://schemas.openxmlformats.org/markup-compatibility/2006">
               <mc:Choice xmlns:v="urn:schemas-microsoft-com:vml" Requires="v">
-                <p:oleObj spid="_x0000_s3073" name="" showAsIcon="1" r:id="rId3" imgW="971550" imgH="971550" progId="Package">
+                <p:oleObj spid="_x0000_s11268" showAsIcon="1" r:id="rId5" imgW="971550" imgH="971550" progId="Package">
                   <p:embed/>
                 </p:oleObj>
               </mc:Choice>
               <mc:Fallback>
-                <p:oleObj name="" showAsIcon="1" r:id="rId3" imgW="971550" imgH="971550" progId="Package">
+                <p:oleObj showAsIcon="1" r:id="rId5" imgW="971550" imgH="971550" progId="Package">
                   <p:embed/>
                   <p:pic>
                     <p:nvPicPr>
@@ -15100,7 +14989,7 @@
                       <p:nvPr/>
                     </p:nvPicPr>
                     <p:blipFill>
-                      <a:blip r:embed="rId4"/>
+                      <a:blip r:embed="rId6"/>
                       <a:stretch>
                         <a:fillRect/>
                       </a:stretch>
@@ -15138,7 +15027,14 @@
         <p:cNvGrpSpPr/>
         <p:nvPr/>
       </p:nvGrpSpPr>
-      <p:grpSpPr/>
+      <p:grpSpPr>
+        <a:xfrm>
+          <a:off x="0" y="0"/>
+          <a:ext cx="0" cy="0"/>
+          <a:chOff x="0" y="0"/>
+          <a:chExt cx="0" cy="0"/>
+        </a:xfrm>
+      </p:grpSpPr>
       <p:sp>
         <p:nvSpPr>
           <p:cNvPr id="2" name="Title 1"/>
@@ -15157,6 +15053,7 @@
         </p:spPr>
         <p:txBody>
           <a:bodyPr/>
+          <a:lstStyle/>
           <a:p>
             <a:pPr algn="ctr"/>
             <a:r>
@@ -15165,56 +15062,30 @@
               </a:rPr>
               <a:t>File Streams vs Buffered Streams</a:t>
             </a:r>
-            <a:endParaRPr lang="en-US" altLang="en-US" sz="3600" b="1">
-              <a:sym typeface="+mn-ea"/>
-            </a:endParaRPr>
-          </a:p>
-        </p:txBody>
-      </p:sp>
-      <p:sp>
-        <p:nvSpPr>
-          <p:cNvPr id="4" name="Footer Placeholder 3"/>
+          </a:p>
+        </p:txBody>
+      </p:sp>
+      <p:sp>
+        <p:nvSpPr>
+          <p:cNvPr id="5" name="Slide Number Placeholder 4"/>
           <p:cNvSpPr>
             <a:spLocks noGrp="1"/>
           </p:cNvSpPr>
           <p:nvPr>
-            <p:ph type="ftr" sz="quarter" idx="11"/>
+            <p:ph type="sldNum" sz="quarter" idx="12"/>
           </p:nvPr>
         </p:nvSpPr>
         <p:spPr/>
         <p:txBody>
           <a:bodyPr/>
+          <a:lstStyle/>
           <a:p>
             <a:pPr>
               <a:defRPr/>
             </a:pPr>
-            <a:r>
-              <a:rPr lang="en-US" smtClean="0"/>
-              <a:t>Mr. R C Ravindranath, Asst. Prof, SOE-CSE</a:t>
-            </a:r>
-            <a:endParaRPr lang="en-US"/>
-          </a:p>
-        </p:txBody>
-      </p:sp>
-      <p:sp>
-        <p:nvSpPr>
-          <p:cNvPr id="5" name="Slide Number Placeholder 4"/>
-          <p:cNvSpPr>
-            <a:spLocks noGrp="1"/>
-          </p:cNvSpPr>
-          <p:nvPr>
-            <p:ph type="sldNum" sz="quarter" idx="12"/>
-          </p:nvPr>
-        </p:nvSpPr>
-        <p:spPr/>
-        <p:txBody>
-          <a:bodyPr/>
-          <a:p>
-            <a:pPr>
-              <a:defRPr/>
-            </a:pPr>
             <a:fld id="{A01CA5F2-CD08-4EF5-BAD9-872B7BB27165}" type="slidenum">
               <a:rPr lang="en-US" altLang="en-US"/>
+              <a:t>38</a:t>
             </a:fld>
             <a:endParaRPr lang="en-US" altLang="en-US"/>
           </a:p>
@@ -15241,13 +15112,26 @@
                 <a:tableStyleId>{5C22544A-7EE6-4342-B048-85BDC9FD1C3A}</a:tableStyleId>
               </a:tblPr>
               <a:tblGrid>
-                <a:gridCol w="4743450"/>
-                <a:gridCol w="4743450"/>
+                <a:gridCol w="4743450">
+                  <a:extLst>
+                    <a:ext uri="{9D8B030D-6E8A-4147-A177-3AD203B41FA5}">
+                      <a16:colId xmlns:a16="http://schemas.microsoft.com/office/drawing/2014/main" val="20000"/>
+                    </a:ext>
+                  </a:extLst>
+                </a:gridCol>
+                <a:gridCol w="4743450">
+                  <a:extLst>
+                    <a:ext uri="{9D8B030D-6E8A-4147-A177-3AD203B41FA5}">
+                      <a16:colId xmlns:a16="http://schemas.microsoft.com/office/drawing/2014/main" val="20001"/>
+                    </a:ext>
+                  </a:extLst>
+                </a:gridCol>
               </a:tblGrid>
               <a:tr h="836930">
                 <a:tc>
                   <a:txBody>
                     <a:bodyPr/>
+                    <a:lstStyle/>
                     <a:p>
                       <a:pPr algn="ctr">
                         <a:buNone/>
@@ -15258,9 +15142,6 @@
                         </a:rPr>
                         <a:t>File Streams</a:t>
                       </a:r>
-                      <a:endParaRPr lang="en-US" altLang="en-US" sz="4000">
-                        <a:sym typeface="+mn-ea"/>
-                      </a:endParaRPr>
                     </a:p>
                   </a:txBody>
                   <a:tcPr/>
@@ -15268,6 +15149,7 @@
                 <a:tc>
                   <a:txBody>
                     <a:bodyPr/>
+                    <a:lstStyle/>
                     <a:p>
                       <a:pPr algn="ctr">
                         <a:buNone/>
@@ -15278,18 +15160,21 @@
                         </a:rPr>
                         <a:t>Buffered Streams</a:t>
                       </a:r>
-                      <a:endParaRPr lang="en-US" altLang="en-US" sz="4000">
-                        <a:sym typeface="+mn-ea"/>
-                      </a:endParaRPr>
                     </a:p>
                   </a:txBody>
                   <a:tcPr/>
                 </a:tc>
+                <a:extLst>
+                  <a:ext uri="{0D108BD9-81ED-4DB2-BD59-A6C34878D82A}">
+                    <a16:rowId xmlns:a16="http://schemas.microsoft.com/office/drawing/2014/main" val="10000"/>
+                  </a:ext>
+                </a:extLst>
               </a:tr>
               <a:tr h="836930">
                 <a:tc>
                   <a:txBody>
                     <a:bodyPr/>
+                    <a:lstStyle/>
                     <a:p>
                       <a:pPr>
                         <a:buNone/>
@@ -15300,9 +15185,6 @@
                         </a:rPr>
                         <a:t>Direct file access</a:t>
                       </a:r>
-                      <a:endParaRPr lang="en-US" altLang="en-US" sz="2800">
-                        <a:sym typeface="+mn-ea"/>
-                      </a:endParaRPr>
                     </a:p>
                   </a:txBody>
                   <a:tcPr/>
@@ -15310,6 +15192,7 @@
                 <a:tc>
                   <a:txBody>
                     <a:bodyPr/>
+                    <a:lstStyle/>
                     <a:p>
                       <a:pPr>
                         <a:buNone/>
@@ -15320,18 +15203,21 @@
                         </a:rPr>
                         <a:t>Uses memory buffer</a:t>
                       </a:r>
-                      <a:endParaRPr lang="en-US" altLang="en-US" sz="2800">
-                        <a:sym typeface="+mn-ea"/>
-                      </a:endParaRPr>
                     </a:p>
                   </a:txBody>
                   <a:tcPr/>
                 </a:tc>
+                <a:extLst>
+                  <a:ext uri="{0D108BD9-81ED-4DB2-BD59-A6C34878D82A}">
+                    <a16:rowId xmlns:a16="http://schemas.microsoft.com/office/drawing/2014/main" val="10001"/>
+                  </a:ext>
+                </a:extLst>
               </a:tr>
               <a:tr h="836930">
                 <a:tc>
                   <a:txBody>
                     <a:bodyPr/>
+                    <a:lstStyle/>
                     <a:p>
                       <a:pPr>
                         <a:buNone/>
@@ -15342,9 +15228,6 @@
                         </a:rPr>
                         <a:t>Slower</a:t>
                       </a:r>
-                      <a:endParaRPr lang="en-US" altLang="en-US" sz="2800">
-                        <a:sym typeface="+mn-ea"/>
-                      </a:endParaRPr>
                     </a:p>
                   </a:txBody>
                   <a:tcPr/>
@@ -15352,6 +15235,7 @@
                 <a:tc>
                   <a:txBody>
                     <a:bodyPr/>
+                    <a:lstStyle/>
                     <a:p>
                       <a:pPr>
                         <a:buNone/>
@@ -15362,18 +15246,21 @@
                         </a:rPr>
                         <a:t>Faster</a:t>
                       </a:r>
-                      <a:endParaRPr lang="en-US" altLang="en-US" sz="2800">
-                        <a:sym typeface="+mn-ea"/>
-                      </a:endParaRPr>
                     </a:p>
                   </a:txBody>
                   <a:tcPr/>
                 </a:tc>
+                <a:extLst>
+                  <a:ext uri="{0D108BD9-81ED-4DB2-BD59-A6C34878D82A}">
+                    <a16:rowId xmlns:a16="http://schemas.microsoft.com/office/drawing/2014/main" val="10002"/>
+                  </a:ext>
+                </a:extLst>
               </a:tr>
               <a:tr h="836930">
                 <a:tc>
                   <a:txBody>
                     <a:bodyPr/>
+                    <a:lstStyle/>
                     <a:p>
                       <a:pPr>
                         <a:buNone/>
@@ -15384,9 +15271,6 @@
                         </a:rPr>
                         <a:t>Reads byte-by-byte from file</a:t>
                       </a:r>
-                      <a:endParaRPr lang="en-US" altLang="en-US" sz="2800">
-                        <a:sym typeface="+mn-ea"/>
-                      </a:endParaRPr>
                     </a:p>
                   </a:txBody>
                   <a:tcPr/>
@@ -15394,6 +15278,7 @@
                 <a:tc>
                   <a:txBody>
                     <a:bodyPr/>
+                    <a:lstStyle/>
                     <a:p>
                       <a:pPr>
                         <a:buNone/>
@@ -15404,18 +15289,21 @@
                         </a:rPr>
                         <a:t>Reads chunk-wise</a:t>
                       </a:r>
-                      <a:endParaRPr lang="en-US" altLang="en-US" sz="2800">
-                        <a:sym typeface="+mn-ea"/>
-                      </a:endParaRPr>
                     </a:p>
                   </a:txBody>
                   <a:tcPr/>
                 </a:tc>
+                <a:extLst>
+                  <a:ext uri="{0D108BD9-81ED-4DB2-BD59-A6C34878D82A}">
+                    <a16:rowId xmlns:a16="http://schemas.microsoft.com/office/drawing/2014/main" val="10003"/>
+                  </a:ext>
+                </a:extLst>
               </a:tr>
               <a:tr h="836930">
                 <a:tc>
                   <a:txBody>
                     <a:bodyPr/>
+                    <a:lstStyle/>
                     <a:p>
                       <a:pPr>
                         <a:buNone/>
@@ -15426,9 +15314,6 @@
                         </a:rPr>
                         <a:t>Simple</a:t>
                       </a:r>
-                      <a:endParaRPr lang="en-US" altLang="en-US" sz="2800">
-                        <a:sym typeface="+mn-ea"/>
-                      </a:endParaRPr>
                     </a:p>
                   </a:txBody>
                   <a:tcPr/>
@@ -15436,6 +15321,7 @@
                 <a:tc>
                   <a:txBody>
                     <a:bodyPr/>
+                    <a:lstStyle/>
                     <a:p>
                       <a:pPr>
                         <a:buNone/>
@@ -15446,18 +15332,21 @@
                         </a:rPr>
                         <a:t>Efficient</a:t>
                       </a:r>
-                      <a:endParaRPr lang="en-US" altLang="en-US" sz="2800">
-                        <a:sym typeface="+mn-ea"/>
-                      </a:endParaRPr>
                     </a:p>
                   </a:txBody>
                   <a:tcPr/>
                 </a:tc>
+                <a:extLst>
+                  <a:ext uri="{0D108BD9-81ED-4DB2-BD59-A6C34878D82A}">
+                    <a16:rowId xmlns:a16="http://schemas.microsoft.com/office/drawing/2014/main" val="10004"/>
+                  </a:ext>
+                </a:extLst>
               </a:tr>
               <a:tr h="836930">
                 <a:tc>
                   <a:txBody>
                     <a:bodyPr/>
+                    <a:lstStyle/>
                     <a:p>
                       <a:pPr>
                         <a:buNone/>
@@ -15468,9 +15357,6 @@
                         </a:rPr>
                         <a:t>Used for small data</a:t>
                       </a:r>
-                      <a:endParaRPr lang="en-US" altLang="en-US" sz="2800">
-                        <a:sym typeface="+mn-ea"/>
-                      </a:endParaRPr>
                     </a:p>
                   </a:txBody>
                   <a:tcPr/>
@@ -15478,6 +15364,7 @@
                 <a:tc>
                   <a:txBody>
                     <a:bodyPr/>
+                    <a:lstStyle/>
                     <a:p>
                       <a:pPr>
                         <a:buNone/>
@@ -15488,13 +15375,15 @@
                         </a:rPr>
                         <a:t>Used for large data</a:t>
                       </a:r>
-                      <a:endParaRPr lang="en-US" altLang="en-US" sz="2800">
-                        <a:sym typeface="+mn-ea"/>
-                      </a:endParaRPr>
                     </a:p>
                   </a:txBody>
                   <a:tcPr/>
                 </a:tc>
+                <a:extLst>
+                  <a:ext uri="{0D108BD9-81ED-4DB2-BD59-A6C34878D82A}">
+                    <a16:rowId xmlns:a16="http://schemas.microsoft.com/office/drawing/2014/main" val="10005"/>
+                  </a:ext>
+                </a:extLst>
               </a:tr>
             </a:tbl>
           </a:graphicData>
@@ -15602,9 +15491,6 @@
               </a:rPr>
               <a:t> that java supports.</a:t>
             </a:r>
-            <a:endParaRPr lang="en-US" altLang="en-US" sz="2000" dirty="0" smtClean="0">
-              <a:latin typeface="Arial" panose="020B0604020202020204" pitchFamily="34" charset="0"/>
-            </a:endParaRPr>
           </a:p>
           <a:p>
             <a:pPr algn="just"/>
@@ -15614,9 +15500,6 @@
               </a:rPr>
               <a:t>Character streams are defined by using two class hierarchies</a:t>
             </a:r>
-            <a:endParaRPr lang="en-US" altLang="en-US" sz="2000" dirty="0" smtClean="0">
-              <a:latin typeface="Arial" panose="020B0604020202020204" pitchFamily="34" charset="0"/>
-            </a:endParaRPr>
           </a:p>
           <a:p>
             <a:pPr algn="just"/>
@@ -15635,12 +15518,6 @@
               </a:rPr>
               <a:t>abstract classes : Reader and Writer</a:t>
             </a:r>
-            <a:endParaRPr lang="en-US" altLang="en-US" sz="2000" dirty="0" smtClean="0">
-              <a:solidFill>
-                <a:srgbClr val="FF0000"/>
-              </a:solidFill>
-              <a:latin typeface="Arial" panose="020B0604020202020204" pitchFamily="34" charset="0"/>
-            </a:endParaRPr>
           </a:p>
           <a:p>
             <a:pPr algn="just"/>
@@ -15650,9 +15527,6 @@
               </a:rPr>
               <a:t>The abstract classes Reader and Writer define several key methods that the other character classes implement</a:t>
             </a:r>
-            <a:endParaRPr lang="en-US" altLang="en-US" sz="2000" dirty="0" smtClean="0">
-              <a:latin typeface="Arial" panose="020B0604020202020204" pitchFamily="34" charset="0"/>
-            </a:endParaRPr>
           </a:p>
         </p:txBody>
       </p:sp>
@@ -15753,6 +15627,7 @@
             </a:pPr>
             <a:fld id="{A01CA5F2-CD08-4EF5-BAD9-872B7BB27165}" type="slidenum">
               <a:rPr lang="en-US" altLang="en-US" smtClean="0"/>
+              <a:t>4</a:t>
             </a:fld>
             <a:endParaRPr lang="en-US" altLang="en-US"/>
           </a:p>
@@ -15880,7 +15755,7 @@
           <p:nvPr/>
         </p:nvPicPr>
         <p:blipFill>
-          <a:blip r:embed="rId1" cstate="print">
+          <a:blip r:embed="rId3" cstate="print">
             <a:extLst>
               <a:ext uri="{28A0092B-C50C-407E-A947-70E740481C1C}">
                 <a14:useLocalDpi xmlns:a14="http://schemas.microsoft.com/office/drawing/2010/main" val="0"/>
@@ -15985,9 +15860,6 @@
               </a:rPr>
               <a:t>The abstract classes Reader define several key methods that the other character classes implement.</a:t>
             </a:r>
-            <a:endParaRPr lang="en-US" altLang="en-US" sz="2000" dirty="0" smtClean="0">
-              <a:latin typeface="Arial" panose="020B0604020202020204" pitchFamily="34" charset="0"/>
-            </a:endParaRPr>
           </a:p>
           <a:p>
             <a:pPr algn="just"/>
@@ -15997,9 +15869,6 @@
               </a:rPr>
               <a:t>The subclasses those implements the method of Reader are </a:t>
             </a:r>
-            <a:endParaRPr lang="en-US" altLang="en-US" sz="2000" dirty="0" smtClean="0">
-              <a:latin typeface="Arial" panose="020B0604020202020204" pitchFamily="34" charset="0"/>
-            </a:endParaRPr>
           </a:p>
           <a:p>
             <a:pPr marL="457200" indent="-457200" algn="just">
@@ -16018,9 +15887,6 @@
               </a:rPr>
               <a:t>   : read characters from buffer</a:t>
             </a:r>
-            <a:endParaRPr lang="en-US" altLang="en-US" sz="2000" dirty="0" smtClean="0">
-              <a:latin typeface="Arial" panose="020B0604020202020204" pitchFamily="34" charset="0"/>
-            </a:endParaRPr>
           </a:p>
           <a:p>
             <a:pPr marL="457200" indent="-457200" algn="just">
@@ -16039,9 +15905,6 @@
               </a:rPr>
               <a:t> : read characters from character array</a:t>
             </a:r>
-            <a:endParaRPr lang="en-US" altLang="en-US" sz="2000" dirty="0" smtClean="0">
-              <a:latin typeface="Arial" panose="020B0604020202020204" pitchFamily="34" charset="0"/>
-            </a:endParaRPr>
           </a:p>
           <a:p>
             <a:pPr marL="457200" indent="-457200" algn="just">
@@ -16060,9 +15923,6 @@
               </a:rPr>
               <a:t> : read characters from the file</a:t>
             </a:r>
-            <a:endParaRPr lang="en-US" altLang="en-US" sz="2000" dirty="0" smtClean="0">
-              <a:latin typeface="Arial" panose="020B0604020202020204" pitchFamily="34" charset="0"/>
-            </a:endParaRPr>
           </a:p>
           <a:p>
             <a:pPr marL="457200" indent="-457200" algn="just">
@@ -16081,9 +15941,6 @@
               </a:rPr>
               <a:t> : read characters from the character input stream</a:t>
             </a:r>
-            <a:endParaRPr lang="en-US" altLang="en-US" sz="2000" dirty="0" smtClean="0">
-              <a:latin typeface="Arial" panose="020B0604020202020204" pitchFamily="34" charset="0"/>
-            </a:endParaRPr>
           </a:p>
           <a:p>
             <a:pPr marL="457200" indent="-457200" algn="just">
@@ -16102,9 +15959,6 @@
               </a:rPr>
               <a:t> : converts bytes to character</a:t>
             </a:r>
-            <a:endParaRPr lang="en-US" altLang="en-US" sz="2000" dirty="0" smtClean="0">
-              <a:latin typeface="Arial" panose="020B0604020202020204" pitchFamily="34" charset="0"/>
-            </a:endParaRPr>
           </a:p>
           <a:p>
             <a:pPr marL="457200" indent="-457200" algn="just">
@@ -16123,9 +15977,6 @@
               </a:rPr>
               <a:t> : read characters from a piped output stream</a:t>
             </a:r>
-            <a:endParaRPr lang="en-US" altLang="en-US" sz="2000" dirty="0" smtClean="0">
-              <a:latin typeface="Arial" panose="020B0604020202020204" pitchFamily="34" charset="0"/>
-            </a:endParaRPr>
           </a:p>
           <a:p>
             <a:pPr marL="457200" indent="-457200" algn="just">
@@ -16144,9 +15995,6 @@
               </a:rPr>
               <a:t> : read characters from a string</a:t>
             </a:r>
-            <a:endParaRPr lang="en-US" altLang="en-US" sz="2000" dirty="0" smtClean="0">
-              <a:latin typeface="Arial" panose="020B0604020202020204" pitchFamily="34" charset="0"/>
-            </a:endParaRPr>
           </a:p>
         </p:txBody>
       </p:sp>
@@ -16234,9 +16082,6 @@
               </a:rPr>
               <a:t>The abstract classes Reader define several key methods that the other character classes implement.</a:t>
             </a:r>
-            <a:endParaRPr lang="en-US" altLang="en-US" sz="2000" dirty="0" smtClean="0">
-              <a:latin typeface="Arial" panose="020B0604020202020204" pitchFamily="34" charset="0"/>
-            </a:endParaRPr>
           </a:p>
           <a:p>
             <a:pPr algn="just"/>
@@ -16246,9 +16091,6 @@
               </a:rPr>
               <a:t>Methods declared abstract in Reader classes are :</a:t>
             </a:r>
-            <a:endParaRPr lang="en-US" altLang="en-US" sz="2000" dirty="0" smtClean="0">
-              <a:latin typeface="Arial" panose="020B0604020202020204" pitchFamily="34" charset="0"/>
-            </a:endParaRPr>
           </a:p>
           <a:p>
             <a:pPr algn="just"/>
@@ -16270,9 +16112,6 @@
               </a:rPr>
               <a:t> read()</a:t>
             </a:r>
-            <a:endParaRPr lang="en-US" altLang="en-US" sz="2000" dirty="0" smtClean="0">
-              <a:latin typeface="Arial" panose="020B0604020202020204" pitchFamily="34" charset="0"/>
-            </a:endParaRPr>
           </a:p>
           <a:p>
             <a:pPr algn="just"/>
@@ -16300,9 +16139,6 @@
               </a:rPr>
               <a:t> read(char[] buffer)</a:t>
             </a:r>
-            <a:endParaRPr lang="en-US" altLang="en-US" sz="2000" dirty="0" smtClean="0">
-              <a:latin typeface="Arial" panose="020B0604020202020204" pitchFamily="34" charset="0"/>
-            </a:endParaRPr>
           </a:p>
           <a:p>
             <a:pPr algn="just"/>
@@ -16372,9 +16208,6 @@
               </a:rPr>
               <a:t>)</a:t>
             </a:r>
-            <a:endParaRPr lang="en-US" altLang="en-US" sz="2000" dirty="0" smtClean="0">
-              <a:latin typeface="Arial" panose="020B0604020202020204" pitchFamily="34" charset="0"/>
-            </a:endParaRPr>
           </a:p>
           <a:p>
             <a:pPr algn="just"/>
@@ -16390,9 +16223,6 @@
               </a:rPr>
               <a:t>void reset()</a:t>
             </a:r>
-            <a:endParaRPr lang="en-US" altLang="en-US" sz="2000" dirty="0" smtClean="0">
-              <a:latin typeface="Arial" panose="020B0604020202020204" pitchFamily="34" charset="0"/>
-            </a:endParaRPr>
           </a:p>
           <a:p>
             <a:pPr algn="just"/>
@@ -16408,9 +16238,6 @@
               </a:rPr>
               <a:t>void close()</a:t>
             </a:r>
-            <a:endParaRPr lang="en-US" altLang="en-US" sz="2000" dirty="0" smtClean="0">
-              <a:latin typeface="Arial" panose="020B0604020202020204" pitchFamily="34" charset="0"/>
-            </a:endParaRPr>
           </a:p>
         </p:txBody>
       </p:sp>
@@ -16498,9 +16325,6 @@
               </a:rPr>
               <a:t>The abstract classes Writer define several key methods that the other character classes implement.</a:t>
             </a:r>
-            <a:endParaRPr lang="en-US" altLang="en-US" sz="2000" dirty="0" smtClean="0">
-              <a:latin typeface="Arial" panose="020B0604020202020204" pitchFamily="34" charset="0"/>
-            </a:endParaRPr>
           </a:p>
           <a:p>
             <a:pPr algn="just"/>
@@ -16510,9 +16334,6 @@
               </a:rPr>
               <a:t>The subclasses those implements the method of Writer are </a:t>
             </a:r>
-            <a:endParaRPr lang="en-US" altLang="en-US" sz="2000" dirty="0" smtClean="0">
-              <a:latin typeface="Arial" panose="020B0604020202020204" pitchFamily="34" charset="0"/>
-            </a:endParaRPr>
           </a:p>
           <a:p>
             <a:pPr marL="457200" indent="-457200" algn="just">
@@ -16531,9 +16352,6 @@
               </a:rPr>
               <a:t>   : write characters to buffer</a:t>
             </a:r>
-            <a:endParaRPr lang="en-US" altLang="en-US" sz="2000" dirty="0" smtClean="0">
-              <a:latin typeface="Arial" panose="020B0604020202020204" pitchFamily="34" charset="0"/>
-            </a:endParaRPr>
           </a:p>
           <a:p>
             <a:pPr marL="457200" indent="-457200" algn="just">
@@ -16552,9 +16370,6 @@
               </a:rPr>
               <a:t> : write characters to file</a:t>
             </a:r>
-            <a:endParaRPr lang="en-US" altLang="en-US" sz="2000" dirty="0" smtClean="0">
-              <a:latin typeface="Arial" panose="020B0604020202020204" pitchFamily="34" charset="0"/>
-            </a:endParaRPr>
           </a:p>
           <a:p>
             <a:pPr marL="457200" indent="-457200" algn="just">
@@ -16573,9 +16388,6 @@
               </a:rPr>
               <a:t> : write characters to the character array</a:t>
             </a:r>
-            <a:endParaRPr lang="en-US" altLang="en-US" sz="2000" dirty="0" smtClean="0">
-              <a:latin typeface="Arial" panose="020B0604020202020204" pitchFamily="34" charset="0"/>
-            </a:endParaRPr>
           </a:p>
           <a:p>
             <a:pPr marL="457200" indent="-457200" algn="just">
@@ -16594,9 +16406,6 @@
               </a:rPr>
               <a:t> : converts bytes to character</a:t>
             </a:r>
-            <a:endParaRPr lang="en-US" altLang="en-US" sz="2000" dirty="0" smtClean="0">
-              <a:latin typeface="Arial" panose="020B0604020202020204" pitchFamily="34" charset="0"/>
-            </a:endParaRPr>
           </a:p>
           <a:p>
             <a:pPr marL="457200" indent="-457200" algn="just">
@@ -16615,9 +16424,6 @@
               </a:rPr>
               <a:t> : write characters to a piped output stream</a:t>
             </a:r>
-            <a:endParaRPr lang="en-US" altLang="en-US" sz="2000" dirty="0" smtClean="0">
-              <a:latin typeface="Arial" panose="020B0604020202020204" pitchFamily="34" charset="0"/>
-            </a:endParaRPr>
           </a:p>
           <a:p>
             <a:pPr marL="457200" indent="-457200" algn="just">
@@ -16636,9 +16442,6 @@
               </a:rPr>
               <a:t> : write characters to a string</a:t>
             </a:r>
-            <a:endParaRPr lang="en-US" altLang="en-US" sz="2000" dirty="0" smtClean="0">
-              <a:latin typeface="Arial" panose="020B0604020202020204" pitchFamily="34" charset="0"/>
-            </a:endParaRPr>
           </a:p>
         </p:txBody>
       </p:sp>
@@ -16726,9 +16529,6 @@
               </a:rPr>
               <a:t>The abstract classes Writer define several key methods that the other character classes implement.</a:t>
             </a:r>
-            <a:endParaRPr lang="en-US" altLang="en-US" sz="2000" dirty="0" smtClean="0">
-              <a:latin typeface="Arial" panose="020B0604020202020204" pitchFamily="34" charset="0"/>
-            </a:endParaRPr>
           </a:p>
           <a:p>
             <a:pPr algn="just"/>
@@ -16738,9 +16538,6 @@
               </a:rPr>
               <a:t>Methods declared abstract in Writer classes are :</a:t>
             </a:r>
-            <a:endParaRPr lang="en-US" altLang="en-US" sz="2000" dirty="0" smtClean="0">
-              <a:latin typeface="Arial" panose="020B0604020202020204" pitchFamily="34" charset="0"/>
-            </a:endParaRPr>
           </a:p>
           <a:p>
             <a:pPr algn="just"/>
@@ -16750,9 +16547,6 @@
               </a:rPr>
               <a:t> void write()</a:t>
             </a:r>
-            <a:endParaRPr lang="en-US" altLang="en-US" sz="2000" dirty="0" smtClean="0">
-              <a:latin typeface="Arial" panose="020B0604020202020204" pitchFamily="34" charset="0"/>
-            </a:endParaRPr>
           </a:p>
           <a:p>
             <a:pPr algn="just"/>
@@ -16786,9 +16580,6 @@
               </a:rPr>
               <a:t>)</a:t>
             </a:r>
-            <a:endParaRPr lang="en-US" altLang="en-US" sz="2000" dirty="0" smtClean="0">
-              <a:latin typeface="Arial" panose="020B0604020202020204" pitchFamily="34" charset="0"/>
-            </a:endParaRPr>
           </a:p>
           <a:p>
             <a:pPr algn="just"/>
@@ -16852,9 +16643,6 @@
               </a:rPr>
               <a:t>)</a:t>
             </a:r>
-            <a:endParaRPr lang="en-US" altLang="en-US" sz="2000" dirty="0" smtClean="0">
-              <a:latin typeface="Arial" panose="020B0604020202020204" pitchFamily="34" charset="0"/>
-            </a:endParaRPr>
           </a:p>
           <a:p>
             <a:pPr algn="just"/>
@@ -16870,9 +16658,6 @@
               </a:rPr>
               <a:t>void flush()</a:t>
             </a:r>
-            <a:endParaRPr lang="en-US" altLang="en-US" sz="2000" dirty="0" smtClean="0">
-              <a:latin typeface="Arial" panose="020B0604020202020204" pitchFamily="34" charset="0"/>
-            </a:endParaRPr>
           </a:p>
           <a:p>
             <a:pPr algn="just"/>
@@ -16888,9 +16673,6 @@
               </a:rPr>
               <a:t>void close()</a:t>
             </a:r>
-            <a:endParaRPr lang="en-US" altLang="en-US" sz="2000" dirty="0" smtClean="0">
-              <a:latin typeface="Arial" panose="020B0604020202020204" pitchFamily="34" charset="0"/>
-            </a:endParaRPr>
           </a:p>
         </p:txBody>
       </p:sp>
@@ -16911,7 +16693,14 @@
         <p:cNvGrpSpPr/>
         <p:nvPr/>
       </p:nvGrpSpPr>
-      <p:grpSpPr/>
+      <p:grpSpPr>
+        <a:xfrm>
+          <a:off x="0" y="0"/>
+          <a:ext cx="0" cy="0"/>
+          <a:chOff x="0" y="0"/>
+          <a:chExt cx="0" cy="0"/>
+        </a:xfrm>
+      </p:grpSpPr>
       <p:sp>
         <p:nvSpPr>
           <p:cNvPr id="2" name="Title 1"/>
@@ -16930,12 +16719,12 @@
         </p:spPr>
         <p:txBody>
           <a:bodyPr/>
+          <a:lstStyle/>
           <a:p>
             <a:r>
               <a:rPr lang="en-US" sz="3600" b="1"/>
               <a:t>FileReader / FileWriter Demo</a:t>
             </a:r>
-            <a:endParaRPr lang="en-US" sz="3600" b="1"/>
           </a:p>
         </p:txBody>
       </p:sp>
@@ -16952,6 +16741,7 @@
         <p:spPr/>
         <p:txBody>
           <a:bodyPr/>
+          <a:lstStyle/>
           <a:p>
             <a:pPr>
               <a:defRPr/>
@@ -16977,12 +16767,14 @@
         <p:spPr/>
         <p:txBody>
           <a:bodyPr/>
+          <a:lstStyle/>
           <a:p>
             <a:pPr>
               <a:defRPr/>
             </a:pPr>
             <a:fld id="{A01CA5F2-CD08-4EF5-BAD9-872B7BB27165}" type="slidenum">
               <a:rPr lang="en-US" altLang="en-US"/>
+              <a:t>45</a:t>
             </a:fld>
             <a:endParaRPr lang="en-US" altLang="en-US"/>
           </a:p>
@@ -17002,12 +16794,12 @@
           <a:graphicData uri="http://schemas.openxmlformats.org/presentationml/2006/ole">
             <mc:AlternateContent xmlns:mc="http://schemas.openxmlformats.org/markup-compatibility/2006">
               <mc:Choice xmlns:v="urn:schemas-microsoft-com:vml" Requires="v">
-                <p:oleObj spid="_x0000_s7" name="" r:id="rId1" imgW="5886450" imgH="4711700" progId="Paint.Picture">
+                <p:oleObj spid="_x0000_s12290" r:id="rId3" imgW="5886450" imgH="4711700" progId="Paint.Picture">
                   <p:embed/>
                 </p:oleObj>
               </mc:Choice>
               <mc:Fallback>
-                <p:oleObj name="" r:id="rId1" imgW="5886450" imgH="4711700" progId="Paint.Picture">
+                <p:oleObj r:id="rId3" imgW="5886450" imgH="4711700" progId="Paint.Picture">
                   <p:embed/>
                   <p:pic>
                     <p:nvPicPr>
@@ -17016,7 +16808,7 @@
                       <p:nvPr/>
                     </p:nvPicPr>
                     <p:blipFill>
-                      <a:blip r:embed="rId2"/>
+                      <a:blip r:embed="rId4"/>
                       <a:stretch>
                         <a:fillRect/>
                       </a:stretch>
@@ -17054,7 +16846,14 @@
         <p:cNvGrpSpPr/>
         <p:nvPr/>
       </p:nvGrpSpPr>
-      <p:grpSpPr/>
+      <p:grpSpPr>
+        <a:xfrm>
+          <a:off x="0" y="0"/>
+          <a:ext cx="0" cy="0"/>
+          <a:chOff x="0" y="0"/>
+          <a:chExt cx="0" cy="0"/>
+        </a:xfrm>
+      </p:grpSpPr>
       <p:sp>
         <p:nvSpPr>
           <p:cNvPr id="4" name="Footer Placeholder 3"/>
@@ -17068,6 +16867,7 @@
         <p:spPr/>
         <p:txBody>
           <a:bodyPr/>
+          <a:lstStyle/>
           <a:p>
             <a:pPr>
               <a:defRPr/>
@@ -17093,12 +16893,14 @@
         <p:spPr/>
         <p:txBody>
           <a:bodyPr/>
+          <a:lstStyle/>
           <a:p>
             <a:pPr>
               <a:defRPr/>
             </a:pPr>
             <a:fld id="{A01CA5F2-CD08-4EF5-BAD9-872B7BB27165}" type="slidenum">
               <a:rPr lang="en-US" altLang="en-US"/>
+              <a:t>46</a:t>
             </a:fld>
             <a:endParaRPr lang="en-US" altLang="en-US"/>
           </a:p>
@@ -17118,12 +16920,12 @@
           <a:graphicData uri="http://schemas.openxmlformats.org/presentationml/2006/ole">
             <mc:AlternateContent xmlns:mc="http://schemas.openxmlformats.org/markup-compatibility/2006">
               <mc:Choice xmlns:v="urn:schemas-microsoft-com:vml" Requires="v">
-                <p:oleObj spid="_x0000_s7" name="" r:id="rId1" imgW="7283450" imgH="5327650" progId="Paint.Picture">
+                <p:oleObj spid="_x0000_s13314" r:id="rId3" imgW="7283450" imgH="5327650" progId="Paint.Picture">
                   <p:embed/>
                 </p:oleObj>
               </mc:Choice>
               <mc:Fallback>
-                <p:oleObj name="" r:id="rId1" imgW="7283450" imgH="5327650" progId="Paint.Picture">
+                <p:oleObj r:id="rId3" imgW="7283450" imgH="5327650" progId="Paint.Picture">
                   <p:embed/>
                   <p:pic>
                     <p:nvPicPr>
@@ -17132,7 +16934,7 @@
                       <p:nvPr/>
                     </p:nvPicPr>
                     <p:blipFill>
-                      <a:blip r:embed="rId2"/>
+                      <a:blip r:embed="rId4"/>
                       <a:stretch>
                         <a:fillRect/>
                       </a:stretch>
@@ -17171,6 +16973,7 @@
         </p:spPr>
         <p:txBody>
           <a:bodyPr/>
+          <a:lstStyle/>
           <a:p>
             <a:r>
               <a:rPr lang="en-US" sz="3600" b="1"/>
@@ -17186,7 +16989,6 @@
               <a:rPr lang="en-US" sz="3600" b="1"/>
               <a:t>Writer Demo</a:t>
             </a:r>
-            <a:endParaRPr lang="en-US" sz="3600" b="1"/>
           </a:p>
         </p:txBody>
       </p:sp>
@@ -17207,7 +17009,14 @@
         <p:cNvGrpSpPr/>
         <p:nvPr/>
       </p:nvGrpSpPr>
-      <p:grpSpPr/>
+      <p:grpSpPr>
+        <a:xfrm>
+          <a:off x="0" y="0"/>
+          <a:ext cx="0" cy="0"/>
+          <a:chOff x="0" y="0"/>
+          <a:chExt cx="0" cy="0"/>
+        </a:xfrm>
+      </p:grpSpPr>
       <p:sp>
         <p:nvSpPr>
           <p:cNvPr id="2" name="Title 1"/>
@@ -17226,12 +17035,12 @@
         </p:spPr>
         <p:txBody>
           <a:bodyPr/>
+          <a:lstStyle/>
           <a:p>
             <a:r>
               <a:rPr lang="en-US"/>
               <a:t>StringReader / StringWriter Demo</a:t>
             </a:r>
-            <a:endParaRPr lang="en-US"/>
           </a:p>
         </p:txBody>
       </p:sp>
@@ -17248,6 +17057,7 @@
         <p:spPr/>
         <p:txBody>
           <a:bodyPr/>
+          <a:lstStyle/>
           <a:p>
             <a:pPr>
               <a:defRPr/>
@@ -17273,12 +17083,14 @@
         <p:spPr/>
         <p:txBody>
           <a:bodyPr/>
+          <a:lstStyle/>
           <a:p>
             <a:pPr>
               <a:defRPr/>
             </a:pPr>
             <a:fld id="{A01CA5F2-CD08-4EF5-BAD9-872B7BB27165}" type="slidenum">
               <a:rPr lang="en-US" altLang="en-US"/>
+              <a:t>47</a:t>
             </a:fld>
             <a:endParaRPr lang="en-US" altLang="en-US"/>
           </a:p>
@@ -17298,12 +17110,12 @@
           <a:graphicData uri="http://schemas.openxmlformats.org/presentationml/2006/ole">
             <mc:AlternateContent xmlns:mc="http://schemas.openxmlformats.org/markup-compatibility/2006">
               <mc:Choice xmlns:v="urn:schemas-microsoft-com:vml" Requires="v">
-                <p:oleObj spid="_x0000_s7" name="" r:id="rId1" imgW="5962650" imgH="4616450" progId="Paint.Picture">
+                <p:oleObj spid="_x0000_s14338" r:id="rId3" imgW="5962650" imgH="4616450" progId="Paint.Picture">
                   <p:embed/>
                 </p:oleObj>
               </mc:Choice>
               <mc:Fallback>
-                <p:oleObj name="" r:id="rId1" imgW="5962650" imgH="4616450" progId="Paint.Picture">
+                <p:oleObj r:id="rId3" imgW="5962650" imgH="4616450" progId="Paint.Picture">
                   <p:embed/>
                   <p:pic>
                     <p:nvPicPr>
@@ -17312,7 +17124,7 @@
                       <p:nvPr/>
                     </p:nvPicPr>
                     <p:blipFill>
-                      <a:blip r:embed="rId2"/>
+                      <a:blip r:embed="rId4"/>
                       <a:stretch>
                         <a:fillRect/>
                       </a:stretch>
@@ -17350,7 +17162,14 @@
         <p:cNvGrpSpPr/>
         <p:nvPr/>
       </p:nvGrpSpPr>
-      <p:grpSpPr/>
+      <p:grpSpPr>
+        <a:xfrm>
+          <a:off x="0" y="0"/>
+          <a:ext cx="0" cy="0"/>
+          <a:chOff x="0" y="0"/>
+          <a:chExt cx="0" cy="0"/>
+        </a:xfrm>
+      </p:grpSpPr>
       <p:sp>
         <p:nvSpPr>
           <p:cNvPr id="2" name="Title 1"/>
@@ -17369,6 +17188,7 @@
         </p:spPr>
         <p:txBody>
           <a:bodyPr/>
+          <a:lstStyle/>
           <a:p>
             <a:r>
               <a:rPr lang="en-US" altLang="en-US"/>
@@ -17394,6 +17214,7 @@
         <p:spPr/>
         <p:txBody>
           <a:bodyPr/>
+          <a:lstStyle/>
           <a:p>
             <a:pPr>
               <a:defRPr/>
@@ -17419,12 +17240,14 @@
         <p:spPr/>
         <p:txBody>
           <a:bodyPr/>
+          <a:lstStyle/>
           <a:p>
             <a:pPr>
               <a:defRPr/>
             </a:pPr>
             <a:fld id="{A01CA5F2-CD08-4EF5-BAD9-872B7BB27165}" type="slidenum">
               <a:rPr lang="en-US" altLang="en-US"/>
+              <a:t>48</a:t>
             </a:fld>
             <a:endParaRPr lang="en-US" altLang="en-US"/>
           </a:p>
@@ -17450,6 +17273,7 @@
           <a:bodyPr wrap="square" rtlCol="0" anchor="t">
             <a:spAutoFit/>
           </a:bodyPr>
+          <a:lstStyle/>
           <a:p>
             <a:pPr marL="457200" indent="-457200">
               <a:buFont typeface="Arial" panose="020B0604020202020204" pitchFamily="34" charset="0"/>
@@ -17461,9 +17285,6 @@
               </a:rPr>
               <a:t>Used to transfer data between two threads</a:t>
             </a:r>
-            <a:endParaRPr lang="en-US" altLang="en-US" sz="3200">
-              <a:sym typeface="+mn-ea"/>
-            </a:endParaRPr>
           </a:p>
         </p:txBody>
       </p:sp>
@@ -17481,12 +17302,12 @@
           <a:graphicData uri="http://schemas.openxmlformats.org/presentationml/2006/ole">
             <mc:AlternateContent xmlns:mc="http://schemas.openxmlformats.org/markup-compatibility/2006">
               <mc:Choice xmlns:v="urn:schemas-microsoft-com:vml" Requires="v">
-                <p:oleObj spid="_x0000_s8" name="" r:id="rId1" imgW="4826000" imgH="2997200" progId="Paint.Picture">
+                <p:oleObj spid="_x0000_s15362" r:id="rId3" imgW="4826000" imgH="2997200" progId="Paint.Picture">
                   <p:embed/>
                 </p:oleObj>
               </mc:Choice>
               <mc:Fallback>
-                <p:oleObj name="" r:id="rId1" imgW="4826000" imgH="2997200" progId="Paint.Picture">
+                <p:oleObj r:id="rId3" imgW="4826000" imgH="2997200" progId="Paint.Picture">
                   <p:embed/>
                   <p:pic>
                     <p:nvPicPr>
@@ -17495,7 +17316,7 @@
                       <p:nvPr/>
                     </p:nvPicPr>
                     <p:blipFill>
-                      <a:blip r:embed="rId2"/>
+                      <a:blip r:embed="rId4"/>
                       <a:stretch>
                         <a:fillRect/>
                       </a:stretch>
@@ -17533,7 +17354,14 @@
         <p:cNvGrpSpPr/>
         <p:nvPr/>
       </p:nvGrpSpPr>
-      <p:grpSpPr/>
+      <p:grpSpPr>
+        <a:xfrm>
+          <a:off x="0" y="0"/>
+          <a:ext cx="0" cy="0"/>
+          <a:chOff x="0" y="0"/>
+          <a:chExt cx="0" cy="0"/>
+        </a:xfrm>
+      </p:grpSpPr>
       <p:sp>
         <p:nvSpPr>
           <p:cNvPr id="4" name="Footer Placeholder 3"/>
@@ -17547,6 +17375,7 @@
         <p:spPr/>
         <p:txBody>
           <a:bodyPr/>
+          <a:lstStyle/>
           <a:p>
             <a:pPr>
               <a:defRPr/>
@@ -17572,12 +17401,14 @@
         <p:spPr/>
         <p:txBody>
           <a:bodyPr/>
+          <a:lstStyle/>
           <a:p>
             <a:pPr>
               <a:defRPr/>
             </a:pPr>
             <a:fld id="{A01CA5F2-CD08-4EF5-BAD9-872B7BB27165}" type="slidenum">
               <a:rPr lang="en-US" altLang="en-US"/>
+              <a:t>49</a:t>
             </a:fld>
             <a:endParaRPr lang="en-US" altLang="en-US"/>
           </a:p>
@@ -17597,12 +17428,12 @@
           <a:graphicData uri="http://schemas.openxmlformats.org/presentationml/2006/ole">
             <mc:AlternateContent xmlns:mc="http://schemas.openxmlformats.org/markup-compatibility/2006">
               <mc:Choice xmlns:v="urn:schemas-microsoft-com:vml" Requires="v">
-                <p:oleObj spid="_x0000_s9" name="" r:id="rId1" imgW="6242050" imgH="4451350" progId="Paint.Picture">
+                <p:oleObj spid="_x0000_s16386" r:id="rId3" imgW="6242050" imgH="4451350" progId="Paint.Picture">
                   <p:embed/>
                 </p:oleObj>
               </mc:Choice>
               <mc:Fallback>
-                <p:oleObj name="" r:id="rId1" imgW="6242050" imgH="4451350" progId="Paint.Picture">
+                <p:oleObj r:id="rId3" imgW="6242050" imgH="4451350" progId="Paint.Picture">
                   <p:embed/>
                   <p:pic>
                     <p:nvPicPr>
@@ -17611,7 +17442,7 @@
                       <p:nvPr/>
                     </p:nvPicPr>
                     <p:blipFill>
-                      <a:blip r:embed="rId2"/>
+                      <a:blip r:embed="rId4"/>
                       <a:stretch>
                         <a:fillRect/>
                       </a:stretch>
@@ -17720,9 +17551,6 @@
               </a:rPr>
               <a:t>I/O (Input/Output) is used to read data from a source and write data to a destination.</a:t>
             </a:r>
-            <a:endParaRPr lang="en-US" altLang="en-US" sz="2000" dirty="0">
-              <a:latin typeface="Arial" panose="020B0604020202020204" pitchFamily="34" charset="0"/>
-            </a:endParaRPr>
           </a:p>
           <a:p>
             <a:r>
@@ -17731,9 +17559,6 @@
               </a:rPr>
               <a:t>In this context it is input to and output from programs</a:t>
             </a:r>
-            <a:endParaRPr lang="en-US" altLang="en-US" sz="2000" dirty="0">
-              <a:latin typeface="Arial" panose="020B0604020202020204" pitchFamily="34" charset="0"/>
-            </a:endParaRPr>
           </a:p>
           <a:p>
             <a:r>
@@ -17742,9 +17567,6 @@
               </a:rPr>
               <a:t>Input can be from keyboard or a file</a:t>
             </a:r>
-            <a:endParaRPr lang="en-US" altLang="en-US" sz="2000" dirty="0">
-              <a:latin typeface="Arial" panose="020B0604020202020204" pitchFamily="34" charset="0"/>
-            </a:endParaRPr>
           </a:p>
           <a:p>
             <a:r>
@@ -17753,9 +17575,6 @@
               </a:rPr>
               <a:t>Output can be to display (screen) or a file</a:t>
             </a:r>
-            <a:endParaRPr lang="en-US" altLang="en-US" sz="2000" dirty="0">
-              <a:latin typeface="Arial" panose="020B0604020202020204" pitchFamily="34" charset="0"/>
-            </a:endParaRPr>
           </a:p>
           <a:p>
             <a:r>
@@ -17764,9 +17583,6 @@
               </a:rPr>
               <a:t>Advantages of file I/O</a:t>
             </a:r>
-            <a:endParaRPr lang="en-US" altLang="en-US" sz="2000" dirty="0">
-              <a:latin typeface="Arial" panose="020B0604020202020204" pitchFamily="34" charset="0"/>
-            </a:endParaRPr>
           </a:p>
           <a:p>
             <a:pPr lvl="1"/>
@@ -17776,9 +17592,6 @@
               </a:rPr>
               <a:t>permanent copy</a:t>
             </a:r>
-            <a:endParaRPr lang="en-US" altLang="en-US" sz="2000" dirty="0">
-              <a:latin typeface="Arial" panose="020B0604020202020204" pitchFamily="34" charset="0"/>
-            </a:endParaRPr>
           </a:p>
           <a:p>
             <a:pPr lvl="1"/>
@@ -17788,9 +17601,6 @@
               </a:rPr>
               <a:t>output from one program can be input to another</a:t>
             </a:r>
-            <a:endParaRPr lang="en-US" altLang="en-US" sz="2000" dirty="0">
-              <a:latin typeface="Arial" panose="020B0604020202020204" pitchFamily="34" charset="0"/>
-            </a:endParaRPr>
           </a:p>
           <a:p>
             <a:pPr lvl="1"/>
@@ -17800,9 +17610,6 @@
               </a:rPr>
               <a:t>input can be automated (rather than entered  manually)</a:t>
             </a:r>
-            <a:endParaRPr lang="en-US" altLang="en-US" sz="2000" dirty="0">
-              <a:latin typeface="Arial" panose="020B0604020202020204" pitchFamily="34" charset="0"/>
-            </a:endParaRPr>
           </a:p>
           <a:p>
             <a:pPr lvl="1"/>
@@ -17923,6 +17730,7 @@
             </a:pPr>
             <a:fld id="{A01CA5F2-CD08-4EF5-BAD9-872B7BB27165}" type="slidenum">
               <a:rPr lang="en-US" altLang="en-US" smtClean="0"/>
+              <a:t>50</a:t>
             </a:fld>
             <a:endParaRPr lang="en-US" altLang="en-US"/>
           </a:p>
@@ -18026,6 +17834,74 @@
               </a:rPr>
               <a:t>Drawbacks of traditional java.io.* </a:t>
             </a:r>
+          </a:p>
+          <a:p>
+            <a:pPr algn="just"/>
+            <a:r>
+              <a:rPr lang="en-US" altLang="en-US" sz="2000" dirty="0" smtClean="0">
+                <a:latin typeface="Arial" panose="020B0604020202020204" pitchFamily="34" charset="0"/>
+              </a:rPr>
+              <a:t>Lacks some important functionality , such as copy() not available in File class</a:t>
+            </a:r>
+          </a:p>
+          <a:p>
+            <a:pPr algn="just"/>
+            <a:r>
+              <a:rPr lang="en-US" altLang="en-US" sz="2000" dirty="0" smtClean="0">
+                <a:latin typeface="Arial" panose="020B0604020202020204" pitchFamily="34" charset="0"/>
+              </a:rPr>
+              <a:t>Defined many methods that returns </a:t>
+            </a:r>
+            <a:r>
+              <a:rPr lang="en-US" altLang="en-US" sz="2000" dirty="0" err="1" smtClean="0">
+                <a:latin typeface="Arial" panose="020B0604020202020204" pitchFamily="34" charset="0"/>
+              </a:rPr>
+              <a:t>boolean</a:t>
+            </a:r>
+            <a:r>
+              <a:rPr lang="en-US" altLang="en-US" sz="2000" dirty="0" smtClean="0">
+                <a:latin typeface="Arial" panose="020B0604020202020204" pitchFamily="34" charset="0"/>
+              </a:rPr>
+              <a:t>. In case of error , instead of exception, method returns false.</a:t>
+            </a:r>
+          </a:p>
+          <a:p>
+            <a:pPr algn="just"/>
+            <a:r>
+              <a:rPr lang="en-US" altLang="en-US" sz="2000" dirty="0" smtClean="0">
+                <a:latin typeface="Arial" panose="020B0604020202020204" pitchFamily="34" charset="0"/>
+              </a:rPr>
+              <a:t>A limited set of file attributes was provided.</a:t>
+            </a:r>
+          </a:p>
+          <a:p>
+            <a:pPr marL="0" indent="0" algn="just">
+              <a:buNone/>
+            </a:pPr>
+            <a:r>
+              <a:rPr lang="en-US" altLang="en-US" sz="2000" b="1" u="sng" dirty="0" smtClean="0">
+                <a:latin typeface="Arial" panose="020B0604020202020204" pitchFamily="34" charset="0"/>
+              </a:rPr>
+              <a:t>Features </a:t>
+            </a:r>
+            <a:r>
+              <a:rPr lang="en-US" altLang="en-US" sz="2000" b="1" u="sng" dirty="0">
+                <a:latin typeface="Arial" panose="020B0604020202020204" pitchFamily="34" charset="0"/>
+              </a:rPr>
+              <a:t>of </a:t>
+            </a:r>
+            <a:r>
+              <a:rPr lang="en-US" altLang="en-US" sz="2000" b="1" u="sng" dirty="0" smtClean="0">
+                <a:latin typeface="Arial" panose="020B0604020202020204" pitchFamily="34" charset="0"/>
+              </a:rPr>
+              <a:t> java.nio</a:t>
+            </a:r>
+            <a:r>
+              <a:rPr lang="en-US" altLang="en-US" sz="2000" b="1" u="sng" dirty="0">
+                <a:latin typeface="Arial" panose="020B0604020202020204" pitchFamily="34" charset="0"/>
+              </a:rPr>
+              <a:t>.* </a:t>
+            </a:r>
             <a:endParaRPr lang="en-US" altLang="en-US" sz="2000" b="1" u="sng" dirty="0" smtClean="0">
               <a:latin typeface="Arial" panose="020B0604020202020204" pitchFamily="34" charset="0"/>
             </a:endParaRPr>
@@ -18036,11 +17912,20 @@
               <a:rPr lang="en-US" altLang="en-US" sz="2000" dirty="0" smtClean="0">
                 <a:latin typeface="Arial" panose="020B0604020202020204" pitchFamily="34" charset="0"/>
               </a:rPr>
-              <a:t>Lacks some important functionality , such as copy() not available in File class</a:t>
-            </a:r>
-            <a:endParaRPr lang="en-US" altLang="en-US" sz="2000" dirty="0" smtClean="0">
-              <a:latin typeface="Arial" panose="020B0604020202020204" pitchFamily="34" charset="0"/>
-            </a:endParaRPr>
+              <a:t>Added with java 6/ </a:t>
+            </a:r>
+            <a:r>
+              <a:rPr lang="en-US" altLang="en-US" sz="2000" dirty="0" err="1" smtClean="0">
+                <a:latin typeface="Arial" panose="020B0604020202020204" pitchFamily="34" charset="0"/>
+              </a:rPr>
+              <a:t>jdk</a:t>
+            </a:r>
+            <a:r>
+              <a:rPr lang="en-US" altLang="en-US" sz="2000" dirty="0" smtClean="0">
+                <a:latin typeface="Arial" panose="020B0604020202020204" pitchFamily="34" charset="0"/>
+              </a:rPr>
+              <a:t> 6</a:t>
+            </a:r>
           </a:p>
           <a:p>
             <a:pPr algn="just"/>
@@ -18048,23 +17933,17 @@
               <a:rPr lang="en-US" altLang="en-US" sz="2000" dirty="0" smtClean="0">
                 <a:latin typeface="Arial" panose="020B0604020202020204" pitchFamily="34" charset="0"/>
               </a:rPr>
-              <a:t>Defined many methods that returns </a:t>
-            </a:r>
-            <a:r>
-              <a:rPr lang="en-US" altLang="en-US" sz="2000" dirty="0" err="1" smtClean="0">
-                <a:latin typeface="Arial" panose="020B0604020202020204" pitchFamily="34" charset="0"/>
-              </a:rPr>
-              <a:t>boolean</a:t>
-            </a:r>
+              <a:t>Stands for non blocking i/o</a:t>
+            </a:r>
+          </a:p>
+          <a:p>
+            <a:pPr algn="just"/>
             <a:r>
               <a:rPr lang="en-US" altLang="en-US" sz="2000" dirty="0" smtClean="0">
                 <a:latin typeface="Arial" panose="020B0604020202020204" pitchFamily="34" charset="0"/>
               </a:rPr>
-              <a:t>. In case of error , instead of exception, method returns false.</a:t>
-            </a:r>
-            <a:endParaRPr lang="en-US" altLang="en-US" sz="2000" dirty="0" smtClean="0">
-              <a:latin typeface="Arial" panose="020B0604020202020204" pitchFamily="34" charset="0"/>
-            </a:endParaRPr>
+              <a:t>Bulk access to raw bytes</a:t>
+            </a:r>
           </a:p>
           <a:p>
             <a:pPr algn="just"/>
@@ -18072,103 +17951,8 @@
               <a:rPr lang="en-US" altLang="en-US" sz="2000" dirty="0" smtClean="0">
                 <a:latin typeface="Arial" panose="020B0604020202020204" pitchFamily="34" charset="0"/>
               </a:rPr>
-              <a:t>A limited set of file attributes was provided.</a:t>
-            </a:r>
-            <a:endParaRPr lang="en-US" altLang="en-US" sz="2000" dirty="0" smtClean="0">
-              <a:latin typeface="Arial" panose="020B0604020202020204" pitchFamily="34" charset="0"/>
-            </a:endParaRPr>
-          </a:p>
-          <a:p>
-            <a:pPr marL="0" indent="0" algn="just">
-              <a:buNone/>
-            </a:pPr>
-            <a:r>
-              <a:rPr lang="en-US" altLang="en-US" sz="2000" b="1" u="sng" dirty="0" smtClean="0">
-                <a:latin typeface="Arial" panose="020B0604020202020204" pitchFamily="34" charset="0"/>
-              </a:rPr>
-              <a:t>Features </a:t>
-            </a:r>
-            <a:r>
-              <a:rPr lang="en-US" altLang="en-US" sz="2000" b="1" u="sng" dirty="0">
-                <a:latin typeface="Arial" panose="020B0604020202020204" pitchFamily="34" charset="0"/>
-              </a:rPr>
-              <a:t>of </a:t>
-            </a:r>
-            <a:r>
-              <a:rPr lang="en-US" altLang="en-US" sz="2000" b="1" u="sng" dirty="0" smtClean="0">
-                <a:latin typeface="Arial" panose="020B0604020202020204" pitchFamily="34" charset="0"/>
-              </a:rPr>
-              <a:t> java.nio</a:t>
-            </a:r>
-            <a:r>
-              <a:rPr lang="en-US" altLang="en-US" sz="2000" b="1" u="sng" dirty="0">
-                <a:latin typeface="Arial" panose="020B0604020202020204" pitchFamily="34" charset="0"/>
-              </a:rPr>
-              <a:t>.* </a:t>
-            </a:r>
-            <a:endParaRPr lang="en-US" altLang="en-US" sz="2000" b="1" u="sng" dirty="0" smtClean="0">
-              <a:latin typeface="Arial" panose="020B0604020202020204" pitchFamily="34" charset="0"/>
-            </a:endParaRPr>
-          </a:p>
-          <a:p>
-            <a:pPr algn="just"/>
-            <a:r>
-              <a:rPr lang="en-US" altLang="en-US" sz="2000" dirty="0" smtClean="0">
-                <a:latin typeface="Arial" panose="020B0604020202020204" pitchFamily="34" charset="0"/>
-              </a:rPr>
-              <a:t>Added with java 6/ </a:t>
-            </a:r>
-            <a:r>
-              <a:rPr lang="en-US" altLang="en-US" sz="2000" dirty="0" err="1" smtClean="0">
-                <a:latin typeface="Arial" panose="020B0604020202020204" pitchFamily="34" charset="0"/>
-              </a:rPr>
-              <a:t>jdk</a:t>
-            </a:r>
-            <a:r>
-              <a:rPr lang="en-US" altLang="en-US" sz="2000" dirty="0" smtClean="0">
-                <a:latin typeface="Arial" panose="020B0604020202020204" pitchFamily="34" charset="0"/>
-              </a:rPr>
-              <a:t> 6</a:t>
-            </a:r>
-            <a:endParaRPr lang="en-US" altLang="en-US" sz="2000" dirty="0" smtClean="0">
-              <a:latin typeface="Arial" panose="020B0604020202020204" pitchFamily="34" charset="0"/>
-            </a:endParaRPr>
-          </a:p>
-          <a:p>
-            <a:pPr algn="just"/>
-            <a:r>
-              <a:rPr lang="en-US" altLang="en-US" sz="2000" dirty="0" smtClean="0">
-                <a:latin typeface="Arial" panose="020B0604020202020204" pitchFamily="34" charset="0"/>
-              </a:rPr>
-              <a:t>Stands for non blocking i/o</a:t>
-            </a:r>
-            <a:endParaRPr lang="en-US" altLang="en-US" sz="2000" dirty="0" smtClean="0">
-              <a:latin typeface="Arial" panose="020B0604020202020204" pitchFamily="34" charset="0"/>
-            </a:endParaRPr>
-          </a:p>
-          <a:p>
-            <a:pPr algn="just"/>
-            <a:r>
-              <a:rPr lang="en-US" altLang="en-US" sz="2000" dirty="0" smtClean="0">
-                <a:latin typeface="Arial" panose="020B0604020202020204" pitchFamily="34" charset="0"/>
-              </a:rPr>
-              <a:t>Bulk access to raw bytes</a:t>
-            </a:r>
-            <a:endParaRPr lang="en-US" altLang="en-US" sz="2000" dirty="0" smtClean="0">
-              <a:latin typeface="Arial" panose="020B0604020202020204" pitchFamily="34" charset="0"/>
-            </a:endParaRPr>
-          </a:p>
-          <a:p>
-            <a:pPr algn="just"/>
-            <a:r>
-              <a:rPr lang="en-US" altLang="en-US" sz="2000" dirty="0" smtClean="0">
-                <a:latin typeface="Arial" panose="020B0604020202020204" pitchFamily="34" charset="0"/>
-              </a:rPr>
               <a:t>Bidirectional channels</a:t>
             </a:r>
-            <a:endParaRPr lang="en-US" altLang="en-US" sz="2000" dirty="0" smtClean="0">
-              <a:latin typeface="Arial" panose="020B0604020202020204" pitchFamily="34" charset="0"/>
-            </a:endParaRPr>
           </a:p>
           <a:p>
             <a:pPr algn="just"/>
@@ -18288,9 +18072,6 @@
               </a:rPr>
               <a:t>The channel is where the data comes from.</a:t>
             </a:r>
-            <a:endParaRPr lang="en-US" altLang="en-US" sz="2000" dirty="0" smtClean="0">
-              <a:latin typeface="Arial" panose="020B0604020202020204" pitchFamily="34" charset="0"/>
-            </a:endParaRPr>
           </a:p>
           <a:p>
             <a:pPr algn="just"/>
@@ -18300,9 +18081,6 @@
               </a:rPr>
               <a:t>The channel object is an object that connect to a file .</a:t>
             </a:r>
-            <a:endParaRPr lang="en-US" altLang="en-US" sz="2000" dirty="0" smtClean="0">
-              <a:latin typeface="Arial" panose="020B0604020202020204" pitchFamily="34" charset="0"/>
-            </a:endParaRPr>
           </a:p>
           <a:p>
             <a:pPr algn="just"/>
@@ -18312,9 +18090,6 @@
               </a:rPr>
               <a:t>A channel can write the buffer to the medium or can read data from that medium to a buffer.</a:t>
             </a:r>
-            <a:endParaRPr lang="en-US" altLang="en-US" sz="2000" dirty="0" smtClean="0">
-              <a:latin typeface="Arial" panose="020B0604020202020204" pitchFamily="34" charset="0"/>
-            </a:endParaRPr>
           </a:p>
           <a:p>
             <a:pPr algn="just"/>
@@ -18324,9 +18099,6 @@
               </a:rPr>
               <a:t>In Java , Channel is an interface</a:t>
             </a:r>
-            <a:endParaRPr lang="en-US" altLang="en-US" sz="2000" dirty="0" smtClean="0">
-              <a:latin typeface="Arial" panose="020B0604020202020204" pitchFamily="34" charset="0"/>
-            </a:endParaRPr>
           </a:p>
           <a:p>
             <a:pPr algn="just"/>
@@ -18508,9 +18280,6 @@
               </a:rPr>
               <a:t> can be mapped to a memory array for direct access. This allows for much faster operation than accessing to the disk directly. </a:t>
             </a:r>
-            <a:endParaRPr lang="en-US" altLang="en-US" sz="2000" dirty="0" smtClean="0">
-              <a:latin typeface="Arial" panose="020B0604020202020204" pitchFamily="34" charset="0"/>
-            </a:endParaRPr>
           </a:p>
           <a:p>
             <a:pPr algn="just"/>
@@ -18544,9 +18313,6 @@
               </a:rPr>
               <a:t> they are different depending on the machine we are working on.</a:t>
             </a:r>
-            <a:endParaRPr lang="en-US" altLang="en-US" sz="2000" dirty="0" smtClean="0">
-              <a:latin typeface="Arial" panose="020B0604020202020204" pitchFamily="34" charset="0"/>
-            </a:endParaRPr>
           </a:p>
           <a:p>
             <a:pPr algn="just"/>
@@ -18556,9 +18322,6 @@
               </a:rPr>
               <a:t>There are 3 modes of operation by a channel</a:t>
             </a:r>
-            <a:endParaRPr lang="en-US" altLang="en-US" sz="2000" dirty="0" smtClean="0">
-              <a:latin typeface="Arial" panose="020B0604020202020204" pitchFamily="34" charset="0"/>
-            </a:endParaRPr>
           </a:p>
           <a:p>
             <a:pPr algn="just"/>
@@ -18568,9 +18331,6 @@
               </a:rPr>
               <a:t>READ_ONLY</a:t>
             </a:r>
-            <a:endParaRPr lang="en-US" altLang="en-US" sz="2000" dirty="0" smtClean="0">
-              <a:latin typeface="Arial" panose="020B0604020202020204" pitchFamily="34" charset="0"/>
-            </a:endParaRPr>
           </a:p>
           <a:p>
             <a:pPr algn="just"/>
@@ -18580,9 +18340,6 @@
               </a:rPr>
               <a:t>READ_WRITE</a:t>
             </a:r>
-            <a:endParaRPr lang="en-US" altLang="en-US" sz="2000" dirty="0" smtClean="0">
-              <a:latin typeface="Arial" panose="020B0604020202020204" pitchFamily="34" charset="0"/>
-            </a:endParaRPr>
           </a:p>
           <a:p>
             <a:pPr algn="just"/>
@@ -18592,9 +18349,6 @@
               </a:rPr>
               <a:t>PRIVATE</a:t>
             </a:r>
-            <a:endParaRPr lang="en-US" altLang="en-US" sz="2000" dirty="0" smtClean="0">
-              <a:latin typeface="Arial" panose="020B0604020202020204" pitchFamily="34" charset="0"/>
-            </a:endParaRPr>
           </a:p>
           <a:p>
             <a:pPr algn="just"/>
@@ -18716,9 +18470,6 @@
               </a:rPr>
               <a:t>A buffer can be seen as a space in memory. It can reside in the main memory of the JVM. </a:t>
             </a:r>
-            <a:endParaRPr lang="en-US" altLang="en-US" sz="2000" dirty="0" smtClean="0">
-              <a:latin typeface="Arial" panose="020B0604020202020204" pitchFamily="34" charset="0"/>
-            </a:endParaRPr>
           </a:p>
           <a:p>
             <a:r>
@@ -18727,9 +18478,6 @@
               </a:rPr>
               <a:t>A buffer object has 3 properties:</a:t>
             </a:r>
-            <a:endParaRPr lang="en-US" sz="2000" dirty="0">
-              <a:latin typeface="Ariel"/>
-            </a:endParaRPr>
           </a:p>
           <a:p>
             <a:r>
@@ -18738,9 +18486,6 @@
               </a:rPr>
               <a:t>a capacity = the size of the backing array.</a:t>
             </a:r>
-            <a:endParaRPr lang="en-US" sz="2000" dirty="0">
-              <a:latin typeface="Ariel"/>
-            </a:endParaRPr>
           </a:p>
           <a:p>
             <a:r>
@@ -18755,9 +18500,6 @@
               </a:rPr>
               <a:t>position.</a:t>
             </a:r>
-            <a:endParaRPr lang="en-US" sz="2000" dirty="0" smtClean="0">
-              <a:latin typeface="Ariel"/>
-            </a:endParaRPr>
           </a:p>
           <a:p>
             <a:r>
@@ -18778,9 +18520,6 @@
               </a:rPr>
               <a:t>.</a:t>
             </a:r>
-            <a:endParaRPr lang="en-US" sz="2000" dirty="0" smtClean="0">
-              <a:latin typeface="Ariel"/>
-            </a:endParaRPr>
           </a:p>
           <a:p>
             <a:r>
@@ -18789,9 +18528,6 @@
               </a:rPr>
               <a:t>A buffer supports 4 operations:</a:t>
             </a:r>
-            <a:endParaRPr lang="en-US" sz="2000" dirty="0">
-              <a:latin typeface="Ariel"/>
-            </a:endParaRPr>
           </a:p>
           <a:p>
             <a:r>
@@ -18800,9 +18536,6 @@
               </a:rPr>
               <a:t>rewind: clears the mark and sets the current position to 0.</a:t>
             </a:r>
-            <a:endParaRPr lang="en-US" sz="2000" dirty="0">
-              <a:latin typeface="Ariel"/>
-            </a:endParaRPr>
           </a:p>
           <a:p>
             <a:r>
@@ -18811,9 +18544,6 @@
               </a:rPr>
               <a:t>reset: sets the current position to the previously set mark. This is the companion method of the mark method.</a:t>
             </a:r>
-            <a:endParaRPr lang="en-US" sz="2000" dirty="0">
-              <a:latin typeface="Ariel"/>
-            </a:endParaRPr>
           </a:p>
           <a:p>
             <a:r>
@@ -18822,9 +18552,6 @@
               </a:rPr>
               <a:t>flip: sets the limit to the current position and rewinds the buffer.</a:t>
             </a:r>
-            <a:endParaRPr lang="en-US" sz="2000" dirty="0">
-              <a:latin typeface="Ariel"/>
-            </a:endParaRPr>
           </a:p>
           <a:p>
             <a:r>
@@ -18833,9 +18560,6 @@
               </a:rPr>
               <a:t>clear: clears the buffer.</a:t>
             </a:r>
-            <a:endParaRPr lang="en-US" sz="2000" dirty="0">
-              <a:latin typeface="Ariel"/>
-            </a:endParaRPr>
           </a:p>
           <a:p>
             <a:pPr algn="just"/>
@@ -18935,9 +18659,6 @@
               </a:rPr>
               <a:t>Buffer is an abstract class in java.</a:t>
             </a:r>
-            <a:endParaRPr lang="en-US" altLang="en-US" sz="2000" dirty="0" smtClean="0">
-              <a:latin typeface="Arial" panose="020B0604020202020204" pitchFamily="34" charset="0"/>
-            </a:endParaRPr>
           </a:p>
           <a:p>
             <a:pPr algn="just"/>
@@ -19091,7 +18812,6 @@
               <a:rPr lang="en-US" sz="2000" dirty="0" smtClean="0"/>
               <a:t>Steps:</a:t>
             </a:r>
-            <a:endParaRPr lang="en-US" sz="2000" dirty="0" smtClean="0"/>
           </a:p>
           <a:p>
             <a:endParaRPr lang="en-US" sz="2000" dirty="0"/>
@@ -19113,7 +18833,6 @@
               <a:rPr lang="en-US" sz="2000" dirty="0"/>
               <a:t>.</a:t>
             </a:r>
-            <a:endParaRPr lang="en-US" sz="2000" dirty="0"/>
           </a:p>
           <a:p>
             <a:r>
@@ -19128,7 +18847,6 @@
               <a:rPr lang="en-US" sz="2000" dirty="0"/>
               <a:t>() method to write data.</a:t>
             </a:r>
-            <a:endParaRPr lang="en-US" sz="2000" dirty="0"/>
           </a:p>
           <a:p>
             <a:r>
@@ -19151,7 +18869,6 @@
               <a:rPr lang="en-US" sz="2000" dirty="0"/>
               <a:t> to a file.</a:t>
             </a:r>
-            <a:endParaRPr lang="en-US" sz="2000" dirty="0"/>
           </a:p>
           <a:p>
             <a:pPr marL="0" indent="0" algn="just">
@@ -19275,6 +18992,7 @@
             </a:pPr>
             <a:fld id="{A01CA5F2-CD08-4EF5-BAD9-872B7BB27165}" type="slidenum">
               <a:rPr lang="en-US" altLang="en-US" smtClean="0"/>
+              <a:t>57</a:t>
             </a:fld>
             <a:endParaRPr lang="en-US" altLang="en-US"/>
           </a:p>
@@ -19325,12 +19043,20 @@
           <a:bodyPr/>
           <a:lstStyle/>
           <a:p>
+            <a:r>
+              <a:rPr lang="en-US" sz="2800" b="1" dirty="0" smtClean="0"/>
+              <a:t/>
+            </a:r>
             <a:br>
               <a:rPr lang="en-US" sz="2800" b="1" dirty="0" smtClean="0"/>
             </a:br>
             <a:r>
               <a:rPr lang="en-US" sz="2800" b="1" dirty="0" smtClean="0"/>
               <a:t>Serialization </a:t>
+            </a:r>
+            <a:r>
+              <a:rPr lang="en-US" sz="2400" b="1" dirty="0"/>
+              <a:t/>
             </a:r>
             <a:br>
               <a:rPr lang="en-US" sz="2400" b="1" dirty="0"/>
@@ -19350,7 +19076,7 @@
           <p:nvPr/>
         </p:nvPicPr>
         <p:blipFill>
-          <a:blip r:embed="rId1">
+          <a:blip r:embed="rId3">
             <a:extLst>
               <a:ext uri="{28A0092B-C50C-407E-A947-70E740481C1C}">
                 <a14:useLocalDpi xmlns:a14="http://schemas.microsoft.com/office/drawing/2010/main" val="0"/>
@@ -19423,12 +19149,20 @@
           <a:bodyPr/>
           <a:lstStyle/>
           <a:p>
+            <a:r>
+              <a:rPr lang="en-US" sz="2800" b="1" dirty="0" smtClean="0"/>
+              <a:t/>
+            </a:r>
             <a:br>
               <a:rPr lang="en-US" sz="2800" b="1" dirty="0" smtClean="0"/>
             </a:br>
             <a:r>
               <a:rPr lang="en-US" sz="2800" b="1" dirty="0" smtClean="0"/>
               <a:t>Serializable Interface </a:t>
+            </a:r>
+            <a:r>
+              <a:rPr lang="en-US" sz="2400" b="1" dirty="0"/>
+              <a:t/>
             </a:r>
             <a:br>
               <a:rPr lang="en-US" sz="2400" b="1" dirty="0"/>
@@ -19448,7 +19182,7 @@
           <p:nvPr/>
         </p:nvPicPr>
         <p:blipFill>
-          <a:blip r:embed="rId1">
+          <a:blip r:embed="rId3">
             <a:extLst>
               <a:ext uri="{28A0092B-C50C-407E-A947-70E740481C1C}">
                 <a14:useLocalDpi xmlns:a14="http://schemas.microsoft.com/office/drawing/2010/main" val="0"/>
@@ -19525,7 +19259,6 @@
               <a:rPr lang="en-US" altLang="en-US" dirty="0"/>
               <a:t>Binary Versus Text Files</a:t>
             </a:r>
-            <a:endParaRPr lang="en-US" altLang="en-US" dirty="0"/>
           </a:p>
         </p:txBody>
       </p:sp>
@@ -19562,7 +19295,6 @@
               <a:rPr lang="en-US" altLang="en-US" sz="2000" dirty="0"/>
               <a:t> data and programs are ultimately just zeros and ones</a:t>
             </a:r>
-            <a:endParaRPr lang="en-US" altLang="en-US" sz="2000" dirty="0"/>
           </a:p>
           <a:p>
             <a:pPr lvl="1">
@@ -19578,7 +19310,6 @@
               <a:rPr lang="en-US" altLang="en-US" sz="2000" i="1" dirty="0"/>
               <a:t>binary</a:t>
             </a:r>
-            <a:endParaRPr lang="en-US" altLang="en-US" sz="2000" i="1" dirty="0"/>
           </a:p>
           <a:p>
             <a:pPr lvl="1">
@@ -19594,7 +19325,6 @@
               <a:rPr lang="en-US" altLang="en-US" sz="2000" dirty="0"/>
               <a:t> is one binary digit</a:t>
             </a:r>
-            <a:endParaRPr lang="en-US" altLang="en-US" sz="2000" dirty="0"/>
           </a:p>
           <a:p>
             <a:pPr lvl="1">
@@ -19610,7 +19340,6 @@
               <a:rPr lang="en-US" altLang="en-US" sz="2000" dirty="0"/>
               <a:t> is a group of eight bits</a:t>
             </a:r>
-            <a:endParaRPr lang="en-US" altLang="en-US" sz="2000" dirty="0"/>
           </a:p>
           <a:p>
             <a:pPr>
@@ -19630,7 +19359,6 @@
               <a:rPr lang="en-US" altLang="en-US" sz="2000" dirty="0"/>
               <a:t>: the bits represent printable characters</a:t>
             </a:r>
-            <a:endParaRPr lang="en-US" altLang="en-US" sz="2000" dirty="0"/>
           </a:p>
           <a:p>
             <a:pPr lvl="1">
@@ -19642,7 +19370,6 @@
               <a:rPr lang="en-US" altLang="en-US" sz="2000" dirty="0"/>
               <a:t>one byte per character for ASCII, the most common code</a:t>
             </a:r>
-            <a:endParaRPr lang="en-US" altLang="en-US" sz="2000" dirty="0"/>
           </a:p>
           <a:p>
             <a:pPr lvl="1">
@@ -19654,7 +19381,6 @@
               <a:rPr lang="en-US" altLang="en-US" sz="2000" dirty="0"/>
               <a:t>for example, Java source files are text files</a:t>
             </a:r>
-            <a:endParaRPr lang="en-US" altLang="en-US" sz="2000" dirty="0"/>
           </a:p>
           <a:p>
             <a:pPr lvl="1">
@@ -19666,7 +19392,6 @@
               <a:rPr lang="en-US" altLang="en-US" sz="2000" dirty="0"/>
               <a:t>so is any file created with a "text editor"</a:t>
             </a:r>
-            <a:endParaRPr lang="en-US" altLang="en-US" sz="2000" dirty="0"/>
           </a:p>
           <a:p>
             <a:pPr>
@@ -19686,7 +19411,6 @@
               <a:rPr lang="en-US" altLang="en-US" sz="2000" dirty="0"/>
               <a:t>: the bits represent other types of encoded information, such as executable instructions or numeric data</a:t>
             </a:r>
-            <a:endParaRPr lang="en-US" altLang="en-US" sz="2000" dirty="0"/>
           </a:p>
           <a:p>
             <a:pPr lvl="1">
@@ -19698,7 +19422,6 @@
               <a:rPr lang="en-US" altLang="en-US" sz="2000" dirty="0"/>
               <a:t>these files are easily read by the computer but not humans</a:t>
             </a:r>
-            <a:endParaRPr lang="en-US" altLang="en-US" sz="2000" dirty="0"/>
           </a:p>
           <a:p>
             <a:pPr lvl="1">
@@ -19718,7 +19441,6 @@
               <a:rPr lang="en-US" altLang="en-US" sz="2000" dirty="0"/>
               <a:t> "printable" files</a:t>
             </a:r>
-            <a:endParaRPr lang="en-US" altLang="en-US" sz="2000" dirty="0"/>
           </a:p>
           <a:p>
             <a:pPr lvl="2">
@@ -19738,7 +19460,6 @@
               <a:rPr lang="en-US" altLang="en-US" dirty="0"/>
               <a:t> print them, but they will be unintelligible</a:t>
             </a:r>
-            <a:endParaRPr lang="en-US" altLang="en-US" dirty="0"/>
           </a:p>
           <a:p>
             <a:pPr lvl="2">
@@ -19750,7 +19471,6 @@
               <a:rPr lang="en-US" altLang="en-US" dirty="0"/>
               <a:t>"printable" means "easily readable by humans when printed"</a:t>
             </a:r>
-            <a:endParaRPr lang="en-US" altLang="en-US" dirty="0"/>
           </a:p>
         </p:txBody>
       </p:sp>
@@ -19806,12 +19526,20 @@
           <a:bodyPr/>
           <a:lstStyle/>
           <a:p>
+            <a:r>
+              <a:rPr lang="en-US" sz="2800" b="1" dirty="0" smtClean="0"/>
+              <a:t/>
+            </a:r>
             <a:br>
               <a:rPr lang="en-US" sz="2800" b="1" dirty="0" smtClean="0"/>
             </a:br>
             <a:r>
               <a:rPr lang="en-US" sz="2800" b="1" dirty="0" smtClean="0"/>
               <a:t>Serialization Example </a:t>
+            </a:r>
+            <a:r>
+              <a:rPr lang="en-US" sz="2400" b="1" dirty="0"/>
+              <a:t/>
             </a:r>
             <a:br>
               <a:rPr lang="en-US" sz="2400" b="1" dirty="0"/>
@@ -19831,7 +19559,7 @@
           <p:nvPr/>
         </p:nvPicPr>
         <p:blipFill>
-          <a:blip r:embed="rId1">
+          <a:blip r:embed="rId3">
             <a:extLst>
               <a:ext uri="{28A0092B-C50C-407E-A947-70E740481C1C}">
                 <a14:useLocalDpi xmlns:a14="http://schemas.microsoft.com/office/drawing/2010/main" val="0"/>
@@ -19904,12 +19632,20 @@
           <a:bodyPr/>
           <a:lstStyle/>
           <a:p>
+            <a:r>
+              <a:rPr lang="en-US" sz="2800" b="1" dirty="0" smtClean="0"/>
+              <a:t/>
+            </a:r>
             <a:br>
               <a:rPr lang="en-US" sz="2800" b="1" dirty="0" smtClean="0"/>
             </a:br>
             <a:r>
               <a:rPr lang="en-US" sz="2800" b="1" dirty="0" smtClean="0"/>
               <a:t>Serialization Example </a:t>
+            </a:r>
+            <a:r>
+              <a:rPr lang="en-US" sz="2400" b="1" dirty="0"/>
+              <a:t/>
             </a:r>
             <a:br>
               <a:rPr lang="en-US" sz="2400" b="1" dirty="0"/>
@@ -19929,7 +19665,7 @@
           <p:nvPr/>
         </p:nvPicPr>
         <p:blipFill>
-          <a:blip r:embed="rId1">
+          <a:blip r:embed="rId3">
             <a:extLst>
               <a:ext uri="{28A0092B-C50C-407E-A947-70E740481C1C}">
                 <a14:useLocalDpi xmlns:a14="http://schemas.microsoft.com/office/drawing/2010/main" val="0"/>
@@ -20002,12 +19738,20 @@
           <a:bodyPr/>
           <a:lstStyle/>
           <a:p>
+            <a:r>
+              <a:rPr lang="en-US" sz="2800" b="1" dirty="0" smtClean="0"/>
+              <a:t/>
+            </a:r>
             <a:br>
               <a:rPr lang="en-US" sz="2800" b="1" dirty="0" smtClean="0"/>
             </a:br>
             <a:r>
               <a:rPr lang="en-US" sz="2800" b="1" dirty="0" smtClean="0"/>
               <a:t>Serialization Example </a:t>
+            </a:r>
+            <a:r>
+              <a:rPr lang="en-US" sz="2400" b="1" dirty="0"/>
+              <a:t/>
             </a:r>
             <a:br>
               <a:rPr lang="en-US" sz="2400" b="1" dirty="0"/>
@@ -20027,7 +19771,7 @@
           <p:nvPr/>
         </p:nvPicPr>
         <p:blipFill>
-          <a:blip r:embed="rId1">
+          <a:blip r:embed="rId3">
             <a:extLst>
               <a:ext uri="{28A0092B-C50C-407E-A947-70E740481C1C}">
                 <a14:useLocalDpi xmlns:a14="http://schemas.microsoft.com/office/drawing/2010/main" val="0"/>
@@ -20100,12 +19844,20 @@
           <a:bodyPr/>
           <a:lstStyle/>
           <a:p>
+            <a:r>
+              <a:rPr lang="en-US" sz="2800" b="1" dirty="0" smtClean="0"/>
+              <a:t/>
+            </a:r>
             <a:br>
               <a:rPr lang="en-US" sz="2800" b="1" dirty="0" smtClean="0"/>
             </a:br>
             <a:r>
               <a:rPr lang="en-US" sz="2800" b="1" dirty="0" smtClean="0"/>
               <a:t>Exercise</a:t>
+            </a:r>
+            <a:r>
+              <a:rPr lang="en-US" sz="2400" b="1" dirty="0"/>
+              <a:t/>
             </a:r>
             <a:br>
               <a:rPr lang="en-US" sz="2400" b="1" dirty="0"/>
@@ -20125,7 +19877,7 @@
           <p:nvPr/>
         </p:nvPicPr>
         <p:blipFill>
-          <a:blip r:embed="rId1">
+          <a:blip r:embed="rId3">
             <a:extLst>
               <a:ext uri="{28A0092B-C50C-407E-A947-70E740481C1C}">
                 <a14:useLocalDpi xmlns:a14="http://schemas.microsoft.com/office/drawing/2010/main" val="0"/>
@@ -20281,7 +20033,7 @@
         </p:spPr>
         <p:txBody>
           <a:bodyPr rtlCol="0">
-            <a:normAutofit fontScale="90000"/>
+            <a:normAutofit fontScale="97500" lnSpcReduction="10000"/>
           </a:bodyPr>
           <a:lstStyle/>
           <a:p>
@@ -20301,7 +20053,6 @@
               <a:rPr lang="en-US" altLang="en-US" sz="3200" dirty="0"/>
               <a:t>Observer and Observable are deprecated from Java 9</a:t>
             </a:r>
-            <a:endParaRPr lang="en-US" altLang="en-US" sz="3200" dirty="0"/>
           </a:p>
           <a:p>
             <a:pPr algn="just" fontAlgn="auto">
@@ -20324,7 +20075,6 @@
               <a:rPr lang="en-US" sz="3200" dirty="0" smtClean="0"/>
               <a:t>:</a:t>
             </a:r>
-            <a:endParaRPr lang="en-US" sz="3200" dirty="0" smtClean="0"/>
           </a:p>
           <a:p>
             <a:pPr lvl="1" algn="just" fontAlgn="auto">
@@ -20351,7 +20101,6 @@
               <a:rPr lang="en-US" sz="2740" dirty="0" smtClean="0"/>
               <a:t>changes</a:t>
             </a:r>
-            <a:endParaRPr lang="en-US" sz="2740" dirty="0" smtClean="0"/>
           </a:p>
           <a:p>
             <a:pPr lvl="1" algn="just" fontAlgn="auto">
@@ -20377,7 +20126,6 @@
               <a:rPr lang="en-US" sz="2740" dirty="0"/>
               <a:t>Any object whose state may be of interest, and in whom another object may register an interest.</a:t>
             </a:r>
-            <a:endParaRPr lang="en-US" sz="2740" dirty="0"/>
           </a:p>
           <a:p>
             <a:pPr lvl="0" algn="just" fontAlgn="auto">
@@ -20399,10 +20147,6 @@
               </a:rPr>
               <a:t>Used in Notification Process</a:t>
             </a:r>
-            <a:endParaRPr lang="en-US" sz="3195" dirty="0">
-              <a:latin typeface="Times New Roman" panose="02020603050405020304" pitchFamily="18" charset="0"/>
-              <a:cs typeface="Times New Roman" panose="02020603050405020304" pitchFamily="18" charset="0"/>
-            </a:endParaRPr>
           </a:p>
         </p:txBody>
       </p:sp>
@@ -20426,6 +20170,7 @@
             </a:pPr>
             <a:fld id="{A01CA5F2-CD08-4EF5-BAD9-872B7BB27165}" type="slidenum">
               <a:rPr lang="en-US" altLang="en-US" smtClean="0"/>
+              <a:t>64</a:t>
             </a:fld>
             <a:endParaRPr lang="en-US" altLang="en-US"/>
           </a:p>
@@ -20436,11 +20181,11 @@
   <p:clrMapOvr>
     <a:masterClrMapping/>
   </p:clrMapOvr>
-  <mc:AlternateContent xmlns:mc="http://schemas.openxmlformats.org/markup-compatibility/2006">
-    <mc:Choice xmlns:p14="http://schemas.microsoft.com/office/powerpoint/2010/main" Requires="p14">
+  <mc:AlternateContent xmlns:mc="http://schemas.openxmlformats.org/markup-compatibility/2006" xmlns:p14="http://schemas.microsoft.com/office/powerpoint/2010/main">
+    <mc:Choice Requires="p14">
       <p:transition spd="slow" p14:dur="2000"/>
     </mc:Choice>
-    <mc:Fallback>
+    <mc:Fallback xmlns="">
       <p:transition spd="slow"/>
     </mc:Fallback>
   </mc:AlternateContent>
@@ -20791,7 +20536,14 @@
         <p:cNvGrpSpPr/>
         <p:nvPr/>
       </p:nvGrpSpPr>
-      <p:grpSpPr/>
+      <p:grpSpPr>
+        <a:xfrm>
+          <a:off x="0" y="0"/>
+          <a:ext cx="0" cy="0"/>
+          <a:chOff x="0" y="0"/>
+          <a:chExt cx="0" cy="0"/>
+        </a:xfrm>
+      </p:grpSpPr>
       <p:sp>
         <p:nvSpPr>
           <p:cNvPr id="3" name="Content Placeholder 2"/>
@@ -20810,19 +20562,18 @@
         </p:spPr>
         <p:txBody>
           <a:bodyPr/>
+          <a:lstStyle/>
           <a:p>
             <a:r>
               <a:rPr lang="en-US" altLang="en-US" sz="3600"/>
               <a:t>Observable is a class, not an interface</a:t>
             </a:r>
-            <a:endParaRPr lang="en-US" altLang="en-US" sz="3600"/>
           </a:p>
           <a:p>
             <a:r>
               <a:rPr lang="en-US" altLang="en-US" sz="3600"/>
               <a:t>Observer is an interface</a:t>
             </a:r>
-            <a:endParaRPr lang="en-US" altLang="en-US" sz="3600"/>
           </a:p>
           <a:p>
             <a:endParaRPr lang="en-US" altLang="en-US" sz="3600"/>
@@ -20832,35 +20583,30 @@
               <a:rPr lang="en-US" altLang="en-US" sz="3600"/>
               <a:t>Observable		-	Maintains observers</a:t>
             </a:r>
-            <a:endParaRPr lang="en-US" altLang="en-US" sz="3600"/>
           </a:p>
           <a:p>
             <a:r>
               <a:rPr lang="en-US" altLang="en-US" sz="3600"/>
               <a:t>Observer		-	Gets updates</a:t>
             </a:r>
-            <a:endParaRPr lang="en-US" altLang="en-US" sz="3600"/>
           </a:p>
           <a:p>
             <a:r>
               <a:rPr lang="en-US" altLang="en-US" sz="3600"/>
               <a:t>addObserver()	-	Register observer</a:t>
             </a:r>
-            <a:endParaRPr lang="en-US" altLang="en-US" sz="3600"/>
           </a:p>
           <a:p>
             <a:r>
               <a:rPr lang="en-US" altLang="en-US" sz="3600"/>
               <a:t>setChanged()		-	Marks change</a:t>
             </a:r>
-            <a:endParaRPr lang="en-US" altLang="en-US" sz="3600"/>
           </a:p>
           <a:p>
             <a:r>
               <a:rPr lang="en-US" altLang="en-US" sz="3600"/>
               <a:t>notifyObservers()	-	Notifies all</a:t>
             </a:r>
-            <a:endParaRPr lang="en-US" altLang="en-US" sz="3600"/>
           </a:p>
         </p:txBody>
       </p:sp>
@@ -20877,6 +20623,7 @@
         <p:spPr/>
         <p:txBody>
           <a:bodyPr/>
+          <a:lstStyle/>
           <a:p>
             <a:pPr>
               <a:defRPr/>
@@ -20902,12 +20649,14 @@
         <p:spPr/>
         <p:txBody>
           <a:bodyPr/>
+          <a:lstStyle/>
           <a:p>
             <a:pPr>
               <a:defRPr/>
             </a:pPr>
             <a:fld id="{A01CA5F2-CD08-4EF5-BAD9-872B7BB27165}" type="slidenum">
               <a:rPr lang="en-US" altLang="en-US"/>
+              <a:t>65</a:t>
             </a:fld>
             <a:endParaRPr lang="en-US" altLang="en-US"/>
           </a:p>
@@ -20930,7 +20679,14 @@
         <p:cNvGrpSpPr/>
         <p:nvPr/>
       </p:nvGrpSpPr>
-      <p:grpSpPr/>
+      <p:grpSpPr>
+        <a:xfrm>
+          <a:off x="0" y="0"/>
+          <a:ext cx="0" cy="0"/>
+          <a:chOff x="0" y="0"/>
+          <a:chExt cx="0" cy="0"/>
+        </a:xfrm>
+      </p:grpSpPr>
       <p:sp>
         <p:nvSpPr>
           <p:cNvPr id="4" name="Footer Placeholder 3"/>
@@ -20944,6 +20700,7 @@
         <p:spPr/>
         <p:txBody>
           <a:bodyPr/>
+          <a:lstStyle/>
           <a:p>
             <a:pPr>
               <a:defRPr/>
@@ -20969,12 +20726,14 @@
         <p:spPr/>
         <p:txBody>
           <a:bodyPr/>
+          <a:lstStyle/>
           <a:p>
             <a:pPr>
               <a:defRPr/>
             </a:pPr>
             <a:fld id="{A01CA5F2-CD08-4EF5-BAD9-872B7BB27165}" type="slidenum">
               <a:rPr lang="en-US" altLang="en-US"/>
+              <a:t>66</a:t>
             </a:fld>
             <a:endParaRPr lang="en-US" altLang="en-US"/>
           </a:p>
@@ -20994,12 +20753,12 @@
           <a:graphicData uri="http://schemas.openxmlformats.org/presentationml/2006/ole">
             <mc:AlternateContent xmlns:mc="http://schemas.openxmlformats.org/markup-compatibility/2006">
               <mc:Choice xmlns:v="urn:schemas-microsoft-com:vml" Requires="v">
-                <p:oleObj spid="_x0000_s7" name="" r:id="rId1" imgW="10496550" imgH="4692650" progId="Paint.Picture">
+                <p:oleObj spid="_x0000_s17410" r:id="rId3" imgW="10496550" imgH="4692650" progId="Paint.Picture">
                   <p:embed/>
                 </p:oleObj>
               </mc:Choice>
               <mc:Fallback>
-                <p:oleObj name="" r:id="rId1" imgW="10496550" imgH="4692650" progId="Paint.Picture">
+                <p:oleObj r:id="rId3" imgW="10496550" imgH="4692650" progId="Paint.Picture">
                   <p:embed/>
                   <p:pic>
                     <p:nvPicPr>
@@ -21008,7 +20767,7 @@
                       <p:nvPr/>
                     </p:nvPicPr>
                     <p:blipFill>
-                      <a:blip r:embed="rId2"/>
+                      <a:blip r:embed="rId4"/>
                       <a:stretch>
                         <a:fillRect/>
                       </a:stretch>
@@ -21046,7 +20805,14 @@
         <p:cNvGrpSpPr/>
         <p:nvPr/>
       </p:nvGrpSpPr>
-      <p:grpSpPr/>
+      <p:grpSpPr>
+        <a:xfrm>
+          <a:off x="0" y="0"/>
+          <a:ext cx="0" cy="0"/>
+          <a:chOff x="0" y="0"/>
+          <a:chExt cx="0" cy="0"/>
+        </a:xfrm>
+      </p:grpSpPr>
       <p:sp>
         <p:nvSpPr>
           <p:cNvPr id="4" name="Footer Placeholder 3"/>
@@ -21060,6 +20826,7 @@
         <p:spPr/>
         <p:txBody>
           <a:bodyPr/>
+          <a:lstStyle/>
           <a:p>
             <a:pPr>
               <a:defRPr/>
@@ -21085,12 +20852,14 @@
         <p:spPr/>
         <p:txBody>
           <a:bodyPr/>
+          <a:lstStyle/>
           <a:p>
             <a:pPr>
               <a:defRPr/>
             </a:pPr>
             <a:fld id="{A01CA5F2-CD08-4EF5-BAD9-872B7BB27165}" type="slidenum">
               <a:rPr lang="en-US" altLang="en-US"/>
+              <a:t>67</a:t>
             </a:fld>
             <a:endParaRPr lang="en-US" altLang="en-US"/>
           </a:p>
@@ -21110,12 +20879,12 @@
           <a:graphicData uri="http://schemas.openxmlformats.org/presentationml/2006/ole">
             <mc:AlternateContent xmlns:mc="http://schemas.openxmlformats.org/markup-compatibility/2006">
               <mc:Choice xmlns:v="urn:schemas-microsoft-com:vml" Requires="v">
-                <p:oleObj spid="_x0000_s7" name="" r:id="rId1" imgW="5867400" imgH="3752850" progId="Paint.Picture">
+                <p:oleObj spid="_x0000_s18434" r:id="rId3" imgW="5867400" imgH="3752850" progId="Paint.Picture">
                   <p:embed/>
                 </p:oleObj>
               </mc:Choice>
               <mc:Fallback>
-                <p:oleObj name="" r:id="rId1" imgW="5867400" imgH="3752850" progId="Paint.Picture">
+                <p:oleObj r:id="rId3" imgW="5867400" imgH="3752850" progId="Paint.Picture">
                   <p:embed/>
                   <p:pic>
                     <p:nvPicPr>
@@ -21124,7 +20893,7 @@
                       <p:nvPr/>
                     </p:nvPicPr>
                     <p:blipFill>
-                      <a:blip r:embed="rId2"/>
+                      <a:blip r:embed="rId4"/>
                       <a:stretch>
                         <a:fillRect/>
                       </a:stretch>
@@ -21190,6 +20959,7 @@
             </a:pPr>
             <a:fld id="{A01CA5F2-CD08-4EF5-BAD9-872B7BB27165}" type="slidenum">
               <a:rPr lang="en-US" altLang="en-US" smtClean="0"/>
+              <a:t>68</a:t>
             </a:fld>
             <a:endParaRPr lang="en-US" altLang="en-US"/>
           </a:p>
@@ -21460,9 +21230,6 @@
               </a:rPr>
               <a:t>Some description</a:t>
             </a:r>
-            <a:endParaRPr lang="en-US" altLang="en-US" sz="2000" dirty="0" smtClean="0">
-              <a:latin typeface="Courier New" panose="02070309020205020404" pitchFamily="49" charset="0"/>
-            </a:endParaRPr>
           </a:p>
           <a:p>
             <a:pPr>
@@ -21484,9 +21251,6 @@
               </a:rPr>
               <a:t>----------------------</a:t>
             </a:r>
-            <a:endParaRPr lang="en-US" altLang="en-US" sz="2000" dirty="0" smtClean="0">
-              <a:latin typeface="Courier New" panose="02070309020205020404" pitchFamily="49" charset="0"/>
-            </a:endParaRPr>
           </a:p>
           <a:p>
             <a:pPr>
@@ -21514,9 +21278,6 @@
               </a:rPr>
               <a:t> 222   </a:t>
             </a:r>
-            <a:endParaRPr lang="en-US" altLang="en-US" sz="2000" dirty="0" smtClean="0">
-              <a:latin typeface="Courier New" panose="02070309020205020404" pitchFamily="49" charset="0"/>
-            </a:endParaRPr>
           </a:p>
           <a:p>
             <a:pPr marL="457200" indent="-457200">
@@ -21639,9 +21400,6 @@
               </a:rPr>
               <a:t>0000000 312 376 272 276 000 000 000 061</a:t>
             </a:r>
-            <a:endParaRPr lang="pt-BR" altLang="en-US" sz="1600">
-              <a:latin typeface="Courier New" panose="02070309020205020404" pitchFamily="49" charset="0"/>
-            </a:endParaRPr>
           </a:p>
           <a:p>
             <a:pPr>
@@ -21657,9 +21415,6 @@
               </a:rPr>
               <a:t>        312 376 272 276  \0  \0  \0   1</a:t>
             </a:r>
-            <a:endParaRPr lang="pt-BR" altLang="en-US" sz="1600">
-              <a:latin typeface="Courier New" panose="02070309020205020404" pitchFamily="49" charset="0"/>
-            </a:endParaRPr>
           </a:p>
           <a:p>
             <a:pPr>
@@ -21675,9 +21430,6 @@
               </a:rPr>
               <a:t>0000010 000 164 012 000 051 000 062 007</a:t>
             </a:r>
-            <a:endParaRPr lang="pt-BR" altLang="en-US" sz="1600">
-              <a:latin typeface="Courier New" panose="02070309020205020404" pitchFamily="49" charset="0"/>
-            </a:endParaRPr>
           </a:p>
           <a:p>
             <a:pPr>
@@ -21693,9 +21445,6 @@
               </a:rPr>
               <a:t>         \0   t  \n  \0   )  \0   2  \a</a:t>
             </a:r>
-            <a:endParaRPr lang="pt-BR" altLang="en-US" sz="1600">
-              <a:latin typeface="Courier New" panose="02070309020205020404" pitchFamily="49" charset="0"/>
-            </a:endParaRPr>
           </a:p>
           <a:p>
             <a:pPr>
@@ -21711,9 +21460,6 @@
               </a:rPr>
               <a:t>0000020 000 063 007 000 064 010 000 065</a:t>
             </a:r>
-            <a:endParaRPr lang="pt-BR" altLang="en-US" sz="1600">
-              <a:latin typeface="Courier New" panose="02070309020205020404" pitchFamily="49" charset="0"/>
-            </a:endParaRPr>
           </a:p>
           <a:p>
             <a:pPr>
@@ -21729,9 +21475,6 @@
               </a:rPr>
               <a:t>         \0   3  \a  \0   4  \b  \0   5</a:t>
             </a:r>
-            <a:endParaRPr lang="pt-BR" altLang="en-US" sz="1600">
-              <a:latin typeface="Courier New" panose="02070309020205020404" pitchFamily="49" charset="0"/>
-            </a:endParaRPr>
           </a:p>
           <a:p>
             <a:pPr>
@@ -21747,9 +21490,6 @@
               </a:rPr>
               <a:t>0000030 012 000 003 000 066 012 000 002</a:t>
             </a:r>
-            <a:endParaRPr lang="pt-BR" altLang="en-US" sz="1600">
-              <a:latin typeface="Courier New" panose="02070309020205020404" pitchFamily="49" charset="0"/>
-            </a:endParaRPr>
           </a:p>
           <a:p>
             <a:pPr>
@@ -21765,9 +21505,6 @@
               </a:rPr>
               <a:t>         \n  \0 003  \0   6  \n  \0 002</a:t>
             </a:r>
-            <a:endParaRPr lang="pt-BR" altLang="en-US" sz="1600">
-              <a:latin typeface="Courier New" panose="02070309020205020404" pitchFamily="49" charset="0"/>
-            </a:endParaRPr>
           </a:p>
           <a:p>
             <a:pPr>
@@ -21795,9 +21532,6 @@
               </a:rPr>
               <a:t>...</a:t>
             </a:r>
-            <a:endParaRPr lang="pt-BR" altLang="en-US" sz="1600">
-              <a:latin typeface="Courier New" panose="02070309020205020404" pitchFamily="49" charset="0"/>
-            </a:endParaRPr>
           </a:p>
           <a:p>
             <a:pPr>
@@ -21813,9 +21547,6 @@
               </a:rPr>
               <a:t>0000630 000 145 000 146 001 000 027 152</a:t>
             </a:r>
-            <a:endParaRPr lang="pt-BR" altLang="en-US" sz="1600">
-              <a:latin typeface="Courier New" panose="02070309020205020404" pitchFamily="49" charset="0"/>
-            </a:endParaRPr>
           </a:p>
           <a:p>
             <a:pPr>
@@ -21831,9 +21562,6 @@
               </a:rPr>
               <a:t>         \0   e  \0   f 001  \0 027   j</a:t>
             </a:r>
-            <a:endParaRPr lang="pt-BR" altLang="en-US" sz="1600">
-              <a:latin typeface="Courier New" panose="02070309020205020404" pitchFamily="49" charset="0"/>
-            </a:endParaRPr>
           </a:p>
           <a:p>
             <a:pPr>
@@ -21849,9 +21577,6 @@
               </a:rPr>
               <a:t>0000640 141 166 141 057 154 141 156 147</a:t>
             </a:r>
-            <a:endParaRPr lang="pt-BR" altLang="en-US" sz="1600">
-              <a:latin typeface="Courier New" panose="02070309020205020404" pitchFamily="49" charset="0"/>
-            </a:endParaRPr>
           </a:p>
           <a:p>
             <a:pPr>
@@ -21867,9 +21592,6 @@
               </a:rPr>
               <a:t>          a   v   a   /   l   a   n   g</a:t>
             </a:r>
-            <a:endParaRPr lang="pt-BR" altLang="en-US" sz="1600">
-              <a:latin typeface="Courier New" panose="02070309020205020404" pitchFamily="49" charset="0"/>
-            </a:endParaRPr>
           </a:p>
           <a:p>
             <a:pPr>
@@ -21885,9 +21607,6 @@
               </a:rPr>
               <a:t>0000650 057 123 164 162 151 156 147 102</a:t>
             </a:r>
-            <a:endParaRPr lang="pt-BR" altLang="en-US" sz="1600">
-              <a:latin typeface="Courier New" panose="02070309020205020404" pitchFamily="49" charset="0"/>
-            </a:endParaRPr>
           </a:p>
           <a:p>
             <a:pPr>
@@ -21903,9 +21622,6 @@
               </a:rPr>
               <a:t>          /   S   t   r   i   n   g   B</a:t>
             </a:r>
-            <a:endParaRPr lang="pt-BR" altLang="en-US" sz="1600">
-              <a:latin typeface="Courier New" panose="02070309020205020404" pitchFamily="49" charset="0"/>
-            </a:endParaRPr>
           </a:p>
           <a:p>
             <a:pPr>
@@ -21921,9 +21637,6 @@
               </a:rPr>
               <a:t>0000660 165 151 154 144 145 162 014 000</a:t>
             </a:r>
-            <a:endParaRPr lang="pt-BR" altLang="en-US" sz="1600">
-              <a:latin typeface="Courier New" panose="02070309020205020404" pitchFamily="49" charset="0"/>
-            </a:endParaRPr>
           </a:p>
           <a:p>
             <a:pPr>
@@ -21939,9 +21652,6 @@
               </a:rPr>
               <a:t>          u   i   l   d   e   r  \f  \0</a:t>
             </a:r>
-            <a:endParaRPr lang="pt-BR" altLang="en-US" sz="1600">
-              <a:latin typeface="Courier New" panose="02070309020205020404" pitchFamily="49" charset="0"/>
-            </a:endParaRPr>
           </a:p>
           <a:p>
             <a:pPr>
@@ -22092,6 +21802,7 @@
             </a:pPr>
             <a:fld id="{A01CA5F2-CD08-4EF5-BAD9-872B7BB27165}" type="slidenum">
               <a:rPr lang="en-US" altLang="en-US" smtClean="0"/>
+              <a:t>9</a:t>
             </a:fld>
             <a:endParaRPr lang="en-US" altLang="en-US"/>
           </a:p>
@@ -22113,7 +21824,7 @@
 </file>
 
 <file path=ppt/tags/tag1.xml><?xml version="1.0" encoding="utf-8"?>
-<p:tagLst xmlns:p="http://schemas.openxmlformats.org/presentationml/2006/main">
+<p:tagLst xmlns:a="http://schemas.openxmlformats.org/drawingml/2006/main" xmlns:r="http://schemas.openxmlformats.org/officeDocument/2006/relationships" xmlns:p="http://schemas.openxmlformats.org/presentationml/2006/main">
   <p:tag name="TABLE_ENDDRAG_ORIGIN_RECT" val="723*370"/>
   <p:tag name="TABLE_ENDDRAG_RECT" val="108*18*723*370"/>
 </p:tagLst>
@@ -22370,6 +22081,8 @@
       </a:bgFillStyleLst>
     </a:fmtScheme>
   </a:themeElements>
+  <a:objectDefaults/>
+  <a:extraClrSchemeLst/>
   <a:extLst>
     <a:ext uri="{05A4C25C-085E-4340-85A3-A5531E510DB2}">
       <thm15:themeFamily xmlns:thm15="http://schemas.microsoft.com/office/thememl/2012/main" name="Office Theme" id="{62F939B6-93AF-4DB8-9C6B-D6C7DFDC589F}" vid="{4A3C46E8-61CC-4603-A589-7422A47A8E4A}"/>
@@ -22658,6 +22371,8 @@
       </a:bgFillStyleLst>
     </a:fmtScheme>
   </a:themeElements>
+  <a:objectDefaults/>
+  <a:extraClrSchemeLst/>
   <a:extLst>
     <a:ext uri="{05A4C25C-085E-4340-85A3-A5531E510DB2}">
       <thm15:themeFamily xmlns:thm15="http://schemas.microsoft.com/office/thememl/2012/main" name="Office Theme" id="{62F939B6-93AF-4DB8-9C6B-D6C7DFDC589F}" vid="{4A3C46E8-61CC-4603-A589-7422A47A8E4A}"/>
@@ -22917,6 +22632,8 @@
       </a:bgFillStyleLst>
     </a:fmtScheme>
   </a:themeElements>
+  <a:objectDefaults/>
+  <a:extraClrSchemeLst/>
   <a:extLst>
     <a:ext uri="{05A4C25C-085E-4340-85A3-A5531E510DB2}">
       <thm15:themeFamily xmlns:thm15="http://schemas.microsoft.com/office/thememl/2012/main" name="Office Theme" id="{62F939B6-93AF-4DB8-9C6B-D6C7DFDC589F}" vid="{4A3C46E8-61CC-4603-A589-7422A47A8E4A}"/>

--- a/COURSE MATERIALS/Module 2_CSE2503.pptx
+++ b/COURSE MATERIALS/Module 2_CSE2503.pptx
@@ -308,7 +308,7 @@
           <a:p>
             <a:fld id="{1D5163DD-12C9-4B8E-91F3-BECE4B548A1F}" type="datetimeFigureOut">
               <a:rPr lang="en-US" smtClean="0"/>
-              <a:t>2/6/2026</a:t>
+              <a:t>2/23/2026</a:t>
             </a:fld>
             <a:endParaRPr lang="en-US"/>
           </a:p>
@@ -482,7 +482,7 @@
             </a:pPr>
             <a:fld id="{B35E0ABE-3FD2-4491-A84F-F5DF78F574D2}" type="datetimeFigureOut">
               <a:rPr lang="en-US"/>
-              <a:t>2/6/2026</a:t>
+              <a:t>2/23/2026</a:t>
             </a:fld>
             <a:endParaRPr lang="en-US"/>
           </a:p>
@@ -4308,7 +4308,7 @@
             </a:pPr>
             <a:fld id="{B338DF3D-30B5-4203-9F61-4DF4C93549F9}" type="datetime1">
               <a:rPr lang="en-US" smtClean="0"/>
-              <a:t>2/6/2026</a:t>
+              <a:t>2/23/2026</a:t>
             </a:fld>
             <a:endParaRPr lang="en-US"/>
           </a:p>
@@ -4498,7 +4498,7 @@
             </a:pPr>
             <a:fld id="{9EF852DC-FA04-43A8-808A-7B02012B408F}" type="datetime1">
               <a:rPr lang="en-US" smtClean="0"/>
-              <a:t>2/6/2026</a:t>
+              <a:t>2/23/2026</a:t>
             </a:fld>
             <a:endParaRPr lang="en-US"/>
           </a:p>
@@ -4698,7 +4698,7 @@
             </a:pPr>
             <a:fld id="{B2285DBF-07E6-4C04-8128-7BB2323544A4}" type="datetime1">
               <a:rPr lang="en-US" smtClean="0"/>
-              <a:t>2/6/2026</a:t>
+              <a:t>2/23/2026</a:t>
             </a:fld>
             <a:endParaRPr lang="en-US"/>
           </a:p>
@@ -4888,7 +4888,7 @@
             </a:pPr>
             <a:fld id="{335B14D7-8BA9-4EE1-835E-4199F7C88E61}" type="datetime1">
               <a:rPr lang="en-US" smtClean="0"/>
-              <a:t>2/6/2026</a:t>
+              <a:t>2/23/2026</a:t>
             </a:fld>
             <a:endParaRPr lang="en-US"/>
           </a:p>
@@ -5154,7 +5154,7 @@
             </a:pPr>
             <a:fld id="{C04ACBE5-8387-44C2-8244-3C027748E0C1}" type="datetime1">
               <a:rPr lang="en-US" smtClean="0"/>
-              <a:t>2/6/2026</a:t>
+              <a:t>2/23/2026</a:t>
             </a:fld>
             <a:endParaRPr lang="en-US"/>
           </a:p>
@@ -5406,7 +5406,7 @@
             </a:pPr>
             <a:fld id="{BE333E74-61D9-4270-845E-08C577B4746D}" type="datetime1">
               <a:rPr lang="en-US" smtClean="0"/>
-              <a:t>2/6/2026</a:t>
+              <a:t>2/23/2026</a:t>
             </a:fld>
             <a:endParaRPr lang="en-US"/>
           </a:p>
@@ -5793,7 +5793,7 @@
             </a:pPr>
             <a:fld id="{122D354B-A90F-4649-BCD0-7311B9A1E519}" type="datetime1">
               <a:rPr lang="en-US" smtClean="0"/>
-              <a:t>2/6/2026</a:t>
+              <a:t>2/23/2026</a:t>
             </a:fld>
             <a:endParaRPr lang="en-US"/>
           </a:p>
@@ -5931,7 +5931,7 @@
             </a:pPr>
             <a:fld id="{F25BB299-A05B-4721-910A-149978AA2F99}" type="datetime1">
               <a:rPr lang="en-US" smtClean="0"/>
-              <a:t>2/6/2026</a:t>
+              <a:t>2/23/2026</a:t>
             </a:fld>
             <a:endParaRPr lang="en-US"/>
           </a:p>
@@ -6046,7 +6046,7 @@
             </a:pPr>
             <a:fld id="{B485C664-8172-4B0B-91AD-99832E49CA68}" type="datetime1">
               <a:rPr lang="en-US" smtClean="0"/>
-              <a:t>2/6/2026</a:t>
+              <a:t>2/23/2026</a:t>
             </a:fld>
             <a:endParaRPr lang="en-US"/>
           </a:p>
@@ -6343,7 +6343,7 @@
             </a:pPr>
             <a:fld id="{A39FEB66-1999-4885-9013-09B59463BA52}" type="datetime1">
               <a:rPr lang="en-US" smtClean="0"/>
-              <a:t>2/6/2026</a:t>
+              <a:t>2/23/2026</a:t>
             </a:fld>
             <a:endParaRPr lang="en-US"/>
           </a:p>
@@ -6623,7 +6623,7 @@
             </a:pPr>
             <a:fld id="{E228574B-A9ED-4C5D-BC0D-2EE4E2CF73B9}" type="datetime1">
               <a:rPr lang="en-US" smtClean="0"/>
-              <a:t>2/6/2026</a:t>
+              <a:t>2/23/2026</a:t>
             </a:fld>
             <a:endParaRPr lang="en-US"/>
           </a:p>
@@ -6893,7 +6893,7 @@
             </a:pPr>
             <a:fld id="{7290EFBF-FDBC-4E11-8D09-14402F29F22D}" type="datetime1">
               <a:rPr lang="en-US" smtClean="0"/>
-              <a:t>2/6/2026</a:t>
+              <a:t>2/23/2026</a:t>
             </a:fld>
             <a:endParaRPr lang="en-US"/>
           </a:p>
@@ -8619,7 +8619,7 @@
           <a:graphicData uri="http://schemas.openxmlformats.org/presentationml/2006/ole">
             <mc:AlternateContent xmlns:mc="http://schemas.openxmlformats.org/markup-compatibility/2006">
               <mc:Choice xmlns:v="urn:schemas-microsoft-com:vml" Requires="v">
-                <p:oleObj spid="_x0000_s1026" r:id="rId3" imgW="9525000" imgH="4705350" progId="Paint.Picture">
+                <p:oleObj spid="_x0000_s1027" r:id="rId3" imgW="9525000" imgH="4705350" progId="Paint.Picture">
                   <p:embed/>
                 </p:oleObj>
               </mc:Choice>
@@ -8774,7 +8774,7 @@
           <a:graphicData uri="http://schemas.openxmlformats.org/presentationml/2006/ole">
             <mc:AlternateContent xmlns:mc="http://schemas.openxmlformats.org/markup-compatibility/2006">
               <mc:Choice xmlns:v="urn:schemas-microsoft-com:vml" Requires="v">
-                <p:oleObj spid="_x0000_s2050" r:id="rId3" imgW="4000500" imgH="2552700" progId="Paint.Picture">
+                <p:oleObj spid="_x0000_s2051" r:id="rId3" imgW="4000500" imgH="2552700" progId="Paint.Picture">
                   <p:embed/>
                 </p:oleObj>
               </mc:Choice>
@@ -8981,7 +8981,7 @@
           <a:graphicData uri="http://schemas.openxmlformats.org/presentationml/2006/ole">
             <mc:AlternateContent xmlns:mc="http://schemas.openxmlformats.org/markup-compatibility/2006">
               <mc:Choice xmlns:v="urn:schemas-microsoft-com:vml" Requires="v">
-                <p:oleObj spid="_x0000_s3074" r:id="rId3" imgW="7880350" imgH="4699000" progId="Paint.Picture">
+                <p:oleObj spid="_x0000_s3075" r:id="rId3" imgW="7880350" imgH="4699000" progId="Paint.Picture">
                   <p:embed/>
                 </p:oleObj>
               </mc:Choice>
@@ -9377,7 +9377,7 @@
           <a:graphicData uri="http://schemas.openxmlformats.org/presentationml/2006/ole">
             <mc:AlternateContent xmlns:mc="http://schemas.openxmlformats.org/markup-compatibility/2006">
               <mc:Choice xmlns:v="urn:schemas-microsoft-com:vml" Requires="v">
-                <p:oleObj spid="_x0000_s4098" r:id="rId3" imgW="5727700" imgH="1771650" progId="Paint.Picture">
+                <p:oleObj spid="_x0000_s4099" r:id="rId3" imgW="5727700" imgH="1771650" progId="Paint.Picture">
                   <p:embed/>
                 </p:oleObj>
               </mc:Choice>
@@ -10132,7 +10132,7 @@
           <a:graphicData uri="http://schemas.openxmlformats.org/presentationml/2006/ole">
             <mc:AlternateContent xmlns:mc="http://schemas.openxmlformats.org/markup-compatibility/2006">
               <mc:Choice xmlns:v="urn:schemas-microsoft-com:vml" Requires="v">
-                <p:oleObj spid="_x0000_s5123" r:id="rId3" imgW="6604000" imgH="4203700" progId="Paint.Picture">
+                <p:oleObj spid="_x0000_s5125" r:id="rId3" imgW="6604000" imgH="4203700" progId="Paint.Picture">
                   <p:embed/>
                 </p:oleObj>
               </mc:Choice>
@@ -10185,7 +10185,7 @@
           <a:graphicData uri="http://schemas.openxmlformats.org/presentationml/2006/ole">
             <mc:AlternateContent xmlns:mc="http://schemas.openxmlformats.org/markup-compatibility/2006">
               <mc:Choice xmlns:v="urn:schemas-microsoft-com:vml" Requires="v">
-                <p:oleObj spid="_x0000_s5124" showAsIcon="1" r:id="rId5" imgW="971550" imgH="971550" progId="Package">
+                <p:oleObj spid="_x0000_s5126" showAsIcon="1" r:id="rId5" imgW="971550" imgH="971550" progId="Package">
                   <p:embed/>
                 </p:oleObj>
               </mc:Choice>
@@ -10572,7 +10572,7 @@
           <a:graphicData uri="http://schemas.openxmlformats.org/presentationml/2006/ole">
             <mc:AlternateContent xmlns:mc="http://schemas.openxmlformats.org/markup-compatibility/2006">
               <mc:Choice xmlns:v="urn:schemas-microsoft-com:vml" Requires="v">
-                <p:oleObj spid="_x0000_s6146" r:id="rId3" imgW="7181850" imgH="5099050" progId="Paint.Picture">
+                <p:oleObj spid="_x0000_s6147" r:id="rId3" imgW="7181850" imgH="5099050" progId="Paint.Picture">
                   <p:embed/>
                 </p:oleObj>
               </mc:Choice>
@@ -10732,7 +10732,7 @@
           <a:graphicData uri="http://schemas.openxmlformats.org/presentationml/2006/ole">
             <mc:AlternateContent xmlns:mc="http://schemas.openxmlformats.org/markup-compatibility/2006">
               <mc:Choice xmlns:v="urn:schemas-microsoft-com:vml" Requires="v">
-                <p:oleObj spid="_x0000_s7170" r:id="rId3" imgW="3225800" imgH="2717800" progId="Paint.Picture">
+                <p:oleObj spid="_x0000_s7171" r:id="rId3" imgW="3225800" imgH="2717800" progId="Paint.Picture">
                   <p:embed/>
                 </p:oleObj>
               </mc:Choice>
@@ -14463,7 +14463,7 @@
           <a:graphicData uri="http://schemas.openxmlformats.org/presentationml/2006/ole">
             <mc:AlternateContent xmlns:mc="http://schemas.openxmlformats.org/markup-compatibility/2006">
               <mc:Choice xmlns:v="urn:schemas-microsoft-com:vml" Requires="v">
-                <p:oleObj spid="_x0000_s8194" r:id="rId4" imgW="7734300" imgH="3886200" progId="Paint.Picture">
+                <p:oleObj spid="_x0000_s8195" r:id="rId4" imgW="7734300" imgH="3886200" progId="Paint.Picture">
                   <p:embed/>
                 </p:oleObj>
               </mc:Choice>
@@ -14611,7 +14611,7 @@
           <a:graphicData uri="http://schemas.openxmlformats.org/presentationml/2006/ole">
             <mc:AlternateContent xmlns:mc="http://schemas.openxmlformats.org/markup-compatibility/2006">
               <mc:Choice xmlns:v="urn:schemas-microsoft-com:vml" Requires="v">
-                <p:oleObj spid="_x0000_s9219" r:id="rId3" imgW="4387850" imgH="615950" progId="Paint.Picture">
+                <p:oleObj spid="_x0000_s9221" r:id="rId3" imgW="4387850" imgH="615950" progId="Paint.Picture">
                   <p:embed/>
                 </p:oleObj>
               </mc:Choice>
@@ -14664,7 +14664,7 @@
           <a:graphicData uri="http://schemas.openxmlformats.org/presentationml/2006/ole">
             <mc:AlternateContent xmlns:mc="http://schemas.openxmlformats.org/markup-compatibility/2006">
               <mc:Choice xmlns:v="urn:schemas-microsoft-com:vml" Requires="v">
-                <p:oleObj spid="_x0000_s9220" showAsIcon="1" r:id="rId5" imgW="971550" imgH="971550" progId="Package">
+                <p:oleObj spid="_x0000_s9222" showAsIcon="1" r:id="rId5" imgW="971550" imgH="971550" progId="Package">
                   <p:embed/>
                 </p:oleObj>
               </mc:Choice>
@@ -14800,7 +14800,7 @@
           <a:graphicData uri="http://schemas.openxmlformats.org/presentationml/2006/ole">
             <mc:AlternateContent xmlns:mc="http://schemas.openxmlformats.org/markup-compatibility/2006">
               <mc:Choice xmlns:v="urn:schemas-microsoft-com:vml" Requires="v">
-                <p:oleObj spid="_x0000_s10242" r:id="rId3" imgW="6819900" imgH="3613150" progId="Paint.Picture">
+                <p:oleObj spid="_x0000_s10243" r:id="rId3" imgW="6819900" imgH="3613150" progId="Paint.Picture">
                   <p:embed/>
                 </p:oleObj>
               </mc:Choice>
@@ -14922,7 +14922,7 @@
           <a:graphicData uri="http://schemas.openxmlformats.org/presentationml/2006/ole">
             <mc:AlternateContent xmlns:mc="http://schemas.openxmlformats.org/markup-compatibility/2006">
               <mc:Choice xmlns:v="urn:schemas-microsoft-com:vml" Requires="v">
-                <p:oleObj spid="_x0000_s11267" r:id="rId3" imgW="5156200" imgH="596900" progId="Paint.Picture">
+                <p:oleObj spid="_x0000_s11269" r:id="rId3" imgW="5156200" imgH="596900" progId="Paint.Picture">
                   <p:embed/>
                 </p:oleObj>
               </mc:Choice>
@@ -14975,7 +14975,7 @@
           <a:graphicData uri="http://schemas.openxmlformats.org/presentationml/2006/ole">
             <mc:AlternateContent xmlns:mc="http://schemas.openxmlformats.org/markup-compatibility/2006">
               <mc:Choice xmlns:v="urn:schemas-microsoft-com:vml" Requires="v">
-                <p:oleObj spid="_x0000_s11268" showAsIcon="1" r:id="rId5" imgW="971550" imgH="971550" progId="Package">
+                <p:oleObj spid="_x0000_s11270" showAsIcon="1" r:id="rId5" imgW="971550" imgH="971550" progId="Package">
                   <p:embed/>
                 </p:oleObj>
               </mc:Choice>
@@ -16794,7 +16794,7 @@
           <a:graphicData uri="http://schemas.openxmlformats.org/presentationml/2006/ole">
             <mc:AlternateContent xmlns:mc="http://schemas.openxmlformats.org/markup-compatibility/2006">
               <mc:Choice xmlns:v="urn:schemas-microsoft-com:vml" Requires="v">
-                <p:oleObj spid="_x0000_s12290" r:id="rId3" imgW="5886450" imgH="4711700" progId="Paint.Picture">
+                <p:oleObj spid="_x0000_s12291" r:id="rId3" imgW="5886450" imgH="4711700" progId="Paint.Picture">
                   <p:embed/>
                 </p:oleObj>
               </mc:Choice>
@@ -16920,7 +16920,7 @@
           <a:graphicData uri="http://schemas.openxmlformats.org/presentationml/2006/ole">
             <mc:AlternateContent xmlns:mc="http://schemas.openxmlformats.org/markup-compatibility/2006">
               <mc:Choice xmlns:v="urn:schemas-microsoft-com:vml" Requires="v">
-                <p:oleObj spid="_x0000_s13314" r:id="rId3" imgW="7283450" imgH="5327650" progId="Paint.Picture">
+                <p:oleObj spid="_x0000_s13315" r:id="rId3" imgW="7283450" imgH="5327650" progId="Paint.Picture">
                   <p:embed/>
                 </p:oleObj>
               </mc:Choice>
@@ -17110,7 +17110,7 @@
           <a:graphicData uri="http://schemas.openxmlformats.org/presentationml/2006/ole">
             <mc:AlternateContent xmlns:mc="http://schemas.openxmlformats.org/markup-compatibility/2006">
               <mc:Choice xmlns:v="urn:schemas-microsoft-com:vml" Requires="v">
-                <p:oleObj spid="_x0000_s14338" r:id="rId3" imgW="5962650" imgH="4616450" progId="Paint.Picture">
+                <p:oleObj spid="_x0000_s14339" r:id="rId3" imgW="5962650" imgH="4616450" progId="Paint.Picture">
                   <p:embed/>
                 </p:oleObj>
               </mc:Choice>
@@ -17302,7 +17302,7 @@
           <a:graphicData uri="http://schemas.openxmlformats.org/presentationml/2006/ole">
             <mc:AlternateContent xmlns:mc="http://schemas.openxmlformats.org/markup-compatibility/2006">
               <mc:Choice xmlns:v="urn:schemas-microsoft-com:vml" Requires="v">
-                <p:oleObj spid="_x0000_s15362" r:id="rId3" imgW="4826000" imgH="2997200" progId="Paint.Picture">
+                <p:oleObj spid="_x0000_s15363" r:id="rId3" imgW="4826000" imgH="2997200" progId="Paint.Picture">
                   <p:embed/>
                 </p:oleObj>
               </mc:Choice>
@@ -17428,7 +17428,7 @@
           <a:graphicData uri="http://schemas.openxmlformats.org/presentationml/2006/ole">
             <mc:AlternateContent xmlns:mc="http://schemas.openxmlformats.org/markup-compatibility/2006">
               <mc:Choice xmlns:v="urn:schemas-microsoft-com:vml" Requires="v">
-                <p:oleObj spid="_x0000_s16386" r:id="rId3" imgW="6242050" imgH="4451350" progId="Paint.Picture">
+                <p:oleObj spid="_x0000_s16387" r:id="rId3" imgW="6242050" imgH="4451350" progId="Paint.Picture">
                   <p:embed/>
                 </p:oleObj>
               </mc:Choice>
@@ -20612,32 +20612,6 @@
       </p:sp>
       <p:sp>
         <p:nvSpPr>
-          <p:cNvPr id="4" name="Footer Placeholder 3"/>
-          <p:cNvSpPr>
-            <a:spLocks noGrp="1"/>
-          </p:cNvSpPr>
-          <p:nvPr>
-            <p:ph type="ftr" sz="quarter" idx="11"/>
-          </p:nvPr>
-        </p:nvSpPr>
-        <p:spPr/>
-        <p:txBody>
-          <a:bodyPr/>
-          <a:lstStyle/>
-          <a:p>
-            <a:pPr>
-              <a:defRPr/>
-            </a:pPr>
-            <a:r>
-              <a:rPr lang="en-US" smtClean="0"/>
-              <a:t>Mr. R C Ravindranath, Asst. Prof, SOE-CSE</a:t>
-            </a:r>
-            <a:endParaRPr lang="en-US"/>
-          </a:p>
-        </p:txBody>
-      </p:sp>
-      <p:sp>
-        <p:nvSpPr>
           <p:cNvPr id="5" name="Slide Number Placeholder 4"/>
           <p:cNvSpPr>
             <a:spLocks noGrp="1"/>
@@ -20667,6 +20641,13 @@
   <p:clrMapOvr>
     <a:masterClrMapping/>
   </p:clrMapOvr>
+  <p:timing>
+    <p:tnLst>
+      <p:par>
+        <p:cTn id="1" dur="indefinite" restart="never" nodeType="tmRoot"/>
+      </p:par>
+    </p:tnLst>
+  </p:timing>
 </p:sld>
 </file>
 
@@ -20689,32 +20670,6 @@
       </p:grpSpPr>
       <p:sp>
         <p:nvSpPr>
-          <p:cNvPr id="4" name="Footer Placeholder 3"/>
-          <p:cNvSpPr>
-            <a:spLocks noGrp="1"/>
-          </p:cNvSpPr>
-          <p:nvPr>
-            <p:ph type="ftr" sz="quarter" idx="11"/>
-          </p:nvPr>
-        </p:nvSpPr>
-        <p:spPr/>
-        <p:txBody>
-          <a:bodyPr/>
-          <a:lstStyle/>
-          <a:p>
-            <a:pPr>
-              <a:defRPr/>
-            </a:pPr>
-            <a:r>
-              <a:rPr lang="en-US" smtClean="0"/>
-              <a:t>Mr. R C Ravindranath, Asst. Prof, SOE-CSE</a:t>
-            </a:r>
-            <a:endParaRPr lang="en-US"/>
-          </a:p>
-        </p:txBody>
-      </p:sp>
-      <p:sp>
-        <p:nvSpPr>
           <p:cNvPr id="5" name="Slide Number Placeholder 4"/>
           <p:cNvSpPr>
             <a:spLocks noGrp="1"/>
@@ -20753,7 +20708,7 @@
           <a:graphicData uri="http://schemas.openxmlformats.org/presentationml/2006/ole">
             <mc:AlternateContent xmlns:mc="http://schemas.openxmlformats.org/markup-compatibility/2006">
               <mc:Choice xmlns:v="urn:schemas-microsoft-com:vml" Requires="v">
-                <p:oleObj spid="_x0000_s17410" r:id="rId3" imgW="10496550" imgH="4692650" progId="Paint.Picture">
+                <p:oleObj spid="_x0000_s17411" r:id="rId3" imgW="10496550" imgH="4692650" progId="Paint.Picture">
                   <p:embed/>
                 </p:oleObj>
               </mc:Choice>
@@ -20793,6 +20748,13 @@
   <p:clrMapOvr>
     <a:masterClrMapping/>
   </p:clrMapOvr>
+  <p:timing>
+    <p:tnLst>
+      <p:par>
+        <p:cTn id="1" dur="indefinite" restart="never" nodeType="tmRoot"/>
+      </p:par>
+    </p:tnLst>
+  </p:timing>
 </p:sld>
 </file>
 
@@ -20815,32 +20777,6 @@
       </p:grpSpPr>
       <p:sp>
         <p:nvSpPr>
-          <p:cNvPr id="4" name="Footer Placeholder 3"/>
-          <p:cNvSpPr>
-            <a:spLocks noGrp="1"/>
-          </p:cNvSpPr>
-          <p:nvPr>
-            <p:ph type="ftr" sz="quarter" idx="11"/>
-          </p:nvPr>
-        </p:nvSpPr>
-        <p:spPr/>
-        <p:txBody>
-          <a:bodyPr/>
-          <a:lstStyle/>
-          <a:p>
-            <a:pPr>
-              <a:defRPr/>
-            </a:pPr>
-            <a:r>
-              <a:rPr lang="en-US" smtClean="0"/>
-              <a:t>Mr. R C Ravindranath, Asst. Prof, SOE-CSE</a:t>
-            </a:r>
-            <a:endParaRPr lang="en-US"/>
-          </a:p>
-        </p:txBody>
-      </p:sp>
-      <p:sp>
-        <p:nvSpPr>
           <p:cNvPr id="5" name="Slide Number Placeholder 4"/>
           <p:cNvSpPr>
             <a:spLocks noGrp="1"/>
@@ -20879,7 +20815,7 @@
           <a:graphicData uri="http://schemas.openxmlformats.org/presentationml/2006/ole">
             <mc:AlternateContent xmlns:mc="http://schemas.openxmlformats.org/markup-compatibility/2006">
               <mc:Choice xmlns:v="urn:schemas-microsoft-com:vml" Requires="v">
-                <p:oleObj spid="_x0000_s18434" r:id="rId3" imgW="5867400" imgH="3752850" progId="Paint.Picture">
+                <p:oleObj spid="_x0000_s18435" r:id="rId3" imgW="5867400" imgH="3752850" progId="Paint.Picture">
                   <p:embed/>
                 </p:oleObj>
               </mc:Choice>
@@ -20919,6 +20855,13 @@
   <p:clrMapOvr>
     <a:masterClrMapping/>
   </p:clrMapOvr>
+  <p:timing>
+    <p:tnLst>
+      <p:par>
+        <p:cTn id="1" dur="indefinite" restart="never" nodeType="tmRoot"/>
+      </p:par>
+    </p:tnLst>
+  </p:timing>
 </p:sld>
 </file>
 
